--- a/PPT/딥러닝.pptx
+++ b/PPT/딥러닝.pptx
@@ -5,7 +5,7 @@
     <p:sldMasterId id="2147483648" r:id="rId1"/>
   </p:sldMasterIdLst>
   <p:notesMasterIdLst>
-    <p:notesMasterId r:id="rId21"/>
+    <p:notesMasterId r:id="rId27"/>
   </p:notesMasterIdLst>
   <p:sldIdLst>
     <p:sldId id="334" r:id="rId2"/>
@@ -26,7 +26,13 @@
     <p:sldId id="381" r:id="rId17"/>
     <p:sldId id="382" r:id="rId18"/>
     <p:sldId id="383" r:id="rId19"/>
-    <p:sldId id="321" r:id="rId20"/>
+    <p:sldId id="384" r:id="rId20"/>
+    <p:sldId id="385" r:id="rId21"/>
+    <p:sldId id="386" r:id="rId22"/>
+    <p:sldId id="387" r:id="rId23"/>
+    <p:sldId id="388" r:id="rId24"/>
+    <p:sldId id="389" r:id="rId25"/>
+    <p:sldId id="321" r:id="rId26"/>
   </p:sldIdLst>
   <p:sldSz cx="9144000" cy="6858000" type="screen4x3"/>
   <p:notesSz cx="6858000" cy="9144000"/>
@@ -230,7 +236,7 @@
             <a:fld id="{65771C21-3757-4199-83DE-22960358A2A5}" type="datetimeFigureOut">
               <a:rPr lang="ko-KR" altLang="en-US" smtClean="0"/>
               <a:pPr/>
-              <a:t>2026-05-19</a:t>
+              <a:t>2026-05-22</a:t>
             </a:fld>
             <a:endParaRPr lang="ko-KR" altLang="en-US"/>
           </a:p>
@@ -1600,7 +1606,118 @@
     </p:spTree>
     <p:extLst>
       <p:ext uri="{BB962C8B-B14F-4D97-AF65-F5344CB8AC3E}">
-        <p14:creationId xmlns:p14="http://schemas.microsoft.com/office/powerpoint/2010/main" val="3557393855"/>
+        <p14:creationId xmlns:p14="http://schemas.microsoft.com/office/powerpoint/2010/main" val="2336932230"/>
+      </p:ext>
+    </p:extLst>
+  </p:cSld>
+  <p:clrMapOvr>
+    <a:masterClrMapping/>
+  </p:clrMapOvr>
+</p:notes>
+</file>
+
+<file path=ppt/notesSlides/notesSlide19.xml><?xml version="1.0" encoding="utf-8"?>
+<p:notes xmlns:a="http://schemas.openxmlformats.org/drawingml/2006/main" xmlns:r="http://schemas.openxmlformats.org/officeDocument/2006/relationships" xmlns:p="http://schemas.openxmlformats.org/presentationml/2006/main">
+  <p:cSld>
+    <p:spTree>
+      <p:nvGrpSpPr>
+        <p:cNvPr id="1" name=""/>
+        <p:cNvGrpSpPr/>
+        <p:nvPr/>
+      </p:nvGrpSpPr>
+      <p:grpSpPr>
+        <a:xfrm>
+          <a:off x="0" y="0"/>
+          <a:ext cx="0" cy="0"/>
+          <a:chOff x="0" y="0"/>
+          <a:chExt cx="0" cy="0"/>
+        </a:xfrm>
+      </p:grpSpPr>
+      <p:sp>
+        <p:nvSpPr>
+          <p:cNvPr id="2" name="슬라이드 이미지 개체 틀 1"/>
+          <p:cNvSpPr>
+            <a:spLocks noGrp="1" noRot="1" noChangeAspect="1"/>
+          </p:cNvSpPr>
+          <p:nvPr>
+            <p:ph type="sldImg"/>
+          </p:nvPr>
+        </p:nvSpPr>
+        <p:spPr/>
+      </p:sp>
+      <p:sp>
+        <p:nvSpPr>
+          <p:cNvPr id="3" name="슬라이드 노트 개체 틀 2"/>
+          <p:cNvSpPr>
+            <a:spLocks noGrp="1"/>
+          </p:cNvSpPr>
+          <p:nvPr>
+            <p:ph type="body" idx="1"/>
+          </p:nvPr>
+        </p:nvSpPr>
+        <p:spPr/>
+        <p:txBody>
+          <a:bodyPr>
+            <a:normAutofit/>
+          </a:bodyPr>
+          <a:lstStyle/>
+          <a:p>
+            <a:pPr marL="0" marR="0" indent="0" algn="l" defTabSz="914400" rtl="0" eaLnBrk="1" fontAlgn="auto" latinLnBrk="1" hangingPunct="1">
+              <a:lnSpc>
+                <a:spcPct val="100000"/>
+              </a:lnSpc>
+              <a:spcBef>
+                <a:spcPts val="0"/>
+              </a:spcBef>
+              <a:spcAft>
+                <a:spcPts val="0"/>
+              </a:spcAft>
+              <a:buClrTx/>
+              <a:buSzTx/>
+              <a:buFontTx/>
+              <a:buNone/>
+              <a:tabLst/>
+              <a:defRPr/>
+            </a:pPr>
+            <a:r>
+              <a:rPr lang="en-US" altLang="ko-KR" sz="1200" dirty="0"/>
+              <a:t>http://minheeblog.tistory.com/category/PPT</a:t>
+            </a:r>
+            <a:endParaRPr lang="ko-KR" altLang="en-US" sz="1200" dirty="0"/>
+          </a:p>
+          <a:p>
+            <a:endParaRPr lang="ko-KR" altLang="en-US" dirty="0"/>
+          </a:p>
+        </p:txBody>
+      </p:sp>
+      <p:sp>
+        <p:nvSpPr>
+          <p:cNvPr id="4" name="슬라이드 번호 개체 틀 3"/>
+          <p:cNvSpPr>
+            <a:spLocks noGrp="1"/>
+          </p:cNvSpPr>
+          <p:nvPr>
+            <p:ph type="sldNum" sz="quarter" idx="10"/>
+          </p:nvPr>
+        </p:nvSpPr>
+        <p:spPr/>
+        <p:txBody>
+          <a:bodyPr/>
+          <a:lstStyle/>
+          <a:p>
+            <a:fld id="{04A4E647-5A0F-41E6-A0EF-B58D8C1C6CD4}" type="slidenum">
+              <a:rPr lang="ko-KR" altLang="en-US" smtClean="0"/>
+              <a:pPr/>
+              <a:t>20</a:t>
+            </a:fld>
+            <a:endParaRPr lang="ko-KR" altLang="en-US"/>
+          </a:p>
+        </p:txBody>
+      </p:sp>
+    </p:spTree>
+    <p:extLst>
+      <p:ext uri="{BB962C8B-B14F-4D97-AF65-F5344CB8AC3E}">
+        <p14:creationId xmlns:p14="http://schemas.microsoft.com/office/powerpoint/2010/main" val="898512870"/>
       </p:ext>
     </p:extLst>
   </p:cSld>
@@ -1712,6 +1829,561 @@
     <p:extLst>
       <p:ext uri="{BB962C8B-B14F-4D97-AF65-F5344CB8AC3E}">
         <p14:creationId xmlns:p14="http://schemas.microsoft.com/office/powerpoint/2010/main" val="3316659066"/>
+      </p:ext>
+    </p:extLst>
+  </p:cSld>
+  <p:clrMapOvr>
+    <a:masterClrMapping/>
+  </p:clrMapOvr>
+</p:notes>
+</file>
+
+<file path=ppt/notesSlides/notesSlide20.xml><?xml version="1.0" encoding="utf-8"?>
+<p:notes xmlns:a="http://schemas.openxmlformats.org/drawingml/2006/main" xmlns:r="http://schemas.openxmlformats.org/officeDocument/2006/relationships" xmlns:p="http://schemas.openxmlformats.org/presentationml/2006/main">
+  <p:cSld>
+    <p:spTree>
+      <p:nvGrpSpPr>
+        <p:cNvPr id="1" name=""/>
+        <p:cNvGrpSpPr/>
+        <p:nvPr/>
+      </p:nvGrpSpPr>
+      <p:grpSpPr>
+        <a:xfrm>
+          <a:off x="0" y="0"/>
+          <a:ext cx="0" cy="0"/>
+          <a:chOff x="0" y="0"/>
+          <a:chExt cx="0" cy="0"/>
+        </a:xfrm>
+      </p:grpSpPr>
+      <p:sp>
+        <p:nvSpPr>
+          <p:cNvPr id="2" name="슬라이드 이미지 개체 틀 1"/>
+          <p:cNvSpPr>
+            <a:spLocks noGrp="1" noRot="1" noChangeAspect="1"/>
+          </p:cNvSpPr>
+          <p:nvPr>
+            <p:ph type="sldImg"/>
+          </p:nvPr>
+        </p:nvSpPr>
+        <p:spPr/>
+      </p:sp>
+      <p:sp>
+        <p:nvSpPr>
+          <p:cNvPr id="3" name="슬라이드 노트 개체 틀 2"/>
+          <p:cNvSpPr>
+            <a:spLocks noGrp="1"/>
+          </p:cNvSpPr>
+          <p:nvPr>
+            <p:ph type="body" idx="1"/>
+          </p:nvPr>
+        </p:nvSpPr>
+        <p:spPr/>
+        <p:txBody>
+          <a:bodyPr>
+            <a:normAutofit/>
+          </a:bodyPr>
+          <a:lstStyle/>
+          <a:p>
+            <a:pPr marL="0" marR="0" indent="0" algn="l" defTabSz="914400" rtl="0" eaLnBrk="1" fontAlgn="auto" latinLnBrk="1" hangingPunct="1">
+              <a:lnSpc>
+                <a:spcPct val="100000"/>
+              </a:lnSpc>
+              <a:spcBef>
+                <a:spcPts val="0"/>
+              </a:spcBef>
+              <a:spcAft>
+                <a:spcPts val="0"/>
+              </a:spcAft>
+              <a:buClrTx/>
+              <a:buSzTx/>
+              <a:buFontTx/>
+              <a:buNone/>
+              <a:tabLst/>
+              <a:defRPr/>
+            </a:pPr>
+            <a:r>
+              <a:rPr lang="en-US" altLang="ko-KR" sz="1200" dirty="0"/>
+              <a:t>http://minheeblog.tistory.com/category/PPT</a:t>
+            </a:r>
+            <a:endParaRPr lang="ko-KR" altLang="en-US" sz="1200" dirty="0"/>
+          </a:p>
+          <a:p>
+            <a:endParaRPr lang="ko-KR" altLang="en-US" dirty="0"/>
+          </a:p>
+        </p:txBody>
+      </p:sp>
+      <p:sp>
+        <p:nvSpPr>
+          <p:cNvPr id="4" name="슬라이드 번호 개체 틀 3"/>
+          <p:cNvSpPr>
+            <a:spLocks noGrp="1"/>
+          </p:cNvSpPr>
+          <p:nvPr>
+            <p:ph type="sldNum" sz="quarter" idx="10"/>
+          </p:nvPr>
+        </p:nvSpPr>
+        <p:spPr/>
+        <p:txBody>
+          <a:bodyPr/>
+          <a:lstStyle/>
+          <a:p>
+            <a:fld id="{04A4E647-5A0F-41E6-A0EF-B58D8C1C6CD4}" type="slidenum">
+              <a:rPr lang="ko-KR" altLang="en-US" smtClean="0"/>
+              <a:pPr/>
+              <a:t>21</a:t>
+            </a:fld>
+            <a:endParaRPr lang="ko-KR" altLang="en-US"/>
+          </a:p>
+        </p:txBody>
+      </p:sp>
+    </p:spTree>
+    <p:extLst>
+      <p:ext uri="{BB962C8B-B14F-4D97-AF65-F5344CB8AC3E}">
+        <p14:creationId xmlns:p14="http://schemas.microsoft.com/office/powerpoint/2010/main" val="1121632381"/>
+      </p:ext>
+    </p:extLst>
+  </p:cSld>
+  <p:clrMapOvr>
+    <a:masterClrMapping/>
+  </p:clrMapOvr>
+</p:notes>
+</file>
+
+<file path=ppt/notesSlides/notesSlide21.xml><?xml version="1.0" encoding="utf-8"?>
+<p:notes xmlns:a="http://schemas.openxmlformats.org/drawingml/2006/main" xmlns:r="http://schemas.openxmlformats.org/officeDocument/2006/relationships" xmlns:p="http://schemas.openxmlformats.org/presentationml/2006/main">
+  <p:cSld>
+    <p:spTree>
+      <p:nvGrpSpPr>
+        <p:cNvPr id="1" name=""/>
+        <p:cNvGrpSpPr/>
+        <p:nvPr/>
+      </p:nvGrpSpPr>
+      <p:grpSpPr>
+        <a:xfrm>
+          <a:off x="0" y="0"/>
+          <a:ext cx="0" cy="0"/>
+          <a:chOff x="0" y="0"/>
+          <a:chExt cx="0" cy="0"/>
+        </a:xfrm>
+      </p:grpSpPr>
+      <p:sp>
+        <p:nvSpPr>
+          <p:cNvPr id="2" name="슬라이드 이미지 개체 틀 1"/>
+          <p:cNvSpPr>
+            <a:spLocks noGrp="1" noRot="1" noChangeAspect="1"/>
+          </p:cNvSpPr>
+          <p:nvPr>
+            <p:ph type="sldImg"/>
+          </p:nvPr>
+        </p:nvSpPr>
+        <p:spPr/>
+      </p:sp>
+      <p:sp>
+        <p:nvSpPr>
+          <p:cNvPr id="3" name="슬라이드 노트 개체 틀 2"/>
+          <p:cNvSpPr>
+            <a:spLocks noGrp="1"/>
+          </p:cNvSpPr>
+          <p:nvPr>
+            <p:ph type="body" idx="1"/>
+          </p:nvPr>
+        </p:nvSpPr>
+        <p:spPr/>
+        <p:txBody>
+          <a:bodyPr>
+            <a:normAutofit/>
+          </a:bodyPr>
+          <a:lstStyle/>
+          <a:p>
+            <a:pPr marL="0" marR="0" indent="0" algn="l" defTabSz="914400" rtl="0" eaLnBrk="1" fontAlgn="auto" latinLnBrk="1" hangingPunct="1">
+              <a:lnSpc>
+                <a:spcPct val="100000"/>
+              </a:lnSpc>
+              <a:spcBef>
+                <a:spcPts val="0"/>
+              </a:spcBef>
+              <a:spcAft>
+                <a:spcPts val="0"/>
+              </a:spcAft>
+              <a:buClrTx/>
+              <a:buSzTx/>
+              <a:buFontTx/>
+              <a:buNone/>
+              <a:tabLst/>
+              <a:defRPr/>
+            </a:pPr>
+            <a:r>
+              <a:rPr lang="en-US" altLang="ko-KR" sz="1200" dirty="0"/>
+              <a:t>http://minheeblog.tistory.com/category/PPT</a:t>
+            </a:r>
+            <a:endParaRPr lang="ko-KR" altLang="en-US" sz="1200" dirty="0"/>
+          </a:p>
+          <a:p>
+            <a:endParaRPr lang="ko-KR" altLang="en-US" dirty="0"/>
+          </a:p>
+        </p:txBody>
+      </p:sp>
+      <p:sp>
+        <p:nvSpPr>
+          <p:cNvPr id="4" name="슬라이드 번호 개체 틀 3"/>
+          <p:cNvSpPr>
+            <a:spLocks noGrp="1"/>
+          </p:cNvSpPr>
+          <p:nvPr>
+            <p:ph type="sldNum" sz="quarter" idx="10"/>
+          </p:nvPr>
+        </p:nvSpPr>
+        <p:spPr/>
+        <p:txBody>
+          <a:bodyPr/>
+          <a:lstStyle/>
+          <a:p>
+            <a:fld id="{04A4E647-5A0F-41E6-A0EF-B58D8C1C6CD4}" type="slidenum">
+              <a:rPr lang="ko-KR" altLang="en-US" smtClean="0"/>
+              <a:pPr/>
+              <a:t>22</a:t>
+            </a:fld>
+            <a:endParaRPr lang="ko-KR" altLang="en-US"/>
+          </a:p>
+        </p:txBody>
+      </p:sp>
+    </p:spTree>
+    <p:extLst>
+      <p:ext uri="{BB962C8B-B14F-4D97-AF65-F5344CB8AC3E}">
+        <p14:creationId xmlns:p14="http://schemas.microsoft.com/office/powerpoint/2010/main" val="2281167900"/>
+      </p:ext>
+    </p:extLst>
+  </p:cSld>
+  <p:clrMapOvr>
+    <a:masterClrMapping/>
+  </p:clrMapOvr>
+</p:notes>
+</file>
+
+<file path=ppt/notesSlides/notesSlide22.xml><?xml version="1.0" encoding="utf-8"?>
+<p:notes xmlns:a="http://schemas.openxmlformats.org/drawingml/2006/main" xmlns:r="http://schemas.openxmlformats.org/officeDocument/2006/relationships" xmlns:p="http://schemas.openxmlformats.org/presentationml/2006/main">
+  <p:cSld>
+    <p:spTree>
+      <p:nvGrpSpPr>
+        <p:cNvPr id="1" name=""/>
+        <p:cNvGrpSpPr/>
+        <p:nvPr/>
+      </p:nvGrpSpPr>
+      <p:grpSpPr>
+        <a:xfrm>
+          <a:off x="0" y="0"/>
+          <a:ext cx="0" cy="0"/>
+          <a:chOff x="0" y="0"/>
+          <a:chExt cx="0" cy="0"/>
+        </a:xfrm>
+      </p:grpSpPr>
+      <p:sp>
+        <p:nvSpPr>
+          <p:cNvPr id="2" name="슬라이드 이미지 개체 틀 1"/>
+          <p:cNvSpPr>
+            <a:spLocks noGrp="1" noRot="1" noChangeAspect="1"/>
+          </p:cNvSpPr>
+          <p:nvPr>
+            <p:ph type="sldImg"/>
+          </p:nvPr>
+        </p:nvSpPr>
+        <p:spPr/>
+      </p:sp>
+      <p:sp>
+        <p:nvSpPr>
+          <p:cNvPr id="3" name="슬라이드 노트 개체 틀 2"/>
+          <p:cNvSpPr>
+            <a:spLocks noGrp="1"/>
+          </p:cNvSpPr>
+          <p:nvPr>
+            <p:ph type="body" idx="1"/>
+          </p:nvPr>
+        </p:nvSpPr>
+        <p:spPr/>
+        <p:txBody>
+          <a:bodyPr>
+            <a:normAutofit/>
+          </a:bodyPr>
+          <a:lstStyle/>
+          <a:p>
+            <a:pPr marL="0" marR="0" indent="0" algn="l" defTabSz="914400" rtl="0" eaLnBrk="1" fontAlgn="auto" latinLnBrk="1" hangingPunct="1">
+              <a:lnSpc>
+                <a:spcPct val="100000"/>
+              </a:lnSpc>
+              <a:spcBef>
+                <a:spcPts val="0"/>
+              </a:spcBef>
+              <a:spcAft>
+                <a:spcPts val="0"/>
+              </a:spcAft>
+              <a:buClrTx/>
+              <a:buSzTx/>
+              <a:buFontTx/>
+              <a:buNone/>
+              <a:tabLst/>
+              <a:defRPr/>
+            </a:pPr>
+            <a:r>
+              <a:rPr lang="en-US" altLang="ko-KR" sz="1200" dirty="0"/>
+              <a:t>http://minheeblog.tistory.com/category/PPT</a:t>
+            </a:r>
+            <a:endParaRPr lang="ko-KR" altLang="en-US" sz="1200" dirty="0"/>
+          </a:p>
+          <a:p>
+            <a:endParaRPr lang="ko-KR" altLang="en-US" dirty="0"/>
+          </a:p>
+        </p:txBody>
+      </p:sp>
+      <p:sp>
+        <p:nvSpPr>
+          <p:cNvPr id="4" name="슬라이드 번호 개체 틀 3"/>
+          <p:cNvSpPr>
+            <a:spLocks noGrp="1"/>
+          </p:cNvSpPr>
+          <p:nvPr>
+            <p:ph type="sldNum" sz="quarter" idx="10"/>
+          </p:nvPr>
+        </p:nvSpPr>
+        <p:spPr/>
+        <p:txBody>
+          <a:bodyPr/>
+          <a:lstStyle/>
+          <a:p>
+            <a:fld id="{04A4E647-5A0F-41E6-A0EF-B58D8C1C6CD4}" type="slidenum">
+              <a:rPr lang="ko-KR" altLang="en-US" smtClean="0"/>
+              <a:pPr/>
+              <a:t>23</a:t>
+            </a:fld>
+            <a:endParaRPr lang="ko-KR" altLang="en-US"/>
+          </a:p>
+        </p:txBody>
+      </p:sp>
+    </p:spTree>
+    <p:extLst>
+      <p:ext uri="{BB962C8B-B14F-4D97-AF65-F5344CB8AC3E}">
+        <p14:creationId xmlns:p14="http://schemas.microsoft.com/office/powerpoint/2010/main" val="405395339"/>
+      </p:ext>
+    </p:extLst>
+  </p:cSld>
+  <p:clrMapOvr>
+    <a:masterClrMapping/>
+  </p:clrMapOvr>
+</p:notes>
+</file>
+
+<file path=ppt/notesSlides/notesSlide23.xml><?xml version="1.0" encoding="utf-8"?>
+<p:notes xmlns:a="http://schemas.openxmlformats.org/drawingml/2006/main" xmlns:r="http://schemas.openxmlformats.org/officeDocument/2006/relationships" xmlns:p="http://schemas.openxmlformats.org/presentationml/2006/main">
+  <p:cSld>
+    <p:spTree>
+      <p:nvGrpSpPr>
+        <p:cNvPr id="1" name=""/>
+        <p:cNvGrpSpPr/>
+        <p:nvPr/>
+      </p:nvGrpSpPr>
+      <p:grpSpPr>
+        <a:xfrm>
+          <a:off x="0" y="0"/>
+          <a:ext cx="0" cy="0"/>
+          <a:chOff x="0" y="0"/>
+          <a:chExt cx="0" cy="0"/>
+        </a:xfrm>
+      </p:grpSpPr>
+      <p:sp>
+        <p:nvSpPr>
+          <p:cNvPr id="2" name="슬라이드 이미지 개체 틀 1"/>
+          <p:cNvSpPr>
+            <a:spLocks noGrp="1" noRot="1" noChangeAspect="1"/>
+          </p:cNvSpPr>
+          <p:nvPr>
+            <p:ph type="sldImg"/>
+          </p:nvPr>
+        </p:nvSpPr>
+        <p:spPr/>
+      </p:sp>
+      <p:sp>
+        <p:nvSpPr>
+          <p:cNvPr id="3" name="슬라이드 노트 개체 틀 2"/>
+          <p:cNvSpPr>
+            <a:spLocks noGrp="1"/>
+          </p:cNvSpPr>
+          <p:nvPr>
+            <p:ph type="body" idx="1"/>
+          </p:nvPr>
+        </p:nvSpPr>
+        <p:spPr/>
+        <p:txBody>
+          <a:bodyPr>
+            <a:normAutofit/>
+          </a:bodyPr>
+          <a:lstStyle/>
+          <a:p>
+            <a:pPr marL="0" marR="0" indent="0" algn="l" defTabSz="914400" rtl="0" eaLnBrk="1" fontAlgn="auto" latinLnBrk="1" hangingPunct="1">
+              <a:lnSpc>
+                <a:spcPct val="100000"/>
+              </a:lnSpc>
+              <a:spcBef>
+                <a:spcPts val="0"/>
+              </a:spcBef>
+              <a:spcAft>
+                <a:spcPts val="0"/>
+              </a:spcAft>
+              <a:buClrTx/>
+              <a:buSzTx/>
+              <a:buFontTx/>
+              <a:buNone/>
+              <a:tabLst/>
+              <a:defRPr/>
+            </a:pPr>
+            <a:r>
+              <a:rPr lang="en-US" altLang="ko-KR" sz="1200" dirty="0"/>
+              <a:t>http://minheeblog.tistory.com/category/PPT</a:t>
+            </a:r>
+            <a:endParaRPr lang="ko-KR" altLang="en-US" sz="1200" dirty="0"/>
+          </a:p>
+          <a:p>
+            <a:endParaRPr lang="ko-KR" altLang="en-US" dirty="0"/>
+          </a:p>
+        </p:txBody>
+      </p:sp>
+      <p:sp>
+        <p:nvSpPr>
+          <p:cNvPr id="4" name="슬라이드 번호 개체 틀 3"/>
+          <p:cNvSpPr>
+            <a:spLocks noGrp="1"/>
+          </p:cNvSpPr>
+          <p:nvPr>
+            <p:ph type="sldNum" sz="quarter" idx="10"/>
+          </p:nvPr>
+        </p:nvSpPr>
+        <p:spPr/>
+        <p:txBody>
+          <a:bodyPr/>
+          <a:lstStyle/>
+          <a:p>
+            <a:fld id="{04A4E647-5A0F-41E6-A0EF-B58D8C1C6CD4}" type="slidenum">
+              <a:rPr lang="ko-KR" altLang="en-US" smtClean="0"/>
+              <a:pPr/>
+              <a:t>24</a:t>
+            </a:fld>
+            <a:endParaRPr lang="ko-KR" altLang="en-US"/>
+          </a:p>
+        </p:txBody>
+      </p:sp>
+    </p:spTree>
+    <p:extLst>
+      <p:ext uri="{BB962C8B-B14F-4D97-AF65-F5344CB8AC3E}">
+        <p14:creationId xmlns:p14="http://schemas.microsoft.com/office/powerpoint/2010/main" val="2797330584"/>
+      </p:ext>
+    </p:extLst>
+  </p:cSld>
+  <p:clrMapOvr>
+    <a:masterClrMapping/>
+  </p:clrMapOvr>
+</p:notes>
+</file>
+
+<file path=ppt/notesSlides/notesSlide24.xml><?xml version="1.0" encoding="utf-8"?>
+<p:notes xmlns:a="http://schemas.openxmlformats.org/drawingml/2006/main" xmlns:r="http://schemas.openxmlformats.org/officeDocument/2006/relationships" xmlns:p="http://schemas.openxmlformats.org/presentationml/2006/main">
+  <p:cSld>
+    <p:spTree>
+      <p:nvGrpSpPr>
+        <p:cNvPr id="1" name=""/>
+        <p:cNvGrpSpPr/>
+        <p:nvPr/>
+      </p:nvGrpSpPr>
+      <p:grpSpPr>
+        <a:xfrm>
+          <a:off x="0" y="0"/>
+          <a:ext cx="0" cy="0"/>
+          <a:chOff x="0" y="0"/>
+          <a:chExt cx="0" cy="0"/>
+        </a:xfrm>
+      </p:grpSpPr>
+      <p:sp>
+        <p:nvSpPr>
+          <p:cNvPr id="2" name="슬라이드 이미지 개체 틀 1"/>
+          <p:cNvSpPr>
+            <a:spLocks noGrp="1" noRot="1" noChangeAspect="1"/>
+          </p:cNvSpPr>
+          <p:nvPr>
+            <p:ph type="sldImg"/>
+          </p:nvPr>
+        </p:nvSpPr>
+        <p:spPr/>
+      </p:sp>
+      <p:sp>
+        <p:nvSpPr>
+          <p:cNvPr id="3" name="슬라이드 노트 개체 틀 2"/>
+          <p:cNvSpPr>
+            <a:spLocks noGrp="1"/>
+          </p:cNvSpPr>
+          <p:nvPr>
+            <p:ph type="body" idx="1"/>
+          </p:nvPr>
+        </p:nvSpPr>
+        <p:spPr/>
+        <p:txBody>
+          <a:bodyPr>
+            <a:normAutofit/>
+          </a:bodyPr>
+          <a:lstStyle/>
+          <a:p>
+            <a:pPr marL="0" marR="0" indent="0" algn="l" defTabSz="914400" rtl="0" eaLnBrk="1" fontAlgn="auto" latinLnBrk="1" hangingPunct="1">
+              <a:lnSpc>
+                <a:spcPct val="100000"/>
+              </a:lnSpc>
+              <a:spcBef>
+                <a:spcPts val="0"/>
+              </a:spcBef>
+              <a:spcAft>
+                <a:spcPts val="0"/>
+              </a:spcAft>
+              <a:buClrTx/>
+              <a:buSzTx/>
+              <a:buFontTx/>
+              <a:buNone/>
+              <a:tabLst/>
+              <a:defRPr/>
+            </a:pPr>
+            <a:r>
+              <a:rPr lang="en-US" altLang="ko-KR" sz="1200" dirty="0"/>
+              <a:t>http://minheeblog.tistory.com/category/PPT</a:t>
+            </a:r>
+            <a:endParaRPr lang="ko-KR" altLang="en-US" sz="1200" dirty="0"/>
+          </a:p>
+          <a:p>
+            <a:endParaRPr lang="ko-KR" altLang="en-US" dirty="0"/>
+          </a:p>
+        </p:txBody>
+      </p:sp>
+      <p:sp>
+        <p:nvSpPr>
+          <p:cNvPr id="4" name="슬라이드 번호 개체 틀 3"/>
+          <p:cNvSpPr>
+            <a:spLocks noGrp="1"/>
+          </p:cNvSpPr>
+          <p:nvPr>
+            <p:ph type="sldNum" sz="quarter" idx="10"/>
+          </p:nvPr>
+        </p:nvSpPr>
+        <p:spPr/>
+        <p:txBody>
+          <a:bodyPr/>
+          <a:lstStyle/>
+          <a:p>
+            <a:fld id="{04A4E647-5A0F-41E6-A0EF-B58D8C1C6CD4}" type="slidenum">
+              <a:rPr lang="ko-KR" altLang="en-US" smtClean="0"/>
+              <a:pPr/>
+              <a:t>25</a:t>
+            </a:fld>
+            <a:endParaRPr lang="ko-KR" altLang="en-US"/>
+          </a:p>
+        </p:txBody>
+      </p:sp>
+    </p:spTree>
+    <p:extLst>
+      <p:ext uri="{BB962C8B-B14F-4D97-AF65-F5344CB8AC3E}">
+        <p14:creationId xmlns:p14="http://schemas.microsoft.com/office/powerpoint/2010/main" val="3557393855"/>
       </p:ext>
     </p:extLst>
   </p:cSld>
@@ -2678,7 +3350,7 @@
             <a:fld id="{A22FE722-38C7-4231-8BB5-7A27D4E5977D}" type="datetimeFigureOut">
               <a:rPr lang="ko-KR" altLang="en-US" smtClean="0"/>
               <a:pPr/>
-              <a:t>2026-05-19</a:t>
+              <a:t>2026-05-22</a:t>
             </a:fld>
             <a:endParaRPr lang="ko-KR" altLang="en-US"/>
           </a:p>
@@ -2843,7 +3515,7 @@
             <a:fld id="{A22FE722-38C7-4231-8BB5-7A27D4E5977D}" type="datetimeFigureOut">
               <a:rPr lang="ko-KR" altLang="en-US" smtClean="0"/>
               <a:pPr/>
-              <a:t>2026-05-19</a:t>
+              <a:t>2026-05-22</a:t>
             </a:fld>
             <a:endParaRPr lang="ko-KR" altLang="en-US"/>
           </a:p>
@@ -3018,7 +3690,7 @@
             <a:fld id="{A22FE722-38C7-4231-8BB5-7A27D4E5977D}" type="datetimeFigureOut">
               <a:rPr lang="ko-KR" altLang="en-US" smtClean="0"/>
               <a:pPr/>
-              <a:t>2026-05-19</a:t>
+              <a:t>2026-05-22</a:t>
             </a:fld>
             <a:endParaRPr lang="ko-KR" altLang="en-US"/>
           </a:p>
@@ -3183,7 +3855,7 @@
             <a:fld id="{A22FE722-38C7-4231-8BB5-7A27D4E5977D}" type="datetimeFigureOut">
               <a:rPr lang="ko-KR" altLang="en-US" smtClean="0"/>
               <a:pPr/>
-              <a:t>2026-05-19</a:t>
+              <a:t>2026-05-22</a:t>
             </a:fld>
             <a:endParaRPr lang="ko-KR" altLang="en-US"/>
           </a:p>
@@ -3425,7 +4097,7 @@
             <a:fld id="{A22FE722-38C7-4231-8BB5-7A27D4E5977D}" type="datetimeFigureOut">
               <a:rPr lang="ko-KR" altLang="en-US" smtClean="0"/>
               <a:pPr/>
-              <a:t>2026-05-19</a:t>
+              <a:t>2026-05-22</a:t>
             </a:fld>
             <a:endParaRPr lang="ko-KR" altLang="en-US"/>
           </a:p>
@@ -3707,7 +4379,7 @@
             <a:fld id="{A22FE722-38C7-4231-8BB5-7A27D4E5977D}" type="datetimeFigureOut">
               <a:rPr lang="ko-KR" altLang="en-US" smtClean="0"/>
               <a:pPr/>
-              <a:t>2026-05-19</a:t>
+              <a:t>2026-05-22</a:t>
             </a:fld>
             <a:endParaRPr lang="ko-KR" altLang="en-US"/>
           </a:p>
@@ -4123,7 +4795,7 @@
             <a:fld id="{A22FE722-38C7-4231-8BB5-7A27D4E5977D}" type="datetimeFigureOut">
               <a:rPr lang="ko-KR" altLang="en-US" smtClean="0"/>
               <a:pPr/>
-              <a:t>2026-05-19</a:t>
+              <a:t>2026-05-22</a:t>
             </a:fld>
             <a:endParaRPr lang="ko-KR" altLang="en-US"/>
           </a:p>
@@ -4237,7 +4909,7 @@
             <a:fld id="{A22FE722-38C7-4231-8BB5-7A27D4E5977D}" type="datetimeFigureOut">
               <a:rPr lang="ko-KR" altLang="en-US" smtClean="0"/>
               <a:pPr/>
-              <a:t>2026-05-19</a:t>
+              <a:t>2026-05-22</a:t>
             </a:fld>
             <a:endParaRPr lang="ko-KR" altLang="en-US"/>
           </a:p>
@@ -4628,7 +5300,7 @@
             <a:fld id="{A22FE722-38C7-4231-8BB5-7A27D4E5977D}" type="datetimeFigureOut">
               <a:rPr lang="ko-KR" altLang="en-US" smtClean="0"/>
               <a:pPr/>
-              <a:t>2026-05-19</a:t>
+              <a:t>2026-05-22</a:t>
             </a:fld>
             <a:endParaRPr lang="ko-KR" altLang="en-US"/>
           </a:p>
@@ -4877,7 +5549,7 @@
             <a:fld id="{A22FE722-38C7-4231-8BB5-7A27D4E5977D}" type="datetimeFigureOut">
               <a:rPr lang="ko-KR" altLang="en-US" smtClean="0"/>
               <a:pPr/>
-              <a:t>2026-05-19</a:t>
+              <a:t>2026-05-22</a:t>
             </a:fld>
             <a:endParaRPr lang="ko-KR" altLang="en-US"/>
           </a:p>
@@ -5090,7 +5762,7 @@
             <a:fld id="{A22FE722-38C7-4231-8BB5-7A27D4E5977D}" type="datetimeFigureOut">
               <a:rPr lang="ko-KR" altLang="en-US" smtClean="0"/>
               <a:pPr/>
-              <a:t>2026-05-19</a:t>
+              <a:t>2026-05-22</a:t>
             </a:fld>
             <a:endParaRPr lang="ko-KR" altLang="en-US"/>
           </a:p>
@@ -12612,6 +13284,2814 @@
       </p:grpSpPr>
       <p:sp>
         <p:nvSpPr>
+          <p:cNvPr id="3" name="타원 2"/>
+          <p:cNvSpPr/>
+          <p:nvPr/>
+        </p:nvSpPr>
+        <p:spPr>
+          <a:xfrm>
+            <a:off x="2627784" y="1298236"/>
+            <a:ext cx="3858956" cy="3858956"/>
+          </a:xfrm>
+          <a:prstGeom prst="ellipse">
+            <a:avLst/>
+          </a:prstGeom>
+          <a:solidFill>
+            <a:schemeClr val="tx2">
+              <a:lumMod val="75000"/>
+            </a:schemeClr>
+          </a:solidFill>
+          <a:ln>
+            <a:noFill/>
+          </a:ln>
+        </p:spPr>
+        <p:style>
+          <a:lnRef idx="2">
+            <a:schemeClr val="accent1">
+              <a:shade val="50000"/>
+            </a:schemeClr>
+          </a:lnRef>
+          <a:fillRef idx="1">
+            <a:schemeClr val="accent1"/>
+          </a:fillRef>
+          <a:effectRef idx="0">
+            <a:schemeClr val="accent1"/>
+          </a:effectRef>
+          <a:fontRef idx="minor">
+            <a:schemeClr val="lt1"/>
+          </a:fontRef>
+        </p:style>
+        <p:txBody>
+          <a:bodyPr rtlCol="0" anchor="ctr"/>
+          <a:lstStyle/>
+          <a:p>
+            <a:pPr algn="ctr"/>
+            <a:endParaRPr lang="ko-KR" altLang="en-US"/>
+          </a:p>
+        </p:txBody>
+      </p:sp>
+      <p:sp>
+        <p:nvSpPr>
+          <p:cNvPr id="7" name="TextBox 6"/>
+          <p:cNvSpPr txBox="1"/>
+          <p:nvPr/>
+        </p:nvSpPr>
+        <p:spPr>
+          <a:xfrm>
+            <a:off x="2627784" y="2971550"/>
+            <a:ext cx="3858956" cy="630942"/>
+          </a:xfrm>
+          <a:prstGeom prst="rect">
+            <a:avLst/>
+          </a:prstGeom>
+          <a:noFill/>
+        </p:spPr>
+        <p:txBody>
+          <a:bodyPr wrap="square" rtlCol="0">
+            <a:spAutoFit/>
+          </a:bodyPr>
+          <a:lstStyle/>
+          <a:p>
+            <a:pPr algn="ctr"/>
+            <a:r>
+              <a:rPr lang="en-US" altLang="ko-KR" sz="3500" b="1" dirty="0">
+                <a:solidFill>
+                  <a:schemeClr val="bg1"/>
+                </a:solidFill>
+              </a:rPr>
+              <a:t>RNN</a:t>
+            </a:r>
+          </a:p>
+        </p:txBody>
+      </p:sp>
+    </p:spTree>
+    <p:extLst>
+      <p:ext uri="{BB962C8B-B14F-4D97-AF65-F5344CB8AC3E}">
+        <p14:creationId xmlns:p14="http://schemas.microsoft.com/office/powerpoint/2010/main" val="1840763813"/>
+      </p:ext>
+    </p:extLst>
+  </p:cSld>
+  <p:clrMapOvr>
+    <a:masterClrMapping/>
+  </p:clrMapOvr>
+</p:sld>
+</file>
+
+<file path=ppt/slides/slide2.xml><?xml version="1.0" encoding="utf-8"?>
+<p:sld xmlns:a="http://schemas.openxmlformats.org/drawingml/2006/main" xmlns:r="http://schemas.openxmlformats.org/officeDocument/2006/relationships" xmlns:p="http://schemas.openxmlformats.org/presentationml/2006/main">
+  <p:cSld>
+    <p:spTree>
+      <p:nvGrpSpPr>
+        <p:cNvPr id="1" name=""/>
+        <p:cNvGrpSpPr/>
+        <p:nvPr/>
+      </p:nvGrpSpPr>
+      <p:grpSpPr>
+        <a:xfrm>
+          <a:off x="0" y="0"/>
+          <a:ext cx="0" cy="0"/>
+          <a:chOff x="0" y="0"/>
+          <a:chExt cx="0" cy="0"/>
+        </a:xfrm>
+      </p:grpSpPr>
+      <p:sp>
+        <p:nvSpPr>
+          <p:cNvPr id="3" name="타원 2"/>
+          <p:cNvSpPr/>
+          <p:nvPr/>
+        </p:nvSpPr>
+        <p:spPr>
+          <a:xfrm>
+            <a:off x="2627784" y="1298236"/>
+            <a:ext cx="3858956" cy="3858956"/>
+          </a:xfrm>
+          <a:prstGeom prst="ellipse">
+            <a:avLst/>
+          </a:prstGeom>
+          <a:solidFill>
+            <a:schemeClr val="tx2">
+              <a:lumMod val="75000"/>
+            </a:schemeClr>
+          </a:solidFill>
+          <a:ln>
+            <a:noFill/>
+          </a:ln>
+        </p:spPr>
+        <p:style>
+          <a:lnRef idx="2">
+            <a:schemeClr val="accent1">
+              <a:shade val="50000"/>
+            </a:schemeClr>
+          </a:lnRef>
+          <a:fillRef idx="1">
+            <a:schemeClr val="accent1"/>
+          </a:fillRef>
+          <a:effectRef idx="0">
+            <a:schemeClr val="accent1"/>
+          </a:effectRef>
+          <a:fontRef idx="minor">
+            <a:schemeClr val="lt1"/>
+          </a:fontRef>
+        </p:style>
+        <p:txBody>
+          <a:bodyPr rtlCol="0" anchor="ctr"/>
+          <a:lstStyle/>
+          <a:p>
+            <a:pPr algn="ctr"/>
+            <a:endParaRPr lang="ko-KR" altLang="en-US"/>
+          </a:p>
+        </p:txBody>
+      </p:sp>
+      <p:sp>
+        <p:nvSpPr>
+          <p:cNvPr id="7" name="TextBox 6"/>
+          <p:cNvSpPr txBox="1"/>
+          <p:nvPr/>
+        </p:nvSpPr>
+        <p:spPr>
+          <a:xfrm>
+            <a:off x="2627784" y="2971550"/>
+            <a:ext cx="3858956" cy="630942"/>
+          </a:xfrm>
+          <a:prstGeom prst="rect">
+            <a:avLst/>
+          </a:prstGeom>
+          <a:noFill/>
+        </p:spPr>
+        <p:txBody>
+          <a:bodyPr wrap="square" rtlCol="0">
+            <a:spAutoFit/>
+          </a:bodyPr>
+          <a:lstStyle/>
+          <a:p>
+            <a:pPr algn="ctr"/>
+            <a:r>
+              <a:rPr lang="ko-KR" altLang="en-US" sz="3500" b="1" dirty="0">
+                <a:solidFill>
+                  <a:schemeClr val="bg1"/>
+                </a:solidFill>
+              </a:rPr>
+              <a:t>딥러닝</a:t>
+            </a:r>
+          </a:p>
+        </p:txBody>
+      </p:sp>
+    </p:spTree>
+    <p:extLst>
+      <p:ext uri="{BB962C8B-B14F-4D97-AF65-F5344CB8AC3E}">
+        <p14:creationId xmlns:p14="http://schemas.microsoft.com/office/powerpoint/2010/main" val="1192776622"/>
+      </p:ext>
+    </p:extLst>
+  </p:cSld>
+  <p:clrMapOvr>
+    <a:masterClrMapping/>
+  </p:clrMapOvr>
+</p:sld>
+</file>
+
+<file path=ppt/slides/slide20.xml><?xml version="1.0" encoding="utf-8"?>
+<p:sld xmlns:a="http://schemas.openxmlformats.org/drawingml/2006/main" xmlns:r="http://schemas.openxmlformats.org/officeDocument/2006/relationships" xmlns:p="http://schemas.openxmlformats.org/presentationml/2006/main">
+  <p:cSld>
+    <p:spTree>
+      <p:nvGrpSpPr>
+        <p:cNvPr id="1" name=""/>
+        <p:cNvGrpSpPr/>
+        <p:nvPr/>
+      </p:nvGrpSpPr>
+      <p:grpSpPr>
+        <a:xfrm>
+          <a:off x="0" y="0"/>
+          <a:ext cx="0" cy="0"/>
+          <a:chOff x="0" y="0"/>
+          <a:chExt cx="0" cy="0"/>
+        </a:xfrm>
+      </p:grpSpPr>
+      <p:sp>
+        <p:nvSpPr>
+          <p:cNvPr id="3" name="타원 2"/>
+          <p:cNvSpPr/>
+          <p:nvPr/>
+        </p:nvSpPr>
+        <p:spPr>
+          <a:xfrm>
+            <a:off x="4067944" y="74100"/>
+            <a:ext cx="936104" cy="936104"/>
+          </a:xfrm>
+          <a:prstGeom prst="ellipse">
+            <a:avLst/>
+          </a:prstGeom>
+          <a:solidFill>
+            <a:schemeClr val="tx2">
+              <a:lumMod val="75000"/>
+            </a:schemeClr>
+          </a:solidFill>
+          <a:ln>
+            <a:noFill/>
+          </a:ln>
+        </p:spPr>
+        <p:style>
+          <a:lnRef idx="2">
+            <a:schemeClr val="accent1">
+              <a:shade val="50000"/>
+            </a:schemeClr>
+          </a:lnRef>
+          <a:fillRef idx="1">
+            <a:schemeClr val="accent1"/>
+          </a:fillRef>
+          <a:effectRef idx="0">
+            <a:schemeClr val="accent1"/>
+          </a:effectRef>
+          <a:fontRef idx="minor">
+            <a:schemeClr val="lt1"/>
+          </a:fontRef>
+        </p:style>
+        <p:txBody>
+          <a:bodyPr rtlCol="0" anchor="ctr"/>
+          <a:lstStyle/>
+          <a:p>
+            <a:pPr algn="ctr"/>
+            <a:endParaRPr lang="ko-KR" altLang="en-US"/>
+          </a:p>
+        </p:txBody>
+      </p:sp>
+      <p:sp>
+        <p:nvSpPr>
+          <p:cNvPr id="9" name="TextBox 8"/>
+          <p:cNvSpPr txBox="1"/>
+          <p:nvPr/>
+        </p:nvSpPr>
+        <p:spPr>
+          <a:xfrm>
+            <a:off x="3995936" y="479095"/>
+            <a:ext cx="1080120" cy="461665"/>
+          </a:xfrm>
+          <a:prstGeom prst="rect">
+            <a:avLst/>
+          </a:prstGeom>
+          <a:noFill/>
+        </p:spPr>
+        <p:txBody>
+          <a:bodyPr wrap="square" rtlCol="0">
+            <a:spAutoFit/>
+          </a:bodyPr>
+          <a:lstStyle/>
+          <a:p>
+            <a:pPr algn="ctr"/>
+            <a:r>
+              <a:rPr lang="en-US" altLang="ko-KR" sz="2400" dirty="0">
+                <a:solidFill>
+                  <a:schemeClr val="bg1"/>
+                </a:solidFill>
+                <a:latin typeface="HY헤드라인M" pitchFamily="18" charset="-127"/>
+                <a:ea typeface="HY헤드라인M" pitchFamily="18" charset="-127"/>
+              </a:rPr>
+              <a:t>01</a:t>
+            </a:r>
+            <a:endParaRPr lang="ko-KR" altLang="en-US" sz="2400" dirty="0">
+              <a:solidFill>
+                <a:schemeClr val="bg1"/>
+              </a:solidFill>
+              <a:latin typeface="HY헤드라인M" pitchFamily="18" charset="-127"/>
+              <a:ea typeface="HY헤드라인M" pitchFamily="18" charset="-127"/>
+            </a:endParaRPr>
+          </a:p>
+        </p:txBody>
+      </p:sp>
+      <p:sp>
+        <p:nvSpPr>
+          <p:cNvPr id="4" name="TextBox 3"/>
+          <p:cNvSpPr txBox="1"/>
+          <p:nvPr/>
+        </p:nvSpPr>
+        <p:spPr>
+          <a:xfrm>
+            <a:off x="971600" y="1700808"/>
+            <a:ext cx="7200800" cy="4609275"/>
+          </a:xfrm>
+          <a:prstGeom prst="rect">
+            <a:avLst/>
+          </a:prstGeom>
+          <a:noFill/>
+        </p:spPr>
+        <p:txBody>
+          <a:bodyPr wrap="square" rtlCol="0">
+            <a:spAutoFit/>
+          </a:bodyPr>
+          <a:lstStyle/>
+          <a:p>
+            <a:pPr marL="285750" indent="-285750">
+              <a:lnSpc>
+                <a:spcPct val="150000"/>
+              </a:lnSpc>
+              <a:buFont typeface="Arial" panose="020B0604020202020204" pitchFamily="34" charset="0"/>
+              <a:buChar char="•"/>
+            </a:pPr>
+            <a:r>
+              <a:rPr lang="ko-KR" altLang="en-US" dirty="0"/>
+              <a:t>시계열 데이터</a:t>
+            </a:r>
+            <a:r>
+              <a:rPr lang="en-US" altLang="ko-KR" dirty="0"/>
+              <a:t>(Time-Series Data)</a:t>
+            </a:r>
+          </a:p>
+          <a:p>
+            <a:pPr marL="742950" lvl="1" indent="-285750">
+              <a:lnSpc>
+                <a:spcPct val="150000"/>
+              </a:lnSpc>
+              <a:buFont typeface="Arial" panose="020B0604020202020204" pitchFamily="34" charset="0"/>
+              <a:buChar char="•"/>
+            </a:pPr>
+            <a:r>
+              <a:rPr lang="ko-KR" altLang="en-US" dirty="0"/>
+              <a:t>주식 가격</a:t>
+            </a:r>
+            <a:r>
+              <a:rPr lang="en-US" altLang="ko-KR" dirty="0"/>
+              <a:t>, </a:t>
+            </a:r>
+            <a:r>
+              <a:rPr lang="ko-KR" altLang="en-US" dirty="0"/>
+              <a:t>날씨</a:t>
+            </a:r>
+            <a:r>
+              <a:rPr lang="en-US" altLang="ko-KR" dirty="0"/>
+              <a:t>, </a:t>
+            </a:r>
+            <a:r>
+              <a:rPr lang="ko-KR" altLang="en-US" dirty="0" err="1"/>
+              <a:t>센서값처럼</a:t>
+            </a:r>
+            <a:r>
+              <a:rPr lang="ko-KR" altLang="en-US" dirty="0"/>
+              <a:t> </a:t>
+            </a:r>
+            <a:r>
+              <a:rPr lang="en-US" altLang="ko-KR" dirty="0"/>
+              <a:t>'</a:t>
+            </a:r>
+            <a:r>
+              <a:rPr lang="ko-KR" altLang="en-US" dirty="0"/>
+              <a:t>시간의 흐름</a:t>
+            </a:r>
+            <a:r>
+              <a:rPr lang="en-US" altLang="ko-KR" dirty="0"/>
+              <a:t>'</a:t>
+            </a:r>
+            <a:r>
+              <a:rPr lang="ko-KR" altLang="en-US" dirty="0"/>
+              <a:t>에 따라 순서대로 기록된 데이터를 의미합니다</a:t>
+            </a:r>
+            <a:r>
+              <a:rPr lang="en-US" altLang="ko-KR" dirty="0"/>
+              <a:t>.</a:t>
+            </a:r>
+          </a:p>
+          <a:p>
+            <a:pPr marL="285750" indent="-285750">
+              <a:lnSpc>
+                <a:spcPct val="150000"/>
+              </a:lnSpc>
+              <a:buFont typeface="Arial" panose="020B0604020202020204" pitchFamily="34" charset="0"/>
+              <a:buChar char="•"/>
+            </a:pPr>
+            <a:r>
+              <a:rPr lang="ko-KR" altLang="en-US" dirty="0"/>
+              <a:t>주식 차트 비유</a:t>
+            </a:r>
+            <a:endParaRPr lang="en-US" altLang="ko-KR" dirty="0"/>
+          </a:p>
+          <a:p>
+            <a:pPr marL="742950" lvl="1" indent="-285750">
+              <a:lnSpc>
+                <a:spcPct val="150000"/>
+              </a:lnSpc>
+              <a:buFont typeface="Arial" panose="020B0604020202020204" pitchFamily="34" charset="0"/>
+              <a:buChar char="•"/>
+            </a:pPr>
+            <a:r>
+              <a:rPr lang="ko-KR" altLang="en-US" dirty="0"/>
+              <a:t>오늘 하루의 가격표만 보고 내일의 주가를 맞출 수는 없습니다</a:t>
+            </a:r>
+            <a:r>
+              <a:rPr lang="en-US" altLang="ko-KR" dirty="0"/>
+              <a:t>. </a:t>
+            </a:r>
+            <a:r>
+              <a:rPr lang="ko-KR" altLang="en-US" dirty="0"/>
+              <a:t>한 달 전부터 어제까지 이어져 온 </a:t>
+            </a:r>
+            <a:r>
+              <a:rPr lang="en-US" altLang="ko-KR" dirty="0"/>
+              <a:t>'</a:t>
+            </a:r>
+            <a:r>
+              <a:rPr lang="ko-KR" altLang="en-US" dirty="0"/>
+              <a:t>상승</a:t>
+            </a:r>
+            <a:r>
+              <a:rPr lang="en-US" altLang="ko-KR" dirty="0"/>
+              <a:t>/</a:t>
+            </a:r>
+            <a:r>
+              <a:rPr lang="ko-KR" altLang="en-US" dirty="0"/>
+              <a:t>하락 추세</a:t>
+            </a:r>
+            <a:r>
+              <a:rPr lang="en-US" altLang="ko-KR" dirty="0"/>
+              <a:t>'</a:t>
+            </a:r>
+            <a:r>
+              <a:rPr lang="ko-KR" altLang="en-US" dirty="0"/>
+              <a:t>를 기억해야 흐름을 이해할 수 있습니다</a:t>
+            </a:r>
+            <a:r>
+              <a:rPr lang="en-US" altLang="ko-KR" dirty="0"/>
+              <a:t>.</a:t>
+            </a:r>
+          </a:p>
+          <a:p>
+            <a:pPr marL="285750" indent="-285750">
+              <a:lnSpc>
+                <a:spcPct val="150000"/>
+              </a:lnSpc>
+              <a:buFont typeface="Arial" panose="020B0604020202020204" pitchFamily="34" charset="0"/>
+              <a:buChar char="•"/>
+            </a:pPr>
+            <a:r>
+              <a:rPr lang="en-US" altLang="ko-KR" dirty="0"/>
+              <a:t>RNN(</a:t>
+            </a:r>
+            <a:r>
+              <a:rPr lang="ko-KR" altLang="en-US" dirty="0"/>
+              <a:t>순환 신경망</a:t>
+            </a:r>
+            <a:r>
+              <a:rPr lang="en-US" altLang="ko-KR" dirty="0"/>
+              <a:t>)</a:t>
+            </a:r>
+            <a:r>
+              <a:rPr lang="ko-KR" altLang="en-US" dirty="0"/>
+              <a:t>의 역할</a:t>
+            </a:r>
+            <a:endParaRPr lang="en-US" altLang="ko-KR" dirty="0"/>
+          </a:p>
+          <a:p>
+            <a:pPr marL="742950" lvl="1" indent="-285750">
+              <a:lnSpc>
+                <a:spcPct val="150000"/>
+              </a:lnSpc>
+              <a:buFont typeface="Arial" panose="020B0604020202020204" pitchFamily="34" charset="0"/>
+              <a:buChar char="•"/>
+            </a:pPr>
+            <a:r>
+              <a:rPr lang="ko-KR" altLang="en-US" dirty="0"/>
+              <a:t>과거의 패턴 정보를 내부에 </a:t>
+            </a:r>
+            <a:r>
+              <a:rPr lang="en-US" altLang="ko-KR" dirty="0"/>
+              <a:t>'</a:t>
+            </a:r>
+            <a:r>
+              <a:rPr lang="ko-KR" altLang="en-US" dirty="0"/>
+              <a:t>기억</a:t>
+            </a:r>
+            <a:r>
+              <a:rPr lang="en-US" altLang="ko-KR" dirty="0"/>
+              <a:t>(Memory)'</a:t>
+            </a:r>
+            <a:r>
+              <a:rPr lang="ko-KR" altLang="en-US" dirty="0"/>
+              <a:t>하고</a:t>
+            </a:r>
+            <a:r>
+              <a:rPr lang="en-US" altLang="ko-KR" dirty="0"/>
+              <a:t>, </a:t>
+            </a:r>
+            <a:r>
+              <a:rPr lang="ko-KR" altLang="en-US" dirty="0"/>
+              <a:t>이를 다음 시점의 분석으로 계속 전달해 주는 시계열 특화 딥러닝 모델입니다</a:t>
+            </a:r>
+            <a:r>
+              <a:rPr lang="en-US" altLang="ko-KR" dirty="0"/>
+              <a:t>.</a:t>
+            </a:r>
+          </a:p>
+        </p:txBody>
+      </p:sp>
+      <p:sp>
+        <p:nvSpPr>
+          <p:cNvPr id="6" name="TextBox 5"/>
+          <p:cNvSpPr txBox="1"/>
+          <p:nvPr/>
+        </p:nvSpPr>
+        <p:spPr>
+          <a:xfrm>
+            <a:off x="539552" y="1065096"/>
+            <a:ext cx="7992888" cy="446276"/>
+          </a:xfrm>
+          <a:prstGeom prst="rect">
+            <a:avLst/>
+          </a:prstGeom>
+          <a:noFill/>
+        </p:spPr>
+        <p:txBody>
+          <a:bodyPr wrap="square" rtlCol="0">
+            <a:spAutoFit/>
+          </a:bodyPr>
+          <a:lstStyle/>
+          <a:p>
+            <a:r>
+              <a:rPr lang="en-US" altLang="ko-KR" sz="2300" dirty="0"/>
+              <a:t>RNN</a:t>
+            </a:r>
+            <a:r>
+              <a:rPr lang="ko-KR" altLang="en-US" sz="2300" dirty="0"/>
+              <a:t>이란</a:t>
+            </a:r>
+            <a:r>
+              <a:rPr lang="en-US" altLang="ko-KR" sz="2300" dirty="0"/>
+              <a:t>?</a:t>
+            </a:r>
+          </a:p>
+        </p:txBody>
+      </p:sp>
+    </p:spTree>
+    <p:extLst>
+      <p:ext uri="{BB962C8B-B14F-4D97-AF65-F5344CB8AC3E}">
+        <p14:creationId xmlns:p14="http://schemas.microsoft.com/office/powerpoint/2010/main" val="1187465644"/>
+      </p:ext>
+    </p:extLst>
+  </p:cSld>
+  <p:clrMapOvr>
+    <a:masterClrMapping/>
+  </p:clrMapOvr>
+</p:sld>
+</file>
+
+<file path=ppt/slides/slide21.xml><?xml version="1.0" encoding="utf-8"?>
+<p:sld xmlns:a="http://schemas.openxmlformats.org/drawingml/2006/main" xmlns:r="http://schemas.openxmlformats.org/officeDocument/2006/relationships" xmlns:p="http://schemas.openxmlformats.org/presentationml/2006/main">
+  <p:cSld>
+    <p:spTree>
+      <p:nvGrpSpPr>
+        <p:cNvPr id="1" name=""/>
+        <p:cNvGrpSpPr/>
+        <p:nvPr/>
+      </p:nvGrpSpPr>
+      <p:grpSpPr>
+        <a:xfrm>
+          <a:off x="0" y="0"/>
+          <a:ext cx="0" cy="0"/>
+          <a:chOff x="0" y="0"/>
+          <a:chExt cx="0" cy="0"/>
+        </a:xfrm>
+      </p:grpSpPr>
+      <p:sp>
+        <p:nvSpPr>
+          <p:cNvPr id="3" name="타원 2"/>
+          <p:cNvSpPr/>
+          <p:nvPr/>
+        </p:nvSpPr>
+        <p:spPr>
+          <a:xfrm>
+            <a:off x="4067944" y="74100"/>
+            <a:ext cx="936104" cy="936104"/>
+          </a:xfrm>
+          <a:prstGeom prst="ellipse">
+            <a:avLst/>
+          </a:prstGeom>
+          <a:solidFill>
+            <a:schemeClr val="tx2">
+              <a:lumMod val="75000"/>
+            </a:schemeClr>
+          </a:solidFill>
+          <a:ln>
+            <a:noFill/>
+          </a:ln>
+        </p:spPr>
+        <p:style>
+          <a:lnRef idx="2">
+            <a:schemeClr val="accent1">
+              <a:shade val="50000"/>
+            </a:schemeClr>
+          </a:lnRef>
+          <a:fillRef idx="1">
+            <a:schemeClr val="accent1"/>
+          </a:fillRef>
+          <a:effectRef idx="0">
+            <a:schemeClr val="accent1"/>
+          </a:effectRef>
+          <a:fontRef idx="minor">
+            <a:schemeClr val="lt1"/>
+          </a:fontRef>
+        </p:style>
+        <p:txBody>
+          <a:bodyPr rtlCol="0" anchor="ctr"/>
+          <a:lstStyle/>
+          <a:p>
+            <a:pPr algn="ctr"/>
+            <a:endParaRPr lang="ko-KR" altLang="en-US"/>
+          </a:p>
+        </p:txBody>
+      </p:sp>
+      <p:sp>
+        <p:nvSpPr>
+          <p:cNvPr id="9" name="TextBox 8"/>
+          <p:cNvSpPr txBox="1"/>
+          <p:nvPr/>
+        </p:nvSpPr>
+        <p:spPr>
+          <a:xfrm>
+            <a:off x="3995936" y="479095"/>
+            <a:ext cx="1080120" cy="461665"/>
+          </a:xfrm>
+          <a:prstGeom prst="rect">
+            <a:avLst/>
+          </a:prstGeom>
+          <a:noFill/>
+        </p:spPr>
+        <p:txBody>
+          <a:bodyPr wrap="square" rtlCol="0">
+            <a:spAutoFit/>
+          </a:bodyPr>
+          <a:lstStyle/>
+          <a:p>
+            <a:pPr algn="ctr"/>
+            <a:r>
+              <a:rPr lang="en-US" altLang="ko-KR" sz="2400" dirty="0">
+                <a:solidFill>
+                  <a:schemeClr val="bg1"/>
+                </a:solidFill>
+                <a:latin typeface="HY헤드라인M" pitchFamily="18" charset="-127"/>
+                <a:ea typeface="HY헤드라인M" pitchFamily="18" charset="-127"/>
+              </a:rPr>
+              <a:t>01</a:t>
+            </a:r>
+            <a:endParaRPr lang="ko-KR" altLang="en-US" sz="2400" dirty="0">
+              <a:solidFill>
+                <a:schemeClr val="bg1"/>
+              </a:solidFill>
+              <a:latin typeface="HY헤드라인M" pitchFamily="18" charset="-127"/>
+              <a:ea typeface="HY헤드라인M" pitchFamily="18" charset="-127"/>
+            </a:endParaRPr>
+          </a:p>
+        </p:txBody>
+      </p:sp>
+      <p:sp>
+        <p:nvSpPr>
+          <p:cNvPr id="6" name="TextBox 5"/>
+          <p:cNvSpPr txBox="1"/>
+          <p:nvPr/>
+        </p:nvSpPr>
+        <p:spPr>
+          <a:xfrm>
+            <a:off x="539552" y="1065096"/>
+            <a:ext cx="7992888" cy="446276"/>
+          </a:xfrm>
+          <a:prstGeom prst="rect">
+            <a:avLst/>
+          </a:prstGeom>
+          <a:noFill/>
+        </p:spPr>
+        <p:txBody>
+          <a:bodyPr wrap="square" rtlCol="0">
+            <a:spAutoFit/>
+          </a:bodyPr>
+          <a:lstStyle/>
+          <a:p>
+            <a:r>
+              <a:rPr lang="en-US" altLang="ko-KR" sz="2300" dirty="0"/>
+              <a:t>RNN</a:t>
+            </a:r>
+            <a:r>
+              <a:rPr lang="ko-KR" altLang="en-US" sz="2300" dirty="0"/>
+              <a:t>의 산업별 시계열 활용 사례</a:t>
+            </a:r>
+          </a:p>
+        </p:txBody>
+      </p:sp>
+      <p:grpSp>
+        <p:nvGrpSpPr>
+          <p:cNvPr id="8" name="그룹 7">
+            <a:extLst>
+              <a:ext uri="{FF2B5EF4-FFF2-40B4-BE49-F238E27FC236}">
+                <a16:creationId xmlns:a16="http://schemas.microsoft.com/office/drawing/2014/main" id="{9E63FF17-BD5A-48B3-9BDC-E93F8FA0462D}"/>
+              </a:ext>
+            </a:extLst>
+          </p:cNvPr>
+          <p:cNvGrpSpPr/>
+          <p:nvPr/>
+        </p:nvGrpSpPr>
+        <p:grpSpPr>
+          <a:xfrm>
+            <a:off x="571500" y="2297236"/>
+            <a:ext cx="8183092" cy="2715940"/>
+            <a:chOff x="571500" y="2081212"/>
+            <a:chExt cx="11049000" cy="3667125"/>
+          </a:xfrm>
+        </p:grpSpPr>
+        <p:pic>
+          <p:nvPicPr>
+            <p:cNvPr id="10" name="Google Shape;106;p15" descr="image.png">
+              <a:extLst>
+                <a:ext uri="{FF2B5EF4-FFF2-40B4-BE49-F238E27FC236}">
+                  <a16:creationId xmlns:a16="http://schemas.microsoft.com/office/drawing/2014/main" id="{5BD4BC96-ECE3-4793-9F76-8B67E41F0E7D}"/>
+                </a:ext>
+              </a:extLst>
+            </p:cNvPr>
+            <p:cNvPicPr preferRelativeResize="0"/>
+            <p:nvPr/>
+          </p:nvPicPr>
+          <p:blipFill rotWithShape="1">
+            <a:blip r:embed="rId3">
+              <a:alphaModFix/>
+            </a:blip>
+            <a:srcRect/>
+            <a:stretch/>
+          </p:blipFill>
+          <p:spPr>
+            <a:xfrm>
+              <a:off x="571500" y="2081212"/>
+              <a:ext cx="3429000" cy="3667125"/>
+            </a:xfrm>
+            <a:prstGeom prst="rect">
+              <a:avLst/>
+            </a:prstGeom>
+            <a:noFill/>
+            <a:ln>
+              <a:noFill/>
+            </a:ln>
+          </p:spPr>
+        </p:pic>
+        <p:pic>
+          <p:nvPicPr>
+            <p:cNvPr id="11" name="Google Shape;107;p15" descr="image.png">
+              <a:extLst>
+                <a:ext uri="{FF2B5EF4-FFF2-40B4-BE49-F238E27FC236}">
+                  <a16:creationId xmlns:a16="http://schemas.microsoft.com/office/drawing/2014/main" id="{4632EC5F-E51C-4D42-A252-A60AD2E35935}"/>
+                </a:ext>
+              </a:extLst>
+            </p:cNvPr>
+            <p:cNvPicPr preferRelativeResize="0"/>
+            <p:nvPr/>
+          </p:nvPicPr>
+          <p:blipFill rotWithShape="1">
+            <a:blip r:embed="rId4">
+              <a:alphaModFix/>
+            </a:blip>
+            <a:srcRect/>
+            <a:stretch/>
+          </p:blipFill>
+          <p:spPr>
+            <a:xfrm>
+              <a:off x="4381500" y="2081212"/>
+              <a:ext cx="3429000" cy="3667125"/>
+            </a:xfrm>
+            <a:prstGeom prst="rect">
+              <a:avLst/>
+            </a:prstGeom>
+            <a:noFill/>
+            <a:ln>
+              <a:noFill/>
+            </a:ln>
+          </p:spPr>
+        </p:pic>
+        <p:pic>
+          <p:nvPicPr>
+            <p:cNvPr id="12" name="Google Shape;108;p15" descr="image.png">
+              <a:extLst>
+                <a:ext uri="{FF2B5EF4-FFF2-40B4-BE49-F238E27FC236}">
+                  <a16:creationId xmlns:a16="http://schemas.microsoft.com/office/drawing/2014/main" id="{BC1D4DAC-0E03-4018-8466-7EB2D5468FD8}"/>
+                </a:ext>
+              </a:extLst>
+            </p:cNvPr>
+            <p:cNvPicPr preferRelativeResize="0"/>
+            <p:nvPr/>
+          </p:nvPicPr>
+          <p:blipFill rotWithShape="1">
+            <a:blip r:embed="rId5">
+              <a:alphaModFix/>
+            </a:blip>
+            <a:srcRect/>
+            <a:stretch/>
+          </p:blipFill>
+          <p:spPr>
+            <a:xfrm>
+              <a:off x="8191500" y="2081212"/>
+              <a:ext cx="3429000" cy="3667125"/>
+            </a:xfrm>
+            <a:prstGeom prst="rect">
+              <a:avLst/>
+            </a:prstGeom>
+            <a:noFill/>
+            <a:ln>
+              <a:noFill/>
+            </a:ln>
+          </p:spPr>
+        </p:pic>
+        <p:sp>
+          <p:nvSpPr>
+            <p:cNvPr id="13" name="Google Shape;109;p15">
+              <a:extLst>
+                <a:ext uri="{FF2B5EF4-FFF2-40B4-BE49-F238E27FC236}">
+                  <a16:creationId xmlns:a16="http://schemas.microsoft.com/office/drawing/2014/main" id="{4EEA7EC0-6D2E-426A-AECD-EFD9C1038473}"/>
+                </a:ext>
+              </a:extLst>
+            </p:cNvPr>
+            <p:cNvSpPr txBox="1"/>
+            <p:nvPr/>
+          </p:nvSpPr>
+          <p:spPr>
+            <a:xfrm>
+              <a:off x="1165860" y="3376612"/>
+              <a:ext cx="2240279" cy="332453"/>
+            </a:xfrm>
+            <a:prstGeom prst="rect">
+              <a:avLst/>
+            </a:prstGeom>
+            <a:noFill/>
+            <a:ln>
+              <a:noFill/>
+            </a:ln>
+          </p:spPr>
+          <p:txBody>
+            <a:bodyPr spcFirstLastPara="1" wrap="square" lIns="0" tIns="0" rIns="0" bIns="0" anchor="t" anchorCtr="0">
+              <a:spAutoFit/>
+            </a:bodyPr>
+            <a:lstStyle/>
+            <a:p>
+              <a:pPr marL="0" marR="0" lvl="0" indent="0" algn="ctr" rtl="0">
+                <a:spcBef>
+                  <a:spcPts val="0"/>
+                </a:spcBef>
+                <a:spcAft>
+                  <a:spcPts val="0"/>
+                </a:spcAft>
+                <a:buNone/>
+              </a:pPr>
+              <a:r>
+                <a:rPr lang="en-US" sz="1600" b="1" i="0" u="none" strike="noStrike" cap="none" dirty="0" err="1">
+                  <a:solidFill>
+                    <a:srgbClr val="E6F1FF"/>
+                  </a:solidFill>
+                  <a:latin typeface="+mj-lt"/>
+                  <a:ea typeface="Poppins"/>
+                  <a:cs typeface="Poppins"/>
+                  <a:sym typeface="Poppins"/>
+                </a:rPr>
+                <a:t>주식</a:t>
+              </a:r>
+              <a:r>
+                <a:rPr lang="en-US" sz="1600" b="1" i="0" u="none" strike="noStrike" cap="none" dirty="0">
+                  <a:solidFill>
+                    <a:srgbClr val="E6F1FF"/>
+                  </a:solidFill>
+                  <a:latin typeface="+mj-lt"/>
+                  <a:ea typeface="Poppins"/>
+                  <a:cs typeface="Poppins"/>
+                  <a:sym typeface="Poppins"/>
+                </a:rPr>
+                <a:t> 및 </a:t>
+              </a:r>
+              <a:r>
+                <a:rPr lang="en-US" sz="1600" b="1" i="0" u="none" strike="noStrike" cap="none" dirty="0" err="1">
+                  <a:solidFill>
+                    <a:srgbClr val="E6F1FF"/>
+                  </a:solidFill>
+                  <a:latin typeface="+mj-lt"/>
+                  <a:ea typeface="Poppins"/>
+                  <a:cs typeface="Poppins"/>
+                  <a:sym typeface="Poppins"/>
+                </a:rPr>
+                <a:t>금융</a:t>
+              </a:r>
+              <a:r>
+                <a:rPr lang="en-US" sz="1600" b="1" i="0" u="none" strike="noStrike" cap="none" dirty="0">
+                  <a:solidFill>
+                    <a:srgbClr val="E6F1FF"/>
+                  </a:solidFill>
+                  <a:latin typeface="+mj-lt"/>
+                  <a:ea typeface="Poppins"/>
+                  <a:cs typeface="Poppins"/>
+                  <a:sym typeface="Poppins"/>
+                </a:rPr>
+                <a:t> </a:t>
+              </a:r>
+              <a:r>
+                <a:rPr lang="en-US" sz="1600" b="1" i="0" u="none" strike="noStrike" cap="none" dirty="0" err="1">
+                  <a:solidFill>
+                    <a:srgbClr val="E6F1FF"/>
+                  </a:solidFill>
+                  <a:latin typeface="+mj-lt"/>
+                  <a:ea typeface="Poppins"/>
+                  <a:cs typeface="Poppins"/>
+                  <a:sym typeface="Poppins"/>
+                </a:rPr>
+                <a:t>예측</a:t>
+              </a:r>
+              <a:endParaRPr sz="1600" dirty="0">
+                <a:latin typeface="+mj-lt"/>
+              </a:endParaRPr>
+            </a:p>
+          </p:txBody>
+        </p:sp>
+        <p:sp>
+          <p:nvSpPr>
+            <p:cNvPr id="14" name="Google Shape;110;p15">
+              <a:extLst>
+                <a:ext uri="{FF2B5EF4-FFF2-40B4-BE49-F238E27FC236}">
+                  <a16:creationId xmlns:a16="http://schemas.microsoft.com/office/drawing/2014/main" id="{4632155C-24AD-4602-AF2A-11AFE1E78549}"/>
+                </a:ext>
+              </a:extLst>
+            </p:cNvPr>
+            <p:cNvSpPr txBox="1"/>
+            <p:nvPr/>
+          </p:nvSpPr>
+          <p:spPr>
+            <a:xfrm>
+              <a:off x="866775" y="3995738"/>
+              <a:ext cx="2838450" cy="1595777"/>
+            </a:xfrm>
+            <a:prstGeom prst="rect">
+              <a:avLst/>
+            </a:prstGeom>
+            <a:noFill/>
+            <a:ln>
+              <a:noFill/>
+            </a:ln>
+          </p:spPr>
+          <p:txBody>
+            <a:bodyPr spcFirstLastPara="1" wrap="square" lIns="0" tIns="0" rIns="0" bIns="0" anchor="t" anchorCtr="0">
+              <a:spAutoFit/>
+            </a:bodyPr>
+            <a:lstStyle/>
+            <a:p>
+              <a:pPr marL="0" marR="0" lvl="0" indent="0" algn="ctr" rtl="0">
+                <a:lnSpc>
+                  <a:spcPct val="160000"/>
+                </a:lnSpc>
+                <a:spcBef>
+                  <a:spcPts val="0"/>
+                </a:spcBef>
+                <a:spcAft>
+                  <a:spcPts val="0"/>
+                </a:spcAft>
+                <a:buNone/>
+              </a:pPr>
+              <a:r>
+                <a:rPr lang="en-US" sz="1200" b="0" i="0" u="none" strike="noStrike" cap="none" dirty="0" err="1">
+                  <a:solidFill>
+                    <a:srgbClr val="CCD6F6"/>
+                  </a:solidFill>
+                  <a:latin typeface="+mj-lt"/>
+                  <a:ea typeface="Noto Sans KR"/>
+                  <a:cs typeface="Noto Sans KR"/>
+                  <a:sym typeface="Noto Sans KR"/>
+                </a:rPr>
+                <a:t>과거의</a:t>
+              </a:r>
+              <a:r>
+                <a:rPr lang="en-US" sz="1200" b="0" i="0" u="none" strike="noStrike" cap="none" dirty="0">
+                  <a:solidFill>
+                    <a:srgbClr val="CCD6F6"/>
+                  </a:solidFill>
+                  <a:latin typeface="+mj-lt"/>
+                  <a:ea typeface="Noto Sans KR"/>
+                  <a:cs typeface="Noto Sans KR"/>
+                  <a:sym typeface="Noto Sans KR"/>
+                </a:rPr>
+                <a:t> </a:t>
+              </a:r>
+              <a:r>
+                <a:rPr lang="en-US" sz="1200" b="0" i="0" u="none" strike="noStrike" cap="none" dirty="0" err="1">
+                  <a:solidFill>
+                    <a:srgbClr val="CCD6F6"/>
+                  </a:solidFill>
+                  <a:latin typeface="+mj-lt"/>
+                  <a:ea typeface="Noto Sans KR"/>
+                  <a:cs typeface="Noto Sans KR"/>
+                  <a:sym typeface="Noto Sans KR"/>
+                </a:rPr>
+                <a:t>주가</a:t>
+              </a:r>
+              <a:r>
+                <a:rPr lang="en-US" sz="1200" b="0" i="0" u="none" strike="noStrike" cap="none" dirty="0">
+                  <a:solidFill>
+                    <a:srgbClr val="CCD6F6"/>
+                  </a:solidFill>
+                  <a:latin typeface="+mj-lt"/>
+                  <a:ea typeface="Noto Sans KR"/>
+                  <a:cs typeface="Noto Sans KR"/>
+                  <a:sym typeface="Noto Sans KR"/>
+                </a:rPr>
+                <a:t> </a:t>
+              </a:r>
+              <a:r>
+                <a:rPr lang="en-US" sz="1200" b="0" i="0" u="none" strike="noStrike" cap="none" dirty="0" err="1">
+                  <a:solidFill>
+                    <a:srgbClr val="CCD6F6"/>
+                  </a:solidFill>
+                  <a:latin typeface="+mj-lt"/>
+                  <a:ea typeface="Noto Sans KR"/>
+                  <a:cs typeface="Noto Sans KR"/>
+                  <a:sym typeface="Noto Sans KR"/>
+                </a:rPr>
+                <a:t>흐름</a:t>
+              </a:r>
+              <a:r>
+                <a:rPr lang="en-US" sz="1200" b="0" i="0" u="none" strike="noStrike" cap="none" dirty="0">
+                  <a:solidFill>
+                    <a:srgbClr val="CCD6F6"/>
+                  </a:solidFill>
+                  <a:latin typeface="+mj-lt"/>
+                  <a:ea typeface="Noto Sans KR"/>
+                  <a:cs typeface="Noto Sans KR"/>
+                  <a:sym typeface="Noto Sans KR"/>
+                </a:rPr>
+                <a:t>, </a:t>
+              </a:r>
+              <a:r>
+                <a:rPr lang="en-US" sz="1200" b="0" i="0" u="none" strike="noStrike" cap="none" dirty="0" err="1">
+                  <a:solidFill>
+                    <a:srgbClr val="CCD6F6"/>
+                  </a:solidFill>
+                  <a:latin typeface="+mj-lt"/>
+                  <a:ea typeface="Noto Sans KR"/>
+                  <a:cs typeface="Noto Sans KR"/>
+                  <a:sym typeface="Noto Sans KR"/>
+                </a:rPr>
+                <a:t>거래량</a:t>
+              </a:r>
+              <a:r>
+                <a:rPr lang="en-US" sz="1200" b="0" i="0" u="none" strike="noStrike" cap="none" dirty="0">
+                  <a:solidFill>
+                    <a:srgbClr val="CCD6F6"/>
+                  </a:solidFill>
+                  <a:latin typeface="+mj-lt"/>
+                  <a:ea typeface="Noto Sans KR"/>
+                  <a:cs typeface="Noto Sans KR"/>
+                  <a:sym typeface="Noto Sans KR"/>
+                </a:rPr>
+                <a:t> </a:t>
+              </a:r>
+              <a:r>
+                <a:rPr lang="en-US" sz="1200" b="0" i="0" u="none" strike="noStrike" cap="none" dirty="0" err="1">
+                  <a:solidFill>
+                    <a:srgbClr val="CCD6F6"/>
+                  </a:solidFill>
+                  <a:latin typeface="+mj-lt"/>
+                  <a:ea typeface="Noto Sans KR"/>
+                  <a:cs typeface="Noto Sans KR"/>
+                  <a:sym typeface="Noto Sans KR"/>
+                </a:rPr>
+                <a:t>등의</a:t>
+              </a:r>
+              <a:r>
+                <a:rPr lang="en-US" sz="1200" b="0" i="0" u="none" strike="noStrike" cap="none" dirty="0">
+                  <a:solidFill>
+                    <a:srgbClr val="CCD6F6"/>
+                  </a:solidFill>
+                  <a:latin typeface="+mj-lt"/>
+                  <a:ea typeface="Noto Sans KR"/>
+                  <a:cs typeface="Noto Sans KR"/>
+                  <a:sym typeface="Noto Sans KR"/>
+                </a:rPr>
+                <a:t> </a:t>
+              </a:r>
+              <a:r>
+                <a:rPr lang="en-US" sz="1200" b="0" i="0" u="none" strike="noStrike" cap="none" dirty="0" err="1">
+                  <a:solidFill>
+                    <a:srgbClr val="CCD6F6"/>
+                  </a:solidFill>
+                  <a:latin typeface="+mj-lt"/>
+                  <a:ea typeface="Noto Sans KR"/>
+                  <a:cs typeface="Noto Sans KR"/>
+                  <a:sym typeface="Noto Sans KR"/>
+                </a:rPr>
+                <a:t>시계열</a:t>
+              </a:r>
+              <a:r>
+                <a:rPr lang="en-US" sz="1200" b="0" i="0" u="none" strike="noStrike" cap="none" dirty="0">
+                  <a:solidFill>
+                    <a:srgbClr val="CCD6F6"/>
+                  </a:solidFill>
+                  <a:latin typeface="+mj-lt"/>
+                  <a:ea typeface="Noto Sans KR"/>
+                  <a:cs typeface="Noto Sans KR"/>
+                  <a:sym typeface="Noto Sans KR"/>
+                </a:rPr>
+                <a:t> </a:t>
+              </a:r>
+              <a:r>
+                <a:rPr lang="en-US" sz="1200" b="0" i="0" u="none" strike="noStrike" cap="none" dirty="0" err="1">
+                  <a:solidFill>
+                    <a:srgbClr val="CCD6F6"/>
+                  </a:solidFill>
+                  <a:latin typeface="+mj-lt"/>
+                  <a:ea typeface="Noto Sans KR"/>
+                  <a:cs typeface="Noto Sans KR"/>
+                  <a:sym typeface="Noto Sans KR"/>
+                </a:rPr>
+                <a:t>패턴을</a:t>
+              </a:r>
+              <a:r>
+                <a:rPr lang="en-US" sz="1200" b="0" i="0" u="none" strike="noStrike" cap="none" dirty="0">
+                  <a:solidFill>
+                    <a:srgbClr val="CCD6F6"/>
+                  </a:solidFill>
+                  <a:latin typeface="+mj-lt"/>
+                  <a:ea typeface="Noto Sans KR"/>
+                  <a:cs typeface="Noto Sans KR"/>
+                  <a:sym typeface="Noto Sans KR"/>
+                </a:rPr>
+                <a:t> </a:t>
+              </a:r>
+              <a:r>
+                <a:rPr lang="en-US" sz="1200" b="0" i="0" u="none" strike="noStrike" cap="none" dirty="0" err="1">
+                  <a:solidFill>
+                    <a:srgbClr val="CCD6F6"/>
+                  </a:solidFill>
+                  <a:latin typeface="+mj-lt"/>
+                  <a:ea typeface="Noto Sans KR"/>
+                  <a:cs typeface="Noto Sans KR"/>
+                  <a:sym typeface="Noto Sans KR"/>
+                </a:rPr>
+                <a:t>학습하여</a:t>
+              </a:r>
+              <a:r>
+                <a:rPr lang="en-US" sz="1200" b="0" i="0" u="none" strike="noStrike" cap="none" dirty="0">
+                  <a:solidFill>
+                    <a:srgbClr val="CCD6F6"/>
+                  </a:solidFill>
+                  <a:latin typeface="+mj-lt"/>
+                  <a:ea typeface="Noto Sans KR"/>
+                  <a:cs typeface="Noto Sans KR"/>
+                  <a:sym typeface="Noto Sans KR"/>
+                </a:rPr>
+                <a:t> </a:t>
+              </a:r>
+              <a:r>
+                <a:rPr lang="en-US" sz="1200" b="0" i="0" u="none" strike="noStrike" cap="none" dirty="0" err="1">
+                  <a:solidFill>
+                    <a:srgbClr val="CCD6F6"/>
+                  </a:solidFill>
+                  <a:latin typeface="+mj-lt"/>
+                  <a:ea typeface="Noto Sans KR"/>
+                  <a:cs typeface="Noto Sans KR"/>
+                  <a:sym typeface="Noto Sans KR"/>
+                </a:rPr>
+                <a:t>내일의</a:t>
+              </a:r>
+              <a:r>
+                <a:rPr lang="en-US" sz="1200" b="0" i="0" u="none" strike="noStrike" cap="none" dirty="0">
+                  <a:solidFill>
+                    <a:srgbClr val="CCD6F6"/>
+                  </a:solidFill>
+                  <a:latin typeface="+mj-lt"/>
+                  <a:ea typeface="Noto Sans KR"/>
+                  <a:cs typeface="Noto Sans KR"/>
+                  <a:sym typeface="Noto Sans KR"/>
+                </a:rPr>
+                <a:t> </a:t>
+              </a:r>
+              <a:r>
+                <a:rPr lang="en-US" sz="1200" b="0" i="0" u="none" strike="noStrike" cap="none" dirty="0" err="1">
+                  <a:solidFill>
+                    <a:srgbClr val="CCD6F6"/>
+                  </a:solidFill>
+                  <a:latin typeface="+mj-lt"/>
+                  <a:ea typeface="Noto Sans KR"/>
+                  <a:cs typeface="Noto Sans KR"/>
+                  <a:sym typeface="Noto Sans KR"/>
+                </a:rPr>
+                <a:t>자산</a:t>
+              </a:r>
+              <a:r>
+                <a:rPr lang="en-US" sz="1200" b="0" i="0" u="none" strike="noStrike" cap="none" dirty="0">
+                  <a:solidFill>
+                    <a:srgbClr val="CCD6F6"/>
+                  </a:solidFill>
+                  <a:latin typeface="+mj-lt"/>
+                  <a:ea typeface="Noto Sans KR"/>
+                  <a:cs typeface="Noto Sans KR"/>
+                  <a:sym typeface="Noto Sans KR"/>
+                </a:rPr>
+                <a:t> </a:t>
+              </a:r>
+              <a:r>
+                <a:rPr lang="en-US" sz="1200" b="0" i="0" u="none" strike="noStrike" cap="none" dirty="0" err="1">
+                  <a:solidFill>
+                    <a:srgbClr val="CCD6F6"/>
+                  </a:solidFill>
+                  <a:latin typeface="+mj-lt"/>
+                  <a:ea typeface="Noto Sans KR"/>
+                  <a:cs typeface="Noto Sans KR"/>
+                  <a:sym typeface="Noto Sans KR"/>
+                </a:rPr>
+                <a:t>가격</a:t>
+              </a:r>
+              <a:r>
+                <a:rPr lang="en-US" sz="1200" b="0" i="0" u="none" strike="noStrike" cap="none" dirty="0">
+                  <a:solidFill>
+                    <a:srgbClr val="CCD6F6"/>
+                  </a:solidFill>
+                  <a:latin typeface="+mj-lt"/>
+                  <a:ea typeface="Noto Sans KR"/>
+                  <a:cs typeface="Noto Sans KR"/>
+                  <a:sym typeface="Noto Sans KR"/>
+                </a:rPr>
+                <a:t> </a:t>
+              </a:r>
+              <a:r>
+                <a:rPr lang="en-US" sz="1200" b="0" i="0" u="none" strike="noStrike" cap="none" dirty="0" err="1">
+                  <a:solidFill>
+                    <a:srgbClr val="CCD6F6"/>
+                  </a:solidFill>
+                  <a:latin typeface="+mj-lt"/>
+                  <a:ea typeface="Noto Sans KR"/>
+                  <a:cs typeface="Noto Sans KR"/>
+                  <a:sym typeface="Noto Sans KR"/>
+                </a:rPr>
+                <a:t>변동성이나</a:t>
+              </a:r>
+              <a:r>
+                <a:rPr lang="en-US" sz="1200" b="0" i="0" u="none" strike="noStrike" cap="none" dirty="0">
+                  <a:solidFill>
+                    <a:srgbClr val="CCD6F6"/>
+                  </a:solidFill>
+                  <a:latin typeface="+mj-lt"/>
+                  <a:ea typeface="Noto Sans KR"/>
+                  <a:cs typeface="Noto Sans KR"/>
+                  <a:sym typeface="Noto Sans KR"/>
+                </a:rPr>
+                <a:t> </a:t>
+              </a:r>
+              <a:r>
+                <a:rPr lang="en-US" sz="1200" b="0" i="0" u="none" strike="noStrike" cap="none" dirty="0" err="1">
+                  <a:solidFill>
+                    <a:srgbClr val="CCD6F6"/>
+                  </a:solidFill>
+                  <a:latin typeface="+mj-lt"/>
+                  <a:ea typeface="Noto Sans KR"/>
+                  <a:cs typeface="Noto Sans KR"/>
+                  <a:sym typeface="Noto Sans KR"/>
+                </a:rPr>
+                <a:t>시장의</a:t>
+              </a:r>
+              <a:r>
+                <a:rPr lang="en-US" sz="1200" b="0" i="0" u="none" strike="noStrike" cap="none" dirty="0">
+                  <a:solidFill>
+                    <a:srgbClr val="CCD6F6"/>
+                  </a:solidFill>
+                  <a:latin typeface="+mj-lt"/>
+                  <a:ea typeface="Noto Sans KR"/>
+                  <a:cs typeface="Noto Sans KR"/>
+                  <a:sym typeface="Noto Sans KR"/>
+                </a:rPr>
+                <a:t> </a:t>
+              </a:r>
+              <a:r>
+                <a:rPr lang="en-US" sz="1200" b="0" i="0" u="none" strike="noStrike" cap="none" dirty="0" err="1">
+                  <a:solidFill>
+                    <a:srgbClr val="CCD6F6"/>
+                  </a:solidFill>
+                  <a:latin typeface="+mj-lt"/>
+                  <a:ea typeface="Noto Sans KR"/>
+                  <a:cs typeface="Noto Sans KR"/>
+                  <a:sym typeface="Noto Sans KR"/>
+                </a:rPr>
+                <a:t>방향을</a:t>
+              </a:r>
+              <a:r>
+                <a:rPr lang="en-US" sz="1200" b="0" i="0" u="none" strike="noStrike" cap="none" dirty="0">
+                  <a:solidFill>
+                    <a:srgbClr val="CCD6F6"/>
+                  </a:solidFill>
+                  <a:latin typeface="+mj-lt"/>
+                  <a:ea typeface="Noto Sans KR"/>
+                  <a:cs typeface="Noto Sans KR"/>
+                  <a:sym typeface="Noto Sans KR"/>
+                </a:rPr>
+                <a:t> </a:t>
+              </a:r>
+              <a:r>
+                <a:rPr lang="en-US" sz="1200" b="0" i="0" u="none" strike="noStrike" cap="none" dirty="0" err="1">
+                  <a:solidFill>
+                    <a:srgbClr val="CCD6F6"/>
+                  </a:solidFill>
+                  <a:latin typeface="+mj-lt"/>
+                  <a:ea typeface="Noto Sans KR"/>
+                  <a:cs typeface="Noto Sans KR"/>
+                  <a:sym typeface="Noto Sans KR"/>
+                </a:rPr>
+                <a:t>예측합니다</a:t>
+              </a:r>
+              <a:r>
+                <a:rPr lang="en-US" sz="1200" b="0" i="0" u="none" strike="noStrike" cap="none" dirty="0">
+                  <a:solidFill>
+                    <a:srgbClr val="CCD6F6"/>
+                  </a:solidFill>
+                  <a:latin typeface="+mj-lt"/>
+                  <a:ea typeface="Noto Sans KR"/>
+                  <a:cs typeface="Noto Sans KR"/>
+                  <a:sym typeface="Noto Sans KR"/>
+                </a:rPr>
+                <a:t>.</a:t>
+              </a:r>
+              <a:endParaRPr sz="1200" dirty="0">
+                <a:latin typeface="+mj-lt"/>
+              </a:endParaRPr>
+            </a:p>
+          </p:txBody>
+        </p:sp>
+        <p:sp>
+          <p:nvSpPr>
+            <p:cNvPr id="15" name="Google Shape;111;p15">
+              <a:extLst>
+                <a:ext uri="{FF2B5EF4-FFF2-40B4-BE49-F238E27FC236}">
+                  <a16:creationId xmlns:a16="http://schemas.microsoft.com/office/drawing/2014/main" id="{2F773344-99D7-4B8D-8F90-DE7333EBC7F3}"/>
+                </a:ext>
+              </a:extLst>
+            </p:cNvPr>
+            <p:cNvSpPr txBox="1"/>
+            <p:nvPr/>
+          </p:nvSpPr>
+          <p:spPr>
+            <a:xfrm>
+              <a:off x="5015865" y="3376612"/>
+              <a:ext cx="2160271" cy="332453"/>
+            </a:xfrm>
+            <a:prstGeom prst="rect">
+              <a:avLst/>
+            </a:prstGeom>
+            <a:noFill/>
+            <a:ln>
+              <a:noFill/>
+            </a:ln>
+          </p:spPr>
+          <p:txBody>
+            <a:bodyPr spcFirstLastPara="1" wrap="square" lIns="0" tIns="0" rIns="0" bIns="0" anchor="t" anchorCtr="0">
+              <a:spAutoFit/>
+            </a:bodyPr>
+            <a:lstStyle/>
+            <a:p>
+              <a:pPr marL="0" marR="0" lvl="0" indent="0" algn="ctr" rtl="0">
+                <a:spcBef>
+                  <a:spcPts val="0"/>
+                </a:spcBef>
+                <a:spcAft>
+                  <a:spcPts val="0"/>
+                </a:spcAft>
+                <a:buNone/>
+              </a:pPr>
+              <a:r>
+                <a:rPr lang="en-US" sz="1600" b="1" i="0" u="none" strike="noStrike" cap="none">
+                  <a:solidFill>
+                    <a:srgbClr val="E6F1FF"/>
+                  </a:solidFill>
+                  <a:latin typeface="+mj-lt"/>
+                  <a:ea typeface="Poppins"/>
+                  <a:cs typeface="Poppins"/>
+                  <a:sym typeface="Poppins"/>
+                </a:rPr>
+                <a:t>센서 및 IoT 분석</a:t>
+              </a:r>
+              <a:endParaRPr sz="1600">
+                <a:latin typeface="+mj-lt"/>
+              </a:endParaRPr>
+            </a:p>
+          </p:txBody>
+        </p:sp>
+        <p:sp>
+          <p:nvSpPr>
+            <p:cNvPr id="16" name="Google Shape;112;p15">
+              <a:extLst>
+                <a:ext uri="{FF2B5EF4-FFF2-40B4-BE49-F238E27FC236}">
+                  <a16:creationId xmlns:a16="http://schemas.microsoft.com/office/drawing/2014/main" id="{BB007F54-38A6-4229-9452-02D05ABF0CA7}"/>
+                </a:ext>
+              </a:extLst>
+            </p:cNvPr>
+            <p:cNvSpPr txBox="1"/>
+            <p:nvPr/>
+          </p:nvSpPr>
+          <p:spPr>
+            <a:xfrm>
+              <a:off x="4676775" y="3995738"/>
+              <a:ext cx="2838450" cy="1595777"/>
+            </a:xfrm>
+            <a:prstGeom prst="rect">
+              <a:avLst/>
+            </a:prstGeom>
+            <a:noFill/>
+            <a:ln>
+              <a:noFill/>
+            </a:ln>
+          </p:spPr>
+          <p:txBody>
+            <a:bodyPr spcFirstLastPara="1" wrap="square" lIns="0" tIns="0" rIns="0" bIns="0" anchor="t" anchorCtr="0">
+              <a:spAutoFit/>
+            </a:bodyPr>
+            <a:lstStyle/>
+            <a:p>
+              <a:pPr marL="0" marR="0" lvl="0" indent="0" algn="ctr" rtl="0">
+                <a:lnSpc>
+                  <a:spcPct val="160000"/>
+                </a:lnSpc>
+                <a:spcBef>
+                  <a:spcPts val="0"/>
+                </a:spcBef>
+                <a:spcAft>
+                  <a:spcPts val="0"/>
+                </a:spcAft>
+                <a:buNone/>
+              </a:pPr>
+              <a:r>
+                <a:rPr lang="en-US" sz="1200" b="0" i="0" u="none" strike="noStrike" cap="none">
+                  <a:solidFill>
+                    <a:srgbClr val="CCD6F6"/>
+                  </a:solidFill>
+                  <a:latin typeface="+mj-lt"/>
+                  <a:ea typeface="Noto Sans KR"/>
+                  <a:cs typeface="Noto Sans KR"/>
+                  <a:sym typeface="Noto Sans KR"/>
+                </a:rPr>
+                <a:t>스마트 팩토리의 기계 설비에서 1초 단위로 뿜어져 나오는 진동/온도 데이터를 실시간 분석해 고장을 사전 감지합니다.</a:t>
+              </a:r>
+              <a:endParaRPr sz="1200">
+                <a:latin typeface="+mj-lt"/>
+              </a:endParaRPr>
+            </a:p>
+          </p:txBody>
+        </p:sp>
+        <p:sp>
+          <p:nvSpPr>
+            <p:cNvPr id="17" name="Google Shape;113;p15">
+              <a:extLst>
+                <a:ext uri="{FF2B5EF4-FFF2-40B4-BE49-F238E27FC236}">
+                  <a16:creationId xmlns:a16="http://schemas.microsoft.com/office/drawing/2014/main" id="{8899C80A-A09A-489E-A9E8-C4224CA7A21E}"/>
+                </a:ext>
+              </a:extLst>
+            </p:cNvPr>
+            <p:cNvSpPr txBox="1"/>
+            <p:nvPr/>
+          </p:nvSpPr>
+          <p:spPr>
+            <a:xfrm>
+              <a:off x="8785860" y="3376612"/>
+              <a:ext cx="2240279" cy="332453"/>
+            </a:xfrm>
+            <a:prstGeom prst="rect">
+              <a:avLst/>
+            </a:prstGeom>
+            <a:noFill/>
+            <a:ln>
+              <a:noFill/>
+            </a:ln>
+          </p:spPr>
+          <p:txBody>
+            <a:bodyPr spcFirstLastPara="1" wrap="square" lIns="0" tIns="0" rIns="0" bIns="0" anchor="t" anchorCtr="0">
+              <a:spAutoFit/>
+            </a:bodyPr>
+            <a:lstStyle/>
+            <a:p>
+              <a:pPr marL="0" marR="0" lvl="0" indent="0" algn="ctr" rtl="0">
+                <a:spcBef>
+                  <a:spcPts val="0"/>
+                </a:spcBef>
+                <a:spcAft>
+                  <a:spcPts val="0"/>
+                </a:spcAft>
+                <a:buNone/>
+              </a:pPr>
+              <a:r>
+                <a:rPr lang="en-US" sz="1600" b="1" i="0" u="none" strike="noStrike" cap="none">
+                  <a:solidFill>
+                    <a:srgbClr val="E6F1FF"/>
+                  </a:solidFill>
+                  <a:latin typeface="+mj-lt"/>
+                  <a:ea typeface="Poppins"/>
+                  <a:cs typeface="Poppins"/>
+                  <a:sym typeface="Poppins"/>
+                </a:rPr>
+                <a:t>수요 및 재고 예측</a:t>
+              </a:r>
+              <a:endParaRPr sz="1600">
+                <a:latin typeface="+mj-lt"/>
+              </a:endParaRPr>
+            </a:p>
+          </p:txBody>
+        </p:sp>
+        <p:sp>
+          <p:nvSpPr>
+            <p:cNvPr id="18" name="Google Shape;114;p15">
+              <a:extLst>
+                <a:ext uri="{FF2B5EF4-FFF2-40B4-BE49-F238E27FC236}">
+                  <a16:creationId xmlns:a16="http://schemas.microsoft.com/office/drawing/2014/main" id="{977E1FED-9298-4433-95CF-5B1BF1A99692}"/>
+                </a:ext>
+              </a:extLst>
+            </p:cNvPr>
+            <p:cNvSpPr txBox="1"/>
+            <p:nvPr/>
+          </p:nvSpPr>
+          <p:spPr>
+            <a:xfrm>
+              <a:off x="8486775" y="3995738"/>
+              <a:ext cx="2838450" cy="1595777"/>
+            </a:xfrm>
+            <a:prstGeom prst="rect">
+              <a:avLst/>
+            </a:prstGeom>
+            <a:noFill/>
+            <a:ln>
+              <a:noFill/>
+            </a:ln>
+          </p:spPr>
+          <p:txBody>
+            <a:bodyPr spcFirstLastPara="1" wrap="square" lIns="0" tIns="0" rIns="0" bIns="0" anchor="t" anchorCtr="0">
+              <a:spAutoFit/>
+            </a:bodyPr>
+            <a:lstStyle/>
+            <a:p>
+              <a:pPr marL="0" marR="0" lvl="0" indent="0" algn="ctr" rtl="0">
+                <a:lnSpc>
+                  <a:spcPct val="160000"/>
+                </a:lnSpc>
+                <a:spcBef>
+                  <a:spcPts val="0"/>
+                </a:spcBef>
+                <a:spcAft>
+                  <a:spcPts val="0"/>
+                </a:spcAft>
+                <a:buNone/>
+              </a:pPr>
+              <a:r>
+                <a:rPr lang="en-US" sz="1200" b="0" i="0" u="none" strike="noStrike" cap="none">
+                  <a:solidFill>
+                    <a:srgbClr val="CCD6F6"/>
+                  </a:solidFill>
+                  <a:latin typeface="+mj-lt"/>
+                  <a:ea typeface="Noto Sans KR"/>
+                  <a:cs typeface="Noto Sans KR"/>
+                  <a:sym typeface="Noto Sans KR"/>
+                </a:rPr>
+                <a:t>쇼핑몰의 과거 판매량 추이, 요일별/계절별 시계열 특성을 파악하여 다음 달에 필요한 재고량을 계산합니다.</a:t>
+              </a:r>
+              <a:endParaRPr sz="1200">
+                <a:latin typeface="+mj-lt"/>
+              </a:endParaRPr>
+            </a:p>
+          </p:txBody>
+        </p:sp>
+        <p:pic>
+          <p:nvPicPr>
+            <p:cNvPr id="19" name="Google Shape;115;p15" descr="image.png">
+              <a:extLst>
+                <a:ext uri="{FF2B5EF4-FFF2-40B4-BE49-F238E27FC236}">
+                  <a16:creationId xmlns:a16="http://schemas.microsoft.com/office/drawing/2014/main" id="{B336ADE4-023B-4150-9163-3DFC4D22D073}"/>
+                </a:ext>
+              </a:extLst>
+            </p:cNvPr>
+            <p:cNvPicPr preferRelativeResize="0"/>
+            <p:nvPr/>
+          </p:nvPicPr>
+          <p:blipFill rotWithShape="1">
+            <a:blip r:embed="rId6">
+              <a:alphaModFix/>
+            </a:blip>
+            <a:srcRect/>
+            <a:stretch/>
+          </p:blipFill>
+          <p:spPr>
+            <a:xfrm>
+              <a:off x="2057400" y="2605087"/>
+              <a:ext cx="457200" cy="457200"/>
+            </a:xfrm>
+            <a:prstGeom prst="rect">
+              <a:avLst/>
+            </a:prstGeom>
+            <a:noFill/>
+            <a:ln>
+              <a:noFill/>
+            </a:ln>
+          </p:spPr>
+        </p:pic>
+        <p:pic>
+          <p:nvPicPr>
+            <p:cNvPr id="20" name="Google Shape;116;p15" descr="image.png">
+              <a:extLst>
+                <a:ext uri="{FF2B5EF4-FFF2-40B4-BE49-F238E27FC236}">
+                  <a16:creationId xmlns:a16="http://schemas.microsoft.com/office/drawing/2014/main" id="{C1228E3B-2455-44C3-A219-75833660ACFC}"/>
+                </a:ext>
+              </a:extLst>
+            </p:cNvPr>
+            <p:cNvPicPr preferRelativeResize="0"/>
+            <p:nvPr/>
+          </p:nvPicPr>
+          <p:blipFill rotWithShape="1">
+            <a:blip r:embed="rId7">
+              <a:alphaModFix/>
+            </a:blip>
+            <a:srcRect/>
+            <a:stretch/>
+          </p:blipFill>
+          <p:spPr>
+            <a:xfrm>
+              <a:off x="5838825" y="2605087"/>
+              <a:ext cx="514350" cy="457200"/>
+            </a:xfrm>
+            <a:prstGeom prst="rect">
+              <a:avLst/>
+            </a:prstGeom>
+            <a:noFill/>
+            <a:ln>
+              <a:noFill/>
+            </a:ln>
+          </p:spPr>
+        </p:pic>
+        <p:pic>
+          <p:nvPicPr>
+            <p:cNvPr id="21" name="Google Shape;117;p15" descr="image.png">
+              <a:extLst>
+                <a:ext uri="{FF2B5EF4-FFF2-40B4-BE49-F238E27FC236}">
+                  <a16:creationId xmlns:a16="http://schemas.microsoft.com/office/drawing/2014/main" id="{CF9E6C5E-8101-47FB-80AC-BFFEED983F7E}"/>
+                </a:ext>
+              </a:extLst>
+            </p:cNvPr>
+            <p:cNvPicPr preferRelativeResize="0"/>
+            <p:nvPr/>
+          </p:nvPicPr>
+          <p:blipFill rotWithShape="1">
+            <a:blip r:embed="rId8">
+              <a:alphaModFix/>
+            </a:blip>
+            <a:srcRect/>
+            <a:stretch/>
+          </p:blipFill>
+          <p:spPr>
+            <a:xfrm>
+              <a:off x="9620250" y="2605087"/>
+              <a:ext cx="571500" cy="457200"/>
+            </a:xfrm>
+            <a:prstGeom prst="rect">
+              <a:avLst/>
+            </a:prstGeom>
+            <a:noFill/>
+            <a:ln>
+              <a:noFill/>
+            </a:ln>
+          </p:spPr>
+        </p:pic>
+      </p:grpSp>
+    </p:spTree>
+    <p:extLst>
+      <p:ext uri="{BB962C8B-B14F-4D97-AF65-F5344CB8AC3E}">
+        <p14:creationId xmlns:p14="http://schemas.microsoft.com/office/powerpoint/2010/main" val="3900486841"/>
+      </p:ext>
+    </p:extLst>
+  </p:cSld>
+  <p:clrMapOvr>
+    <a:masterClrMapping/>
+  </p:clrMapOvr>
+</p:sld>
+</file>
+
+<file path=ppt/slides/slide22.xml><?xml version="1.0" encoding="utf-8"?>
+<p:sld xmlns:a="http://schemas.openxmlformats.org/drawingml/2006/main" xmlns:r="http://schemas.openxmlformats.org/officeDocument/2006/relationships" xmlns:p="http://schemas.openxmlformats.org/presentationml/2006/main">
+  <p:cSld>
+    <p:spTree>
+      <p:nvGrpSpPr>
+        <p:cNvPr id="1" name=""/>
+        <p:cNvGrpSpPr/>
+        <p:nvPr/>
+      </p:nvGrpSpPr>
+      <p:grpSpPr>
+        <a:xfrm>
+          <a:off x="0" y="0"/>
+          <a:ext cx="0" cy="0"/>
+          <a:chOff x="0" y="0"/>
+          <a:chExt cx="0" cy="0"/>
+        </a:xfrm>
+      </p:grpSpPr>
+      <p:sp>
+        <p:nvSpPr>
+          <p:cNvPr id="3" name="타원 2"/>
+          <p:cNvSpPr/>
+          <p:nvPr/>
+        </p:nvSpPr>
+        <p:spPr>
+          <a:xfrm>
+            <a:off x="4067944" y="74100"/>
+            <a:ext cx="936104" cy="936104"/>
+          </a:xfrm>
+          <a:prstGeom prst="ellipse">
+            <a:avLst/>
+          </a:prstGeom>
+          <a:solidFill>
+            <a:schemeClr val="tx2">
+              <a:lumMod val="75000"/>
+            </a:schemeClr>
+          </a:solidFill>
+          <a:ln>
+            <a:noFill/>
+          </a:ln>
+        </p:spPr>
+        <p:style>
+          <a:lnRef idx="2">
+            <a:schemeClr val="accent1">
+              <a:shade val="50000"/>
+            </a:schemeClr>
+          </a:lnRef>
+          <a:fillRef idx="1">
+            <a:schemeClr val="accent1"/>
+          </a:fillRef>
+          <a:effectRef idx="0">
+            <a:schemeClr val="accent1"/>
+          </a:effectRef>
+          <a:fontRef idx="minor">
+            <a:schemeClr val="lt1"/>
+          </a:fontRef>
+        </p:style>
+        <p:txBody>
+          <a:bodyPr rtlCol="0" anchor="ctr"/>
+          <a:lstStyle/>
+          <a:p>
+            <a:pPr algn="ctr"/>
+            <a:endParaRPr lang="ko-KR" altLang="en-US"/>
+          </a:p>
+        </p:txBody>
+      </p:sp>
+      <p:sp>
+        <p:nvSpPr>
+          <p:cNvPr id="9" name="TextBox 8"/>
+          <p:cNvSpPr txBox="1"/>
+          <p:nvPr/>
+        </p:nvSpPr>
+        <p:spPr>
+          <a:xfrm>
+            <a:off x="3995936" y="479095"/>
+            <a:ext cx="1080120" cy="461665"/>
+          </a:xfrm>
+          <a:prstGeom prst="rect">
+            <a:avLst/>
+          </a:prstGeom>
+          <a:noFill/>
+        </p:spPr>
+        <p:txBody>
+          <a:bodyPr wrap="square" rtlCol="0">
+            <a:spAutoFit/>
+          </a:bodyPr>
+          <a:lstStyle/>
+          <a:p>
+            <a:pPr algn="ctr"/>
+            <a:r>
+              <a:rPr lang="en-US" altLang="ko-KR" sz="2400" dirty="0">
+                <a:solidFill>
+                  <a:schemeClr val="bg1"/>
+                </a:solidFill>
+                <a:latin typeface="HY헤드라인M" pitchFamily="18" charset="-127"/>
+                <a:ea typeface="HY헤드라인M" pitchFamily="18" charset="-127"/>
+              </a:rPr>
+              <a:t>01</a:t>
+            </a:r>
+            <a:endParaRPr lang="ko-KR" altLang="en-US" sz="2400" dirty="0">
+              <a:solidFill>
+                <a:schemeClr val="bg1"/>
+              </a:solidFill>
+              <a:latin typeface="HY헤드라인M" pitchFamily="18" charset="-127"/>
+              <a:ea typeface="HY헤드라인M" pitchFamily="18" charset="-127"/>
+            </a:endParaRPr>
+          </a:p>
+        </p:txBody>
+      </p:sp>
+      <p:sp>
+        <p:nvSpPr>
+          <p:cNvPr id="4" name="TextBox 3"/>
+          <p:cNvSpPr txBox="1"/>
+          <p:nvPr/>
+        </p:nvSpPr>
+        <p:spPr>
+          <a:xfrm>
+            <a:off x="971600" y="1700808"/>
+            <a:ext cx="7200800" cy="2947282"/>
+          </a:xfrm>
+          <a:prstGeom prst="rect">
+            <a:avLst/>
+          </a:prstGeom>
+          <a:noFill/>
+        </p:spPr>
+        <p:txBody>
+          <a:bodyPr wrap="square" rtlCol="0">
+            <a:spAutoFit/>
+          </a:bodyPr>
+          <a:lstStyle/>
+          <a:p>
+            <a:pPr marL="285750" indent="-285750">
+              <a:lnSpc>
+                <a:spcPct val="150000"/>
+              </a:lnSpc>
+              <a:buFont typeface="Arial" panose="020B0604020202020204" pitchFamily="34" charset="0"/>
+              <a:buChar char="•"/>
+            </a:pPr>
+            <a:r>
+              <a:rPr lang="ko-KR" altLang="en-US" dirty="0"/>
+              <a:t>시계열 데이터를 분석할 때 </a:t>
+            </a:r>
+            <a:r>
+              <a:rPr lang="en-US" altLang="ko-KR" dirty="0"/>
+              <a:t>RNN</a:t>
+            </a:r>
+            <a:r>
+              <a:rPr lang="ko-KR" altLang="en-US" dirty="0"/>
+              <a:t>은 매 시점</a:t>
+            </a:r>
+            <a:r>
+              <a:rPr lang="en-US" altLang="ko-KR" dirty="0"/>
+              <a:t>(t)</a:t>
+            </a:r>
+            <a:r>
+              <a:rPr lang="ko-KR" altLang="en-US" dirty="0"/>
+              <a:t>마다 </a:t>
+            </a:r>
+            <a:r>
+              <a:rPr lang="en-US" altLang="ko-KR" dirty="0"/>
+              <a:t>'</a:t>
+            </a:r>
+            <a:r>
+              <a:rPr lang="ko-KR" altLang="en-US" dirty="0"/>
+              <a:t>현재 들어온 센서</a:t>
+            </a:r>
+            <a:r>
+              <a:rPr lang="en-US" altLang="ko-KR" dirty="0"/>
+              <a:t>/</a:t>
+            </a:r>
+            <a:r>
+              <a:rPr lang="ko-KR" altLang="en-US" dirty="0"/>
+              <a:t>가격 데이터</a:t>
+            </a:r>
+            <a:r>
+              <a:rPr lang="en-US" altLang="ko-KR" dirty="0"/>
+              <a:t>'</a:t>
+            </a:r>
+            <a:r>
+              <a:rPr lang="ko-KR" altLang="en-US" dirty="0"/>
+              <a:t>와 </a:t>
+            </a:r>
+            <a:r>
+              <a:rPr lang="en-US" altLang="ko-KR" dirty="0"/>
+              <a:t>'</a:t>
+            </a:r>
+            <a:r>
+              <a:rPr lang="ko-KR" altLang="en-US" dirty="0"/>
+              <a:t>이전 시점까지 누적된 추세 정보</a:t>
+            </a:r>
+            <a:r>
+              <a:rPr lang="en-US" altLang="ko-KR" dirty="0"/>
+              <a:t>(</a:t>
+            </a:r>
+            <a:r>
+              <a:rPr lang="ko-KR" altLang="en-US" dirty="0"/>
+              <a:t>은닉 상태</a:t>
+            </a:r>
+            <a:r>
+              <a:rPr lang="en-US" altLang="ko-KR" dirty="0"/>
+              <a:t>)'</a:t>
+            </a:r>
+            <a:r>
+              <a:rPr lang="ko-KR" altLang="en-US" dirty="0"/>
+              <a:t>를 함께 결합</a:t>
+            </a:r>
+            <a:endParaRPr lang="en-US" altLang="ko-KR" dirty="0"/>
+          </a:p>
+          <a:p>
+            <a:pPr marL="285750" indent="-285750">
+              <a:lnSpc>
+                <a:spcPct val="150000"/>
+              </a:lnSpc>
+              <a:buFont typeface="Arial" panose="020B0604020202020204" pitchFamily="34" charset="0"/>
+              <a:buChar char="•"/>
+            </a:pPr>
+            <a:r>
+              <a:rPr lang="ko-KR" altLang="en-US" dirty="0"/>
+              <a:t>이렇게 만들어진 현재 시점의 새로운 요약본은</a:t>
+            </a:r>
+            <a:r>
+              <a:rPr lang="en-US" altLang="ko-KR" dirty="0"/>
+              <a:t>, </a:t>
+            </a:r>
+            <a:r>
+              <a:rPr lang="ko-KR" altLang="en-US" dirty="0"/>
+              <a:t>순환 고리</a:t>
+            </a:r>
+            <a:r>
+              <a:rPr lang="en-US" altLang="ko-KR" dirty="0"/>
+              <a:t>(Recurrent Loop)</a:t>
+            </a:r>
+            <a:r>
+              <a:rPr lang="ko-KR" altLang="en-US" dirty="0"/>
+              <a:t>를 타고 다음 시간대</a:t>
+            </a:r>
+            <a:r>
+              <a:rPr lang="en-US" altLang="ko-KR" dirty="0"/>
+              <a:t>(t+1)</a:t>
+            </a:r>
+            <a:r>
+              <a:rPr lang="ko-KR" altLang="en-US" dirty="0"/>
+              <a:t>의 데이터를 해석하는 데 매우 중요한 기준점이 됩니다</a:t>
+            </a:r>
+            <a:r>
+              <a:rPr lang="en-US" altLang="ko-KR" dirty="0"/>
+              <a:t>.</a:t>
+            </a:r>
+          </a:p>
+          <a:p>
+            <a:pPr marL="285750" indent="-285750">
+              <a:lnSpc>
+                <a:spcPct val="150000"/>
+              </a:lnSpc>
+              <a:buFont typeface="Arial" panose="020B0604020202020204" pitchFamily="34" charset="0"/>
+              <a:buChar char="•"/>
+            </a:pPr>
+            <a:endParaRPr lang="en-US" altLang="ko-KR" dirty="0"/>
+          </a:p>
+        </p:txBody>
+      </p:sp>
+      <p:sp>
+        <p:nvSpPr>
+          <p:cNvPr id="6" name="TextBox 5"/>
+          <p:cNvSpPr txBox="1"/>
+          <p:nvPr/>
+        </p:nvSpPr>
+        <p:spPr>
+          <a:xfrm>
+            <a:off x="539552" y="1065096"/>
+            <a:ext cx="7992888" cy="446276"/>
+          </a:xfrm>
+          <a:prstGeom prst="rect">
+            <a:avLst/>
+          </a:prstGeom>
+          <a:noFill/>
+        </p:spPr>
+        <p:txBody>
+          <a:bodyPr wrap="square" rtlCol="0">
+            <a:spAutoFit/>
+          </a:bodyPr>
+          <a:lstStyle/>
+          <a:p>
+            <a:r>
+              <a:rPr lang="ko-KR" altLang="en-US" sz="2300" dirty="0"/>
+              <a:t>핵심 구조</a:t>
+            </a:r>
+            <a:r>
+              <a:rPr lang="en-US" altLang="ko-KR" sz="2300" dirty="0"/>
+              <a:t>: </a:t>
+            </a:r>
+            <a:r>
+              <a:rPr lang="ko-KR" altLang="en-US" sz="2300" dirty="0"/>
+              <a:t>시간의 흐름을 잇는 은닉 상태</a:t>
+            </a:r>
+          </a:p>
+        </p:txBody>
+      </p:sp>
+    </p:spTree>
+    <p:extLst>
+      <p:ext uri="{BB962C8B-B14F-4D97-AF65-F5344CB8AC3E}">
+        <p14:creationId xmlns:p14="http://schemas.microsoft.com/office/powerpoint/2010/main" val="2496937733"/>
+      </p:ext>
+    </p:extLst>
+  </p:cSld>
+  <p:clrMapOvr>
+    <a:masterClrMapping/>
+  </p:clrMapOvr>
+</p:sld>
+</file>
+
+<file path=ppt/slides/slide23.xml><?xml version="1.0" encoding="utf-8"?>
+<p:sld xmlns:a="http://schemas.openxmlformats.org/drawingml/2006/main" xmlns:r="http://schemas.openxmlformats.org/officeDocument/2006/relationships" xmlns:p="http://schemas.openxmlformats.org/presentationml/2006/main">
+  <p:cSld>
+    <p:spTree>
+      <p:nvGrpSpPr>
+        <p:cNvPr id="1" name=""/>
+        <p:cNvGrpSpPr/>
+        <p:nvPr/>
+      </p:nvGrpSpPr>
+      <p:grpSpPr>
+        <a:xfrm>
+          <a:off x="0" y="0"/>
+          <a:ext cx="0" cy="0"/>
+          <a:chOff x="0" y="0"/>
+          <a:chExt cx="0" cy="0"/>
+        </a:xfrm>
+      </p:grpSpPr>
+      <p:sp>
+        <p:nvSpPr>
+          <p:cNvPr id="3" name="타원 2"/>
+          <p:cNvSpPr/>
+          <p:nvPr/>
+        </p:nvSpPr>
+        <p:spPr>
+          <a:xfrm>
+            <a:off x="4067944" y="74100"/>
+            <a:ext cx="936104" cy="936104"/>
+          </a:xfrm>
+          <a:prstGeom prst="ellipse">
+            <a:avLst/>
+          </a:prstGeom>
+          <a:solidFill>
+            <a:schemeClr val="tx2">
+              <a:lumMod val="75000"/>
+            </a:schemeClr>
+          </a:solidFill>
+          <a:ln>
+            <a:noFill/>
+          </a:ln>
+        </p:spPr>
+        <p:style>
+          <a:lnRef idx="2">
+            <a:schemeClr val="accent1">
+              <a:shade val="50000"/>
+            </a:schemeClr>
+          </a:lnRef>
+          <a:fillRef idx="1">
+            <a:schemeClr val="accent1"/>
+          </a:fillRef>
+          <a:effectRef idx="0">
+            <a:schemeClr val="accent1"/>
+          </a:effectRef>
+          <a:fontRef idx="minor">
+            <a:schemeClr val="lt1"/>
+          </a:fontRef>
+        </p:style>
+        <p:txBody>
+          <a:bodyPr rtlCol="0" anchor="ctr"/>
+          <a:lstStyle/>
+          <a:p>
+            <a:pPr algn="ctr"/>
+            <a:endParaRPr lang="ko-KR" altLang="en-US"/>
+          </a:p>
+        </p:txBody>
+      </p:sp>
+      <p:sp>
+        <p:nvSpPr>
+          <p:cNvPr id="9" name="TextBox 8"/>
+          <p:cNvSpPr txBox="1"/>
+          <p:nvPr/>
+        </p:nvSpPr>
+        <p:spPr>
+          <a:xfrm>
+            <a:off x="3995936" y="479095"/>
+            <a:ext cx="1080120" cy="461665"/>
+          </a:xfrm>
+          <a:prstGeom prst="rect">
+            <a:avLst/>
+          </a:prstGeom>
+          <a:noFill/>
+        </p:spPr>
+        <p:txBody>
+          <a:bodyPr wrap="square" rtlCol="0">
+            <a:spAutoFit/>
+          </a:bodyPr>
+          <a:lstStyle/>
+          <a:p>
+            <a:pPr algn="ctr"/>
+            <a:r>
+              <a:rPr lang="en-US" altLang="ko-KR" sz="2400" dirty="0">
+                <a:solidFill>
+                  <a:schemeClr val="bg1"/>
+                </a:solidFill>
+                <a:latin typeface="HY헤드라인M" pitchFamily="18" charset="-127"/>
+                <a:ea typeface="HY헤드라인M" pitchFamily="18" charset="-127"/>
+              </a:rPr>
+              <a:t>01</a:t>
+            </a:r>
+            <a:endParaRPr lang="ko-KR" altLang="en-US" sz="2400" dirty="0">
+              <a:solidFill>
+                <a:schemeClr val="bg1"/>
+              </a:solidFill>
+              <a:latin typeface="HY헤드라인M" pitchFamily="18" charset="-127"/>
+              <a:ea typeface="HY헤드라인M" pitchFamily="18" charset="-127"/>
+            </a:endParaRPr>
+          </a:p>
+        </p:txBody>
+      </p:sp>
+      <p:sp>
+        <p:nvSpPr>
+          <p:cNvPr id="4" name="TextBox 3"/>
+          <p:cNvSpPr txBox="1"/>
+          <p:nvPr/>
+        </p:nvSpPr>
+        <p:spPr>
+          <a:xfrm>
+            <a:off x="971600" y="1700808"/>
+            <a:ext cx="7200800" cy="2116285"/>
+          </a:xfrm>
+          <a:prstGeom prst="rect">
+            <a:avLst/>
+          </a:prstGeom>
+          <a:noFill/>
+        </p:spPr>
+        <p:txBody>
+          <a:bodyPr wrap="square" rtlCol="0">
+            <a:spAutoFit/>
+          </a:bodyPr>
+          <a:lstStyle/>
+          <a:p>
+            <a:pPr marL="285750" indent="-285750">
+              <a:lnSpc>
+                <a:spcPct val="150000"/>
+              </a:lnSpc>
+              <a:buFont typeface="Arial" panose="020B0604020202020204" pitchFamily="34" charset="0"/>
+              <a:buChar char="•"/>
+            </a:pPr>
+            <a:r>
+              <a:rPr lang="ko-KR" altLang="en-US" dirty="0"/>
+              <a:t>새로운 시점의 추세 업데이트</a:t>
+            </a:r>
+            <a:endParaRPr lang="en-US" altLang="ko-KR" dirty="0"/>
+          </a:p>
+          <a:p>
+            <a:pPr marL="285750" indent="-285750">
+              <a:lnSpc>
+                <a:spcPct val="150000"/>
+              </a:lnSpc>
+              <a:buFont typeface="Arial" panose="020B0604020202020204" pitchFamily="34" charset="0"/>
+              <a:buChar char="•"/>
+            </a:pPr>
+            <a:endParaRPr lang="en-US" altLang="ko-KR" dirty="0"/>
+          </a:p>
+          <a:p>
+            <a:pPr marL="285750" indent="-285750">
+              <a:lnSpc>
+                <a:spcPct val="150000"/>
+              </a:lnSpc>
+              <a:buFont typeface="Arial" panose="020B0604020202020204" pitchFamily="34" charset="0"/>
+              <a:buChar char="•"/>
+            </a:pPr>
+            <a:endParaRPr lang="en-US" altLang="ko-KR" dirty="0"/>
+          </a:p>
+          <a:p>
+            <a:pPr marL="285750" indent="-285750">
+              <a:lnSpc>
+                <a:spcPct val="150000"/>
+              </a:lnSpc>
+              <a:buFont typeface="Arial" panose="020B0604020202020204" pitchFamily="34" charset="0"/>
+              <a:buChar char="•"/>
+            </a:pPr>
+            <a:endParaRPr lang="en-US" altLang="ko-KR" dirty="0"/>
+          </a:p>
+          <a:p>
+            <a:pPr marL="285750" indent="-285750">
+              <a:lnSpc>
+                <a:spcPct val="150000"/>
+              </a:lnSpc>
+              <a:buFont typeface="Arial" panose="020B0604020202020204" pitchFamily="34" charset="0"/>
+              <a:buChar char="•"/>
+            </a:pPr>
+            <a:r>
+              <a:rPr lang="ko-KR" altLang="en-US" dirty="0"/>
+              <a:t>시계열 </a:t>
+            </a:r>
+            <a:r>
+              <a:rPr lang="ko-KR" altLang="en-US" dirty="0" err="1"/>
+              <a:t>예측값</a:t>
+            </a:r>
+            <a:r>
+              <a:rPr lang="ko-KR" altLang="en-US" dirty="0"/>
+              <a:t> 출력</a:t>
+            </a:r>
+          </a:p>
+        </p:txBody>
+      </p:sp>
+      <p:sp>
+        <p:nvSpPr>
+          <p:cNvPr id="6" name="TextBox 5"/>
+          <p:cNvSpPr txBox="1"/>
+          <p:nvPr/>
+        </p:nvSpPr>
+        <p:spPr>
+          <a:xfrm>
+            <a:off x="539552" y="1065096"/>
+            <a:ext cx="7992888" cy="446276"/>
+          </a:xfrm>
+          <a:prstGeom prst="rect">
+            <a:avLst/>
+          </a:prstGeom>
+          <a:noFill/>
+        </p:spPr>
+        <p:txBody>
+          <a:bodyPr wrap="square" rtlCol="0">
+            <a:spAutoFit/>
+          </a:bodyPr>
+          <a:lstStyle/>
+          <a:p>
+            <a:r>
+              <a:rPr lang="en-US" altLang="ko-KR" sz="2300" dirty="0"/>
+              <a:t>RNN</a:t>
+            </a:r>
+            <a:r>
+              <a:rPr lang="ko-KR" altLang="en-US" sz="2300" dirty="0"/>
+              <a:t>의 수학적 작동 원리</a:t>
+            </a:r>
+          </a:p>
+        </p:txBody>
+      </p:sp>
+      <p:pic>
+        <p:nvPicPr>
+          <p:cNvPr id="8" name="Google Shape;135;p17" descr="image.png">
+            <a:extLst>
+              <a:ext uri="{FF2B5EF4-FFF2-40B4-BE49-F238E27FC236}">
+                <a16:creationId xmlns:a16="http://schemas.microsoft.com/office/drawing/2014/main" id="{C975434C-E336-4881-BF03-A84D1169CD88}"/>
+              </a:ext>
+            </a:extLst>
+          </p:cNvPr>
+          <p:cNvPicPr preferRelativeResize="0"/>
+          <p:nvPr/>
+        </p:nvPicPr>
+        <p:blipFill rotWithShape="1">
+          <a:blip r:embed="rId3">
+            <a:alphaModFix/>
+          </a:blip>
+          <a:srcRect/>
+          <a:stretch/>
+        </p:blipFill>
+        <p:spPr>
+          <a:xfrm>
+            <a:off x="1979712" y="2338186"/>
+            <a:ext cx="5003750" cy="727918"/>
+          </a:xfrm>
+          <a:prstGeom prst="rect">
+            <a:avLst/>
+          </a:prstGeom>
+          <a:noFill/>
+          <a:ln>
+            <a:noFill/>
+          </a:ln>
+        </p:spPr>
+      </p:pic>
+      <p:pic>
+        <p:nvPicPr>
+          <p:cNvPr id="10" name="Google Shape;141;p17" descr="image.png">
+            <a:extLst>
+              <a:ext uri="{FF2B5EF4-FFF2-40B4-BE49-F238E27FC236}">
+                <a16:creationId xmlns:a16="http://schemas.microsoft.com/office/drawing/2014/main" id="{9C000F36-003A-4D91-B52E-155D9B2A6BEC}"/>
+              </a:ext>
+            </a:extLst>
+          </p:cNvPr>
+          <p:cNvPicPr preferRelativeResize="0"/>
+          <p:nvPr/>
+        </p:nvPicPr>
+        <p:blipFill rotWithShape="1">
+          <a:blip r:embed="rId4">
+            <a:alphaModFix/>
+          </a:blip>
+          <a:srcRect/>
+          <a:stretch/>
+        </p:blipFill>
+        <p:spPr>
+          <a:xfrm>
+            <a:off x="2255937" y="2576311"/>
+            <a:ext cx="4489400" cy="251668"/>
+          </a:xfrm>
+          <a:prstGeom prst="rect">
+            <a:avLst/>
+          </a:prstGeom>
+          <a:noFill/>
+          <a:ln>
+            <a:noFill/>
+          </a:ln>
+        </p:spPr>
+      </p:pic>
+      <p:pic>
+        <p:nvPicPr>
+          <p:cNvPr id="12" name="Google Shape;136;p17" descr="image.png">
+            <a:extLst>
+              <a:ext uri="{FF2B5EF4-FFF2-40B4-BE49-F238E27FC236}">
+                <a16:creationId xmlns:a16="http://schemas.microsoft.com/office/drawing/2014/main" id="{3CCF464E-2C20-4F6C-BD51-F35B178AB94B}"/>
+              </a:ext>
+            </a:extLst>
+          </p:cNvPr>
+          <p:cNvPicPr preferRelativeResize="0"/>
+          <p:nvPr/>
+        </p:nvPicPr>
+        <p:blipFill rotWithShape="1">
+          <a:blip r:embed="rId3">
+            <a:alphaModFix/>
+          </a:blip>
+          <a:srcRect/>
+          <a:stretch/>
+        </p:blipFill>
+        <p:spPr>
+          <a:xfrm>
+            <a:off x="2483768" y="3933056"/>
+            <a:ext cx="4006899" cy="785068"/>
+          </a:xfrm>
+          <a:prstGeom prst="rect">
+            <a:avLst/>
+          </a:prstGeom>
+          <a:noFill/>
+          <a:ln>
+            <a:noFill/>
+          </a:ln>
+        </p:spPr>
+      </p:pic>
+      <p:pic>
+        <p:nvPicPr>
+          <p:cNvPr id="13" name="Google Shape;145;p17" descr="image.png">
+            <a:extLst>
+              <a:ext uri="{FF2B5EF4-FFF2-40B4-BE49-F238E27FC236}">
+                <a16:creationId xmlns:a16="http://schemas.microsoft.com/office/drawing/2014/main" id="{F4263C92-5797-44B0-AF4E-1F1FD5270C68}"/>
+              </a:ext>
+            </a:extLst>
+          </p:cNvPr>
+          <p:cNvPicPr preferRelativeResize="0"/>
+          <p:nvPr/>
+        </p:nvPicPr>
+        <p:blipFill rotWithShape="1">
+          <a:blip r:embed="rId5">
+            <a:alphaModFix/>
+          </a:blip>
+          <a:srcRect/>
+          <a:stretch/>
+        </p:blipFill>
+        <p:spPr>
+          <a:xfrm>
+            <a:off x="3162871" y="4171181"/>
+            <a:ext cx="2686794" cy="308818"/>
+          </a:xfrm>
+          <a:prstGeom prst="rect">
+            <a:avLst/>
+          </a:prstGeom>
+          <a:noFill/>
+          <a:ln>
+            <a:noFill/>
+          </a:ln>
+        </p:spPr>
+      </p:pic>
+    </p:spTree>
+    <p:extLst>
+      <p:ext uri="{BB962C8B-B14F-4D97-AF65-F5344CB8AC3E}">
+        <p14:creationId xmlns:p14="http://schemas.microsoft.com/office/powerpoint/2010/main" val="1471384437"/>
+      </p:ext>
+    </p:extLst>
+  </p:cSld>
+  <p:clrMapOvr>
+    <a:masterClrMapping/>
+  </p:clrMapOvr>
+</p:sld>
+</file>
+
+<file path=ppt/slides/slide24.xml><?xml version="1.0" encoding="utf-8"?>
+<p:sld xmlns:a="http://schemas.openxmlformats.org/drawingml/2006/main" xmlns:r="http://schemas.openxmlformats.org/officeDocument/2006/relationships" xmlns:p="http://schemas.openxmlformats.org/presentationml/2006/main">
+  <p:cSld>
+    <p:spTree>
+      <p:nvGrpSpPr>
+        <p:cNvPr id="1" name=""/>
+        <p:cNvGrpSpPr/>
+        <p:nvPr/>
+      </p:nvGrpSpPr>
+      <p:grpSpPr>
+        <a:xfrm>
+          <a:off x="0" y="0"/>
+          <a:ext cx="0" cy="0"/>
+          <a:chOff x="0" y="0"/>
+          <a:chExt cx="0" cy="0"/>
+        </a:xfrm>
+      </p:grpSpPr>
+      <p:sp>
+        <p:nvSpPr>
+          <p:cNvPr id="3" name="타원 2"/>
+          <p:cNvSpPr/>
+          <p:nvPr/>
+        </p:nvSpPr>
+        <p:spPr>
+          <a:xfrm>
+            <a:off x="4067944" y="74100"/>
+            <a:ext cx="936104" cy="936104"/>
+          </a:xfrm>
+          <a:prstGeom prst="ellipse">
+            <a:avLst/>
+          </a:prstGeom>
+          <a:solidFill>
+            <a:schemeClr val="tx2">
+              <a:lumMod val="75000"/>
+            </a:schemeClr>
+          </a:solidFill>
+          <a:ln>
+            <a:noFill/>
+          </a:ln>
+        </p:spPr>
+        <p:style>
+          <a:lnRef idx="2">
+            <a:schemeClr val="accent1">
+              <a:shade val="50000"/>
+            </a:schemeClr>
+          </a:lnRef>
+          <a:fillRef idx="1">
+            <a:schemeClr val="accent1"/>
+          </a:fillRef>
+          <a:effectRef idx="0">
+            <a:schemeClr val="accent1"/>
+          </a:effectRef>
+          <a:fontRef idx="minor">
+            <a:schemeClr val="lt1"/>
+          </a:fontRef>
+        </p:style>
+        <p:txBody>
+          <a:bodyPr rtlCol="0" anchor="ctr"/>
+          <a:lstStyle/>
+          <a:p>
+            <a:pPr algn="ctr"/>
+            <a:endParaRPr lang="ko-KR" altLang="en-US"/>
+          </a:p>
+        </p:txBody>
+      </p:sp>
+      <p:sp>
+        <p:nvSpPr>
+          <p:cNvPr id="9" name="TextBox 8"/>
+          <p:cNvSpPr txBox="1"/>
+          <p:nvPr/>
+        </p:nvSpPr>
+        <p:spPr>
+          <a:xfrm>
+            <a:off x="3995936" y="479095"/>
+            <a:ext cx="1080120" cy="461665"/>
+          </a:xfrm>
+          <a:prstGeom prst="rect">
+            <a:avLst/>
+          </a:prstGeom>
+          <a:noFill/>
+        </p:spPr>
+        <p:txBody>
+          <a:bodyPr wrap="square" rtlCol="0">
+            <a:spAutoFit/>
+          </a:bodyPr>
+          <a:lstStyle/>
+          <a:p>
+            <a:pPr algn="ctr"/>
+            <a:r>
+              <a:rPr lang="en-US" altLang="ko-KR" sz="2400" dirty="0">
+                <a:solidFill>
+                  <a:schemeClr val="bg1"/>
+                </a:solidFill>
+                <a:latin typeface="HY헤드라인M" pitchFamily="18" charset="-127"/>
+                <a:ea typeface="HY헤드라인M" pitchFamily="18" charset="-127"/>
+              </a:rPr>
+              <a:t>01</a:t>
+            </a:r>
+            <a:endParaRPr lang="ko-KR" altLang="en-US" sz="2400" dirty="0">
+              <a:solidFill>
+                <a:schemeClr val="bg1"/>
+              </a:solidFill>
+              <a:latin typeface="HY헤드라인M" pitchFamily="18" charset="-127"/>
+              <a:ea typeface="HY헤드라인M" pitchFamily="18" charset="-127"/>
+            </a:endParaRPr>
+          </a:p>
+        </p:txBody>
+      </p:sp>
+      <p:sp>
+        <p:nvSpPr>
+          <p:cNvPr id="4" name="TextBox 3"/>
+          <p:cNvSpPr txBox="1"/>
+          <p:nvPr/>
+        </p:nvSpPr>
+        <p:spPr>
+          <a:xfrm>
+            <a:off x="971600" y="1700808"/>
+            <a:ext cx="7200800" cy="4193777"/>
+          </a:xfrm>
+          <a:prstGeom prst="rect">
+            <a:avLst/>
+          </a:prstGeom>
+          <a:noFill/>
+        </p:spPr>
+        <p:txBody>
+          <a:bodyPr wrap="square" rtlCol="0">
+            <a:spAutoFit/>
+          </a:bodyPr>
+          <a:lstStyle/>
+          <a:p>
+            <a:pPr marL="285750" indent="-285750">
+              <a:lnSpc>
+                <a:spcPct val="150000"/>
+              </a:lnSpc>
+              <a:buFont typeface="Arial" panose="020B0604020202020204" pitchFamily="34" charset="0"/>
+              <a:buChar char="•"/>
+            </a:pPr>
+            <a:r>
+              <a:rPr lang="ko-KR" altLang="en-US" dirty="0"/>
+              <a:t>수학적 원인</a:t>
+            </a:r>
+            <a:r>
+              <a:rPr lang="en-US" altLang="ko-KR" dirty="0"/>
+              <a:t>: BPTT </a:t>
+            </a:r>
+            <a:r>
+              <a:rPr lang="ko-KR" altLang="en-US" dirty="0"/>
+              <a:t>연쇄 법칙</a:t>
+            </a:r>
+            <a:br>
+              <a:rPr lang="ko-KR" altLang="en-US" dirty="0"/>
+            </a:br>
+            <a:r>
+              <a:rPr lang="ko-KR" altLang="en-US" dirty="0"/>
+              <a:t> 시계열 데이터가 매우 길 때</a:t>
+            </a:r>
+            <a:r>
+              <a:rPr lang="en-US" altLang="ko-KR" dirty="0"/>
+              <a:t>, </a:t>
+            </a:r>
+            <a:r>
+              <a:rPr lang="ko-KR" altLang="en-US" dirty="0"/>
+              <a:t>오차를 과거로 되돌려 보내며 학습</a:t>
+            </a:r>
+            <a:r>
+              <a:rPr lang="en-US" altLang="ko-KR" dirty="0"/>
+              <a:t>(</a:t>
+            </a:r>
+            <a:r>
+              <a:rPr lang="ko-KR" altLang="en-US" dirty="0" err="1"/>
+              <a:t>역전파</a:t>
+            </a:r>
+            <a:r>
+              <a:rPr lang="en-US" altLang="ko-KR" dirty="0"/>
+              <a:t>)</a:t>
+            </a:r>
+            <a:r>
+              <a:rPr lang="ko-KR" altLang="en-US" dirty="0"/>
+              <a:t>하면 연쇄 법칙에 의해 가중치 행렬이 반복적으로 곱해집니다</a:t>
+            </a:r>
+            <a:r>
+              <a:rPr lang="en-US" altLang="ko-KR" dirty="0"/>
+              <a:t>.</a:t>
+            </a:r>
+          </a:p>
+          <a:p>
+            <a:pPr marL="285750" indent="-285750">
+              <a:lnSpc>
+                <a:spcPct val="150000"/>
+              </a:lnSpc>
+              <a:buFont typeface="Arial" panose="020B0604020202020204" pitchFamily="34" charset="0"/>
+              <a:buChar char="•"/>
+            </a:pPr>
+            <a:endParaRPr lang="en-US" altLang="ko-KR" dirty="0"/>
+          </a:p>
+          <a:p>
+            <a:pPr marL="285750" indent="-285750">
+              <a:lnSpc>
+                <a:spcPct val="150000"/>
+              </a:lnSpc>
+              <a:buFont typeface="Arial" panose="020B0604020202020204" pitchFamily="34" charset="0"/>
+              <a:buChar char="•"/>
+            </a:pPr>
+            <a:endParaRPr lang="en-US" altLang="ko-KR" dirty="0"/>
+          </a:p>
+          <a:p>
+            <a:pPr marL="285750" indent="-285750">
+              <a:lnSpc>
+                <a:spcPct val="150000"/>
+              </a:lnSpc>
+              <a:buFont typeface="Arial" panose="020B0604020202020204" pitchFamily="34" charset="0"/>
+              <a:buChar char="•"/>
+            </a:pPr>
+            <a:r>
+              <a:rPr lang="ko-KR" altLang="en-US" dirty="0"/>
+              <a:t>망각 현상 발생</a:t>
+            </a:r>
+            <a:r>
+              <a:rPr lang="en-US" altLang="ko-KR" dirty="0"/>
+              <a:t>:</a:t>
+            </a:r>
+            <a:br>
+              <a:rPr lang="en-US" altLang="ko-KR" dirty="0"/>
+            </a:br>
+            <a:r>
+              <a:rPr lang="en-US" altLang="ko-KR" dirty="0"/>
+              <a:t> </a:t>
+            </a:r>
+            <a:r>
+              <a:rPr lang="ko-KR" altLang="en-US" dirty="0"/>
+              <a:t>만약 곱해지는 가중치의 크기가 </a:t>
+            </a:r>
+            <a:r>
+              <a:rPr lang="en-US" altLang="ko-KR" dirty="0"/>
+              <a:t>1</a:t>
+            </a:r>
+            <a:r>
+              <a:rPr lang="ko-KR" altLang="en-US" dirty="0"/>
+              <a:t>보다 작다면</a:t>
+            </a:r>
+            <a:r>
+              <a:rPr lang="en-US" altLang="ko-KR" dirty="0"/>
+              <a:t>, </a:t>
+            </a:r>
+            <a:r>
+              <a:rPr lang="ko-KR" altLang="en-US" dirty="0"/>
+              <a:t>시간의 격차가 커질수록 이 값은 </a:t>
+            </a:r>
+            <a:r>
+              <a:rPr lang="en-US" altLang="ko-KR" dirty="0"/>
+              <a:t>0</a:t>
+            </a:r>
+            <a:r>
+              <a:rPr lang="ko-KR" altLang="en-US" dirty="0"/>
+              <a:t>에 수렴합니다</a:t>
+            </a:r>
+            <a:r>
+              <a:rPr lang="en-US" altLang="ko-KR" dirty="0"/>
+              <a:t>.</a:t>
+            </a:r>
+          </a:p>
+          <a:p>
+            <a:pPr marL="285750" indent="-285750">
+              <a:lnSpc>
+                <a:spcPct val="150000"/>
+              </a:lnSpc>
+              <a:buFont typeface="Arial" panose="020B0604020202020204" pitchFamily="34" charset="0"/>
+              <a:buChar char="•"/>
+            </a:pPr>
+            <a:endParaRPr lang="en-US" altLang="ko-KR" dirty="0"/>
+          </a:p>
+        </p:txBody>
+      </p:sp>
+      <p:sp>
+        <p:nvSpPr>
+          <p:cNvPr id="6" name="TextBox 5"/>
+          <p:cNvSpPr txBox="1"/>
+          <p:nvPr/>
+        </p:nvSpPr>
+        <p:spPr>
+          <a:xfrm>
+            <a:off x="539552" y="1065096"/>
+            <a:ext cx="7992888" cy="446276"/>
+          </a:xfrm>
+          <a:prstGeom prst="rect">
+            <a:avLst/>
+          </a:prstGeom>
+          <a:noFill/>
+        </p:spPr>
+        <p:txBody>
+          <a:bodyPr wrap="square" rtlCol="0">
+            <a:spAutoFit/>
+          </a:bodyPr>
+          <a:lstStyle/>
+          <a:p>
+            <a:r>
+              <a:rPr lang="en-US" altLang="ko-KR" sz="2300" dirty="0"/>
+              <a:t>RNN</a:t>
+            </a:r>
+            <a:r>
+              <a:rPr lang="ko-KR" altLang="en-US" sz="2300" dirty="0"/>
+              <a:t>의 수학적 한계</a:t>
+            </a:r>
+            <a:r>
+              <a:rPr lang="en-US" altLang="ko-KR" sz="2300" dirty="0"/>
+              <a:t>: </a:t>
+            </a:r>
+            <a:r>
+              <a:rPr lang="ko-KR" altLang="en-US" sz="2300" dirty="0"/>
+              <a:t>기울기 소실과 망각</a:t>
+            </a:r>
+          </a:p>
+        </p:txBody>
+      </p:sp>
+      <p:pic>
+        <p:nvPicPr>
+          <p:cNvPr id="7" name="Google Shape;136;p17" descr="image.png">
+            <a:extLst>
+              <a:ext uri="{FF2B5EF4-FFF2-40B4-BE49-F238E27FC236}">
+                <a16:creationId xmlns:a16="http://schemas.microsoft.com/office/drawing/2014/main" id="{17D1BFA8-5CD6-43C5-8BF5-F3A9B79B5619}"/>
+              </a:ext>
+            </a:extLst>
+          </p:cNvPr>
+          <p:cNvPicPr preferRelativeResize="0"/>
+          <p:nvPr/>
+        </p:nvPicPr>
+        <p:blipFill rotWithShape="1">
+          <a:blip r:embed="rId3">
+            <a:alphaModFix/>
+          </a:blip>
+          <a:srcRect/>
+          <a:stretch/>
+        </p:blipFill>
+        <p:spPr>
+          <a:xfrm>
+            <a:off x="2532546" y="3356992"/>
+            <a:ext cx="4006899" cy="785068"/>
+          </a:xfrm>
+          <a:prstGeom prst="rect">
+            <a:avLst/>
+          </a:prstGeom>
+          <a:noFill/>
+          <a:ln>
+            <a:noFill/>
+          </a:ln>
+        </p:spPr>
+      </p:pic>
+      <p:pic>
+        <p:nvPicPr>
+          <p:cNvPr id="8" name="Google Shape;175;p19" descr="image.png">
+            <a:extLst>
+              <a:ext uri="{FF2B5EF4-FFF2-40B4-BE49-F238E27FC236}">
+                <a16:creationId xmlns:a16="http://schemas.microsoft.com/office/drawing/2014/main" id="{B757DC43-9C2C-4C25-877A-384CE0A03461}"/>
+              </a:ext>
+            </a:extLst>
+          </p:cNvPr>
+          <p:cNvPicPr preferRelativeResize="0"/>
+          <p:nvPr/>
+        </p:nvPicPr>
+        <p:blipFill rotWithShape="1">
+          <a:blip r:embed="rId4">
+            <a:alphaModFix/>
+          </a:blip>
+          <a:srcRect/>
+          <a:stretch/>
+        </p:blipFill>
+        <p:spPr>
+          <a:xfrm>
+            <a:off x="3456470" y="3543994"/>
+            <a:ext cx="2159049" cy="411063"/>
+          </a:xfrm>
+          <a:prstGeom prst="rect">
+            <a:avLst/>
+          </a:prstGeom>
+          <a:noFill/>
+          <a:ln>
+            <a:noFill/>
+          </a:ln>
+        </p:spPr>
+      </p:pic>
+    </p:spTree>
+    <p:extLst>
+      <p:ext uri="{BB962C8B-B14F-4D97-AF65-F5344CB8AC3E}">
+        <p14:creationId xmlns:p14="http://schemas.microsoft.com/office/powerpoint/2010/main" val="3073553101"/>
+      </p:ext>
+    </p:extLst>
+  </p:cSld>
+  <p:clrMapOvr>
+    <a:masterClrMapping/>
+  </p:clrMapOvr>
+</p:sld>
+</file>
+
+<file path=ppt/slides/slide25.xml><?xml version="1.0" encoding="utf-8"?>
+<p:sld xmlns:a="http://schemas.openxmlformats.org/drawingml/2006/main" xmlns:r="http://schemas.openxmlformats.org/officeDocument/2006/relationships" xmlns:p="http://schemas.openxmlformats.org/presentationml/2006/main">
+  <p:cSld>
+    <p:spTree>
+      <p:nvGrpSpPr>
+        <p:cNvPr id="1" name=""/>
+        <p:cNvGrpSpPr/>
+        <p:nvPr/>
+      </p:nvGrpSpPr>
+      <p:grpSpPr>
+        <a:xfrm>
+          <a:off x="0" y="0"/>
+          <a:ext cx="0" cy="0"/>
+          <a:chOff x="0" y="0"/>
+          <a:chExt cx="0" cy="0"/>
+        </a:xfrm>
+      </p:grpSpPr>
+      <p:sp>
+        <p:nvSpPr>
           <p:cNvPr id="2" name="직사각형 1"/>
           <p:cNvSpPr/>
           <p:nvPr/>
@@ -12758,118 +16238,6 @@
     <p:extLst>
       <p:ext uri="{BB962C8B-B14F-4D97-AF65-F5344CB8AC3E}">
         <p14:creationId xmlns:p14="http://schemas.microsoft.com/office/powerpoint/2010/main" val="2449786974"/>
-      </p:ext>
-    </p:extLst>
-  </p:cSld>
-  <p:clrMapOvr>
-    <a:masterClrMapping/>
-  </p:clrMapOvr>
-</p:sld>
-</file>
-
-<file path=ppt/slides/slide2.xml><?xml version="1.0" encoding="utf-8"?>
-<p:sld xmlns:a="http://schemas.openxmlformats.org/drawingml/2006/main" xmlns:r="http://schemas.openxmlformats.org/officeDocument/2006/relationships" xmlns:p="http://schemas.openxmlformats.org/presentationml/2006/main">
-  <p:cSld>
-    <p:spTree>
-      <p:nvGrpSpPr>
-        <p:cNvPr id="1" name=""/>
-        <p:cNvGrpSpPr/>
-        <p:nvPr/>
-      </p:nvGrpSpPr>
-      <p:grpSpPr>
-        <a:xfrm>
-          <a:off x="0" y="0"/>
-          <a:ext cx="0" cy="0"/>
-          <a:chOff x="0" y="0"/>
-          <a:chExt cx="0" cy="0"/>
-        </a:xfrm>
-      </p:grpSpPr>
-      <p:sp>
-        <p:nvSpPr>
-          <p:cNvPr id="3" name="타원 2"/>
-          <p:cNvSpPr/>
-          <p:nvPr/>
-        </p:nvSpPr>
-        <p:spPr>
-          <a:xfrm>
-            <a:off x="2627784" y="1298236"/>
-            <a:ext cx="3858956" cy="3858956"/>
-          </a:xfrm>
-          <a:prstGeom prst="ellipse">
-            <a:avLst/>
-          </a:prstGeom>
-          <a:solidFill>
-            <a:schemeClr val="tx2">
-              <a:lumMod val="75000"/>
-            </a:schemeClr>
-          </a:solidFill>
-          <a:ln>
-            <a:noFill/>
-          </a:ln>
-        </p:spPr>
-        <p:style>
-          <a:lnRef idx="2">
-            <a:schemeClr val="accent1">
-              <a:shade val="50000"/>
-            </a:schemeClr>
-          </a:lnRef>
-          <a:fillRef idx="1">
-            <a:schemeClr val="accent1"/>
-          </a:fillRef>
-          <a:effectRef idx="0">
-            <a:schemeClr val="accent1"/>
-          </a:effectRef>
-          <a:fontRef idx="minor">
-            <a:schemeClr val="lt1"/>
-          </a:fontRef>
-        </p:style>
-        <p:txBody>
-          <a:bodyPr rtlCol="0" anchor="ctr"/>
-          <a:lstStyle/>
-          <a:p>
-            <a:pPr algn="ctr"/>
-            <a:endParaRPr lang="ko-KR" altLang="en-US"/>
-          </a:p>
-        </p:txBody>
-      </p:sp>
-      <p:sp>
-        <p:nvSpPr>
-          <p:cNvPr id="7" name="TextBox 6"/>
-          <p:cNvSpPr txBox="1"/>
-          <p:nvPr/>
-        </p:nvSpPr>
-        <p:spPr>
-          <a:xfrm>
-            <a:off x="2627784" y="2971550"/>
-            <a:ext cx="3858956" cy="630942"/>
-          </a:xfrm>
-          <a:prstGeom prst="rect">
-            <a:avLst/>
-          </a:prstGeom>
-          <a:noFill/>
-        </p:spPr>
-        <p:txBody>
-          <a:bodyPr wrap="square" rtlCol="0">
-            <a:spAutoFit/>
-          </a:bodyPr>
-          <a:lstStyle/>
-          <a:p>
-            <a:pPr algn="ctr"/>
-            <a:r>
-              <a:rPr lang="ko-KR" altLang="en-US" sz="3500" b="1" dirty="0">
-                <a:solidFill>
-                  <a:schemeClr val="bg1"/>
-                </a:solidFill>
-              </a:rPr>
-              <a:t>딥러닝</a:t>
-            </a:r>
-          </a:p>
-        </p:txBody>
-      </p:sp>
-    </p:spTree>
-    <p:extLst>
-      <p:ext uri="{BB962C8B-B14F-4D97-AF65-F5344CB8AC3E}">
-        <p14:creationId xmlns:p14="http://schemas.microsoft.com/office/powerpoint/2010/main" val="1192776622"/>
       </p:ext>
     </p:extLst>
   </p:cSld>

--- a/PPT/딥러닝.pptx
+++ b/PPT/딥러닝.pptx
@@ -5,7 +5,7 @@
     <p:sldMasterId id="2147483648" r:id="rId1"/>
   </p:sldMasterIdLst>
   <p:notesMasterIdLst>
-    <p:notesMasterId r:id="rId27"/>
+    <p:notesMasterId r:id="rId35"/>
   </p:notesMasterIdLst>
   <p:sldIdLst>
     <p:sldId id="334" r:id="rId2"/>
@@ -32,7 +32,15 @@
     <p:sldId id="387" r:id="rId23"/>
     <p:sldId id="388" r:id="rId24"/>
     <p:sldId id="389" r:id="rId25"/>
-    <p:sldId id="321" r:id="rId26"/>
+    <p:sldId id="390" r:id="rId26"/>
+    <p:sldId id="391" r:id="rId27"/>
+    <p:sldId id="392" r:id="rId28"/>
+    <p:sldId id="393" r:id="rId29"/>
+    <p:sldId id="394" r:id="rId30"/>
+    <p:sldId id="395" r:id="rId31"/>
+    <p:sldId id="396" r:id="rId32"/>
+    <p:sldId id="397" r:id="rId33"/>
+    <p:sldId id="321" r:id="rId34"/>
   </p:sldIdLst>
   <p:sldSz cx="9144000" cy="6858000" type="screen4x3"/>
   <p:notesSz cx="6858000" cy="9144000"/>
@@ -236,7 +244,7 @@
             <a:fld id="{65771C21-3757-4199-83DE-22960358A2A5}" type="datetimeFigureOut">
               <a:rPr lang="ko-KR" altLang="en-US" smtClean="0"/>
               <a:pPr/>
-              <a:t>2026-05-22</a:t>
+              <a:t>2026-05-25</a:t>
             </a:fld>
             <a:endParaRPr lang="ko-KR" altLang="en-US"/>
           </a:p>
@@ -2383,7 +2391,562 @@
     </p:spTree>
     <p:extLst>
       <p:ext uri="{BB962C8B-B14F-4D97-AF65-F5344CB8AC3E}">
-        <p14:creationId xmlns:p14="http://schemas.microsoft.com/office/powerpoint/2010/main" val="3557393855"/>
+        <p14:creationId xmlns:p14="http://schemas.microsoft.com/office/powerpoint/2010/main" val="1724905098"/>
+      </p:ext>
+    </p:extLst>
+  </p:cSld>
+  <p:clrMapOvr>
+    <a:masterClrMapping/>
+  </p:clrMapOvr>
+</p:notes>
+</file>
+
+<file path=ppt/notesSlides/notesSlide25.xml><?xml version="1.0" encoding="utf-8"?>
+<p:notes xmlns:a="http://schemas.openxmlformats.org/drawingml/2006/main" xmlns:r="http://schemas.openxmlformats.org/officeDocument/2006/relationships" xmlns:p="http://schemas.openxmlformats.org/presentationml/2006/main">
+  <p:cSld>
+    <p:spTree>
+      <p:nvGrpSpPr>
+        <p:cNvPr id="1" name=""/>
+        <p:cNvGrpSpPr/>
+        <p:nvPr/>
+      </p:nvGrpSpPr>
+      <p:grpSpPr>
+        <a:xfrm>
+          <a:off x="0" y="0"/>
+          <a:ext cx="0" cy="0"/>
+          <a:chOff x="0" y="0"/>
+          <a:chExt cx="0" cy="0"/>
+        </a:xfrm>
+      </p:grpSpPr>
+      <p:sp>
+        <p:nvSpPr>
+          <p:cNvPr id="2" name="슬라이드 이미지 개체 틀 1"/>
+          <p:cNvSpPr>
+            <a:spLocks noGrp="1" noRot="1" noChangeAspect="1"/>
+          </p:cNvSpPr>
+          <p:nvPr>
+            <p:ph type="sldImg"/>
+          </p:nvPr>
+        </p:nvSpPr>
+        <p:spPr/>
+      </p:sp>
+      <p:sp>
+        <p:nvSpPr>
+          <p:cNvPr id="3" name="슬라이드 노트 개체 틀 2"/>
+          <p:cNvSpPr>
+            <a:spLocks noGrp="1"/>
+          </p:cNvSpPr>
+          <p:nvPr>
+            <p:ph type="body" idx="1"/>
+          </p:nvPr>
+        </p:nvSpPr>
+        <p:spPr/>
+        <p:txBody>
+          <a:bodyPr>
+            <a:normAutofit/>
+          </a:bodyPr>
+          <a:lstStyle/>
+          <a:p>
+            <a:pPr marL="0" marR="0" indent="0" algn="l" defTabSz="914400" rtl="0" eaLnBrk="1" fontAlgn="auto" latinLnBrk="1" hangingPunct="1">
+              <a:lnSpc>
+                <a:spcPct val="100000"/>
+              </a:lnSpc>
+              <a:spcBef>
+                <a:spcPts val="0"/>
+              </a:spcBef>
+              <a:spcAft>
+                <a:spcPts val="0"/>
+              </a:spcAft>
+              <a:buClrTx/>
+              <a:buSzTx/>
+              <a:buFontTx/>
+              <a:buNone/>
+              <a:tabLst/>
+              <a:defRPr/>
+            </a:pPr>
+            <a:r>
+              <a:rPr lang="en-US" altLang="ko-KR" sz="1200" dirty="0"/>
+              <a:t>http://minheeblog.tistory.com/category/PPT</a:t>
+            </a:r>
+            <a:endParaRPr lang="ko-KR" altLang="en-US" sz="1200" dirty="0"/>
+          </a:p>
+          <a:p>
+            <a:endParaRPr lang="ko-KR" altLang="en-US" dirty="0"/>
+          </a:p>
+        </p:txBody>
+      </p:sp>
+      <p:sp>
+        <p:nvSpPr>
+          <p:cNvPr id="4" name="슬라이드 번호 개체 틀 3"/>
+          <p:cNvSpPr>
+            <a:spLocks noGrp="1"/>
+          </p:cNvSpPr>
+          <p:nvPr>
+            <p:ph type="sldNum" sz="quarter" idx="10"/>
+          </p:nvPr>
+        </p:nvSpPr>
+        <p:spPr/>
+        <p:txBody>
+          <a:bodyPr/>
+          <a:lstStyle/>
+          <a:p>
+            <a:fld id="{04A4E647-5A0F-41E6-A0EF-B58D8C1C6CD4}" type="slidenum">
+              <a:rPr lang="ko-KR" altLang="en-US" smtClean="0"/>
+              <a:pPr/>
+              <a:t>26</a:t>
+            </a:fld>
+            <a:endParaRPr lang="ko-KR" altLang="en-US"/>
+          </a:p>
+        </p:txBody>
+      </p:sp>
+    </p:spTree>
+    <p:extLst>
+      <p:ext uri="{BB962C8B-B14F-4D97-AF65-F5344CB8AC3E}">
+        <p14:creationId xmlns:p14="http://schemas.microsoft.com/office/powerpoint/2010/main" val="1338912652"/>
+      </p:ext>
+    </p:extLst>
+  </p:cSld>
+  <p:clrMapOvr>
+    <a:masterClrMapping/>
+  </p:clrMapOvr>
+</p:notes>
+</file>
+
+<file path=ppt/notesSlides/notesSlide26.xml><?xml version="1.0" encoding="utf-8"?>
+<p:notes xmlns:a="http://schemas.openxmlformats.org/drawingml/2006/main" xmlns:r="http://schemas.openxmlformats.org/officeDocument/2006/relationships" xmlns:p="http://schemas.openxmlformats.org/presentationml/2006/main">
+  <p:cSld>
+    <p:spTree>
+      <p:nvGrpSpPr>
+        <p:cNvPr id="1" name=""/>
+        <p:cNvGrpSpPr/>
+        <p:nvPr/>
+      </p:nvGrpSpPr>
+      <p:grpSpPr>
+        <a:xfrm>
+          <a:off x="0" y="0"/>
+          <a:ext cx="0" cy="0"/>
+          <a:chOff x="0" y="0"/>
+          <a:chExt cx="0" cy="0"/>
+        </a:xfrm>
+      </p:grpSpPr>
+      <p:sp>
+        <p:nvSpPr>
+          <p:cNvPr id="2" name="슬라이드 이미지 개체 틀 1"/>
+          <p:cNvSpPr>
+            <a:spLocks noGrp="1" noRot="1" noChangeAspect="1"/>
+          </p:cNvSpPr>
+          <p:nvPr>
+            <p:ph type="sldImg"/>
+          </p:nvPr>
+        </p:nvSpPr>
+        <p:spPr/>
+      </p:sp>
+      <p:sp>
+        <p:nvSpPr>
+          <p:cNvPr id="3" name="슬라이드 노트 개체 틀 2"/>
+          <p:cNvSpPr>
+            <a:spLocks noGrp="1"/>
+          </p:cNvSpPr>
+          <p:nvPr>
+            <p:ph type="body" idx="1"/>
+          </p:nvPr>
+        </p:nvSpPr>
+        <p:spPr/>
+        <p:txBody>
+          <a:bodyPr>
+            <a:normAutofit/>
+          </a:bodyPr>
+          <a:lstStyle/>
+          <a:p>
+            <a:pPr marL="0" marR="0" indent="0" algn="l" defTabSz="914400" rtl="0" eaLnBrk="1" fontAlgn="auto" latinLnBrk="1" hangingPunct="1">
+              <a:lnSpc>
+                <a:spcPct val="100000"/>
+              </a:lnSpc>
+              <a:spcBef>
+                <a:spcPts val="0"/>
+              </a:spcBef>
+              <a:spcAft>
+                <a:spcPts val="0"/>
+              </a:spcAft>
+              <a:buClrTx/>
+              <a:buSzTx/>
+              <a:buFontTx/>
+              <a:buNone/>
+              <a:tabLst/>
+              <a:defRPr/>
+            </a:pPr>
+            <a:r>
+              <a:rPr lang="en-US" altLang="ko-KR" sz="1200" dirty="0"/>
+              <a:t>http://minheeblog.tistory.com/category/PPT</a:t>
+            </a:r>
+            <a:endParaRPr lang="ko-KR" altLang="en-US" sz="1200" dirty="0"/>
+          </a:p>
+          <a:p>
+            <a:endParaRPr lang="ko-KR" altLang="en-US" dirty="0"/>
+          </a:p>
+        </p:txBody>
+      </p:sp>
+      <p:sp>
+        <p:nvSpPr>
+          <p:cNvPr id="4" name="슬라이드 번호 개체 틀 3"/>
+          <p:cNvSpPr>
+            <a:spLocks noGrp="1"/>
+          </p:cNvSpPr>
+          <p:nvPr>
+            <p:ph type="sldNum" sz="quarter" idx="10"/>
+          </p:nvPr>
+        </p:nvSpPr>
+        <p:spPr/>
+        <p:txBody>
+          <a:bodyPr/>
+          <a:lstStyle/>
+          <a:p>
+            <a:fld id="{04A4E647-5A0F-41E6-A0EF-B58D8C1C6CD4}" type="slidenum">
+              <a:rPr lang="ko-KR" altLang="en-US" smtClean="0"/>
+              <a:pPr/>
+              <a:t>27</a:t>
+            </a:fld>
+            <a:endParaRPr lang="ko-KR" altLang="en-US"/>
+          </a:p>
+        </p:txBody>
+      </p:sp>
+    </p:spTree>
+    <p:extLst>
+      <p:ext uri="{BB962C8B-B14F-4D97-AF65-F5344CB8AC3E}">
+        <p14:creationId xmlns:p14="http://schemas.microsoft.com/office/powerpoint/2010/main" val="3978785720"/>
+      </p:ext>
+    </p:extLst>
+  </p:cSld>
+  <p:clrMapOvr>
+    <a:masterClrMapping/>
+  </p:clrMapOvr>
+</p:notes>
+</file>
+
+<file path=ppt/notesSlides/notesSlide27.xml><?xml version="1.0" encoding="utf-8"?>
+<p:notes xmlns:a="http://schemas.openxmlformats.org/drawingml/2006/main" xmlns:r="http://schemas.openxmlformats.org/officeDocument/2006/relationships" xmlns:p="http://schemas.openxmlformats.org/presentationml/2006/main">
+  <p:cSld>
+    <p:spTree>
+      <p:nvGrpSpPr>
+        <p:cNvPr id="1" name=""/>
+        <p:cNvGrpSpPr/>
+        <p:nvPr/>
+      </p:nvGrpSpPr>
+      <p:grpSpPr>
+        <a:xfrm>
+          <a:off x="0" y="0"/>
+          <a:ext cx="0" cy="0"/>
+          <a:chOff x="0" y="0"/>
+          <a:chExt cx="0" cy="0"/>
+        </a:xfrm>
+      </p:grpSpPr>
+      <p:sp>
+        <p:nvSpPr>
+          <p:cNvPr id="2" name="슬라이드 이미지 개체 틀 1"/>
+          <p:cNvSpPr>
+            <a:spLocks noGrp="1" noRot="1" noChangeAspect="1"/>
+          </p:cNvSpPr>
+          <p:nvPr>
+            <p:ph type="sldImg"/>
+          </p:nvPr>
+        </p:nvSpPr>
+        <p:spPr/>
+      </p:sp>
+      <p:sp>
+        <p:nvSpPr>
+          <p:cNvPr id="3" name="슬라이드 노트 개체 틀 2"/>
+          <p:cNvSpPr>
+            <a:spLocks noGrp="1"/>
+          </p:cNvSpPr>
+          <p:nvPr>
+            <p:ph type="body" idx="1"/>
+          </p:nvPr>
+        </p:nvSpPr>
+        <p:spPr/>
+        <p:txBody>
+          <a:bodyPr>
+            <a:normAutofit/>
+          </a:bodyPr>
+          <a:lstStyle/>
+          <a:p>
+            <a:pPr marL="0" marR="0" indent="0" algn="l" defTabSz="914400" rtl="0" eaLnBrk="1" fontAlgn="auto" latinLnBrk="1" hangingPunct="1">
+              <a:lnSpc>
+                <a:spcPct val="100000"/>
+              </a:lnSpc>
+              <a:spcBef>
+                <a:spcPts val="0"/>
+              </a:spcBef>
+              <a:spcAft>
+                <a:spcPts val="0"/>
+              </a:spcAft>
+              <a:buClrTx/>
+              <a:buSzTx/>
+              <a:buFontTx/>
+              <a:buNone/>
+              <a:tabLst/>
+              <a:defRPr/>
+            </a:pPr>
+            <a:r>
+              <a:rPr lang="en-US" altLang="ko-KR" sz="1200" dirty="0"/>
+              <a:t>http://minheeblog.tistory.com/category/PPT</a:t>
+            </a:r>
+            <a:endParaRPr lang="ko-KR" altLang="en-US" sz="1200" dirty="0"/>
+          </a:p>
+          <a:p>
+            <a:endParaRPr lang="ko-KR" altLang="en-US" dirty="0"/>
+          </a:p>
+        </p:txBody>
+      </p:sp>
+      <p:sp>
+        <p:nvSpPr>
+          <p:cNvPr id="4" name="슬라이드 번호 개체 틀 3"/>
+          <p:cNvSpPr>
+            <a:spLocks noGrp="1"/>
+          </p:cNvSpPr>
+          <p:nvPr>
+            <p:ph type="sldNum" sz="quarter" idx="10"/>
+          </p:nvPr>
+        </p:nvSpPr>
+        <p:spPr/>
+        <p:txBody>
+          <a:bodyPr/>
+          <a:lstStyle/>
+          <a:p>
+            <a:fld id="{04A4E647-5A0F-41E6-A0EF-B58D8C1C6CD4}" type="slidenum">
+              <a:rPr lang="ko-KR" altLang="en-US" smtClean="0"/>
+              <a:pPr/>
+              <a:t>28</a:t>
+            </a:fld>
+            <a:endParaRPr lang="ko-KR" altLang="en-US"/>
+          </a:p>
+        </p:txBody>
+      </p:sp>
+    </p:spTree>
+    <p:extLst>
+      <p:ext uri="{BB962C8B-B14F-4D97-AF65-F5344CB8AC3E}">
+        <p14:creationId xmlns:p14="http://schemas.microsoft.com/office/powerpoint/2010/main" val="2050536620"/>
+      </p:ext>
+    </p:extLst>
+  </p:cSld>
+  <p:clrMapOvr>
+    <a:masterClrMapping/>
+  </p:clrMapOvr>
+</p:notes>
+</file>
+
+<file path=ppt/notesSlides/notesSlide28.xml><?xml version="1.0" encoding="utf-8"?>
+<p:notes xmlns:a="http://schemas.openxmlformats.org/drawingml/2006/main" xmlns:r="http://schemas.openxmlformats.org/officeDocument/2006/relationships" xmlns:p="http://schemas.openxmlformats.org/presentationml/2006/main">
+  <p:cSld>
+    <p:spTree>
+      <p:nvGrpSpPr>
+        <p:cNvPr id="1" name=""/>
+        <p:cNvGrpSpPr/>
+        <p:nvPr/>
+      </p:nvGrpSpPr>
+      <p:grpSpPr>
+        <a:xfrm>
+          <a:off x="0" y="0"/>
+          <a:ext cx="0" cy="0"/>
+          <a:chOff x="0" y="0"/>
+          <a:chExt cx="0" cy="0"/>
+        </a:xfrm>
+      </p:grpSpPr>
+      <p:sp>
+        <p:nvSpPr>
+          <p:cNvPr id="2" name="슬라이드 이미지 개체 틀 1"/>
+          <p:cNvSpPr>
+            <a:spLocks noGrp="1" noRot="1" noChangeAspect="1"/>
+          </p:cNvSpPr>
+          <p:nvPr>
+            <p:ph type="sldImg"/>
+          </p:nvPr>
+        </p:nvSpPr>
+        <p:spPr/>
+      </p:sp>
+      <p:sp>
+        <p:nvSpPr>
+          <p:cNvPr id="3" name="슬라이드 노트 개체 틀 2"/>
+          <p:cNvSpPr>
+            <a:spLocks noGrp="1"/>
+          </p:cNvSpPr>
+          <p:nvPr>
+            <p:ph type="body" idx="1"/>
+          </p:nvPr>
+        </p:nvSpPr>
+        <p:spPr/>
+        <p:txBody>
+          <a:bodyPr>
+            <a:normAutofit/>
+          </a:bodyPr>
+          <a:lstStyle/>
+          <a:p>
+            <a:pPr marL="0" marR="0" indent="0" algn="l" defTabSz="914400" rtl="0" eaLnBrk="1" fontAlgn="auto" latinLnBrk="1" hangingPunct="1">
+              <a:lnSpc>
+                <a:spcPct val="100000"/>
+              </a:lnSpc>
+              <a:spcBef>
+                <a:spcPts val="0"/>
+              </a:spcBef>
+              <a:spcAft>
+                <a:spcPts val="0"/>
+              </a:spcAft>
+              <a:buClrTx/>
+              <a:buSzTx/>
+              <a:buFontTx/>
+              <a:buNone/>
+              <a:tabLst/>
+              <a:defRPr/>
+            </a:pPr>
+            <a:r>
+              <a:rPr lang="en-US" altLang="ko-KR" sz="1200" dirty="0"/>
+              <a:t>http://minheeblog.tistory.com/category/PPT</a:t>
+            </a:r>
+            <a:endParaRPr lang="ko-KR" altLang="en-US" sz="1200" dirty="0"/>
+          </a:p>
+          <a:p>
+            <a:endParaRPr lang="ko-KR" altLang="en-US" dirty="0"/>
+          </a:p>
+        </p:txBody>
+      </p:sp>
+      <p:sp>
+        <p:nvSpPr>
+          <p:cNvPr id="4" name="슬라이드 번호 개체 틀 3"/>
+          <p:cNvSpPr>
+            <a:spLocks noGrp="1"/>
+          </p:cNvSpPr>
+          <p:nvPr>
+            <p:ph type="sldNum" sz="quarter" idx="10"/>
+          </p:nvPr>
+        </p:nvSpPr>
+        <p:spPr/>
+        <p:txBody>
+          <a:bodyPr/>
+          <a:lstStyle/>
+          <a:p>
+            <a:fld id="{04A4E647-5A0F-41E6-A0EF-B58D8C1C6CD4}" type="slidenum">
+              <a:rPr lang="ko-KR" altLang="en-US" smtClean="0"/>
+              <a:pPr/>
+              <a:t>29</a:t>
+            </a:fld>
+            <a:endParaRPr lang="ko-KR" altLang="en-US"/>
+          </a:p>
+        </p:txBody>
+      </p:sp>
+    </p:spTree>
+    <p:extLst>
+      <p:ext uri="{BB962C8B-B14F-4D97-AF65-F5344CB8AC3E}">
+        <p14:creationId xmlns:p14="http://schemas.microsoft.com/office/powerpoint/2010/main" val="856125601"/>
+      </p:ext>
+    </p:extLst>
+  </p:cSld>
+  <p:clrMapOvr>
+    <a:masterClrMapping/>
+  </p:clrMapOvr>
+</p:notes>
+</file>
+
+<file path=ppt/notesSlides/notesSlide29.xml><?xml version="1.0" encoding="utf-8"?>
+<p:notes xmlns:a="http://schemas.openxmlformats.org/drawingml/2006/main" xmlns:r="http://schemas.openxmlformats.org/officeDocument/2006/relationships" xmlns:p="http://schemas.openxmlformats.org/presentationml/2006/main">
+  <p:cSld>
+    <p:spTree>
+      <p:nvGrpSpPr>
+        <p:cNvPr id="1" name=""/>
+        <p:cNvGrpSpPr/>
+        <p:nvPr/>
+      </p:nvGrpSpPr>
+      <p:grpSpPr>
+        <a:xfrm>
+          <a:off x="0" y="0"/>
+          <a:ext cx="0" cy="0"/>
+          <a:chOff x="0" y="0"/>
+          <a:chExt cx="0" cy="0"/>
+        </a:xfrm>
+      </p:grpSpPr>
+      <p:sp>
+        <p:nvSpPr>
+          <p:cNvPr id="2" name="슬라이드 이미지 개체 틀 1"/>
+          <p:cNvSpPr>
+            <a:spLocks noGrp="1" noRot="1" noChangeAspect="1"/>
+          </p:cNvSpPr>
+          <p:nvPr>
+            <p:ph type="sldImg"/>
+          </p:nvPr>
+        </p:nvSpPr>
+        <p:spPr/>
+      </p:sp>
+      <p:sp>
+        <p:nvSpPr>
+          <p:cNvPr id="3" name="슬라이드 노트 개체 틀 2"/>
+          <p:cNvSpPr>
+            <a:spLocks noGrp="1"/>
+          </p:cNvSpPr>
+          <p:nvPr>
+            <p:ph type="body" idx="1"/>
+          </p:nvPr>
+        </p:nvSpPr>
+        <p:spPr/>
+        <p:txBody>
+          <a:bodyPr>
+            <a:normAutofit/>
+          </a:bodyPr>
+          <a:lstStyle/>
+          <a:p>
+            <a:pPr marL="0" marR="0" indent="0" algn="l" defTabSz="914400" rtl="0" eaLnBrk="1" fontAlgn="auto" latinLnBrk="1" hangingPunct="1">
+              <a:lnSpc>
+                <a:spcPct val="100000"/>
+              </a:lnSpc>
+              <a:spcBef>
+                <a:spcPts val="0"/>
+              </a:spcBef>
+              <a:spcAft>
+                <a:spcPts val="0"/>
+              </a:spcAft>
+              <a:buClrTx/>
+              <a:buSzTx/>
+              <a:buFontTx/>
+              <a:buNone/>
+              <a:tabLst/>
+              <a:defRPr/>
+            </a:pPr>
+            <a:r>
+              <a:rPr lang="en-US" altLang="ko-KR" sz="1200" dirty="0"/>
+              <a:t>http://minheeblog.tistory.com/category/PPT</a:t>
+            </a:r>
+            <a:endParaRPr lang="ko-KR" altLang="en-US" sz="1200" dirty="0"/>
+          </a:p>
+          <a:p>
+            <a:endParaRPr lang="ko-KR" altLang="en-US" dirty="0"/>
+          </a:p>
+        </p:txBody>
+      </p:sp>
+      <p:sp>
+        <p:nvSpPr>
+          <p:cNvPr id="4" name="슬라이드 번호 개체 틀 3"/>
+          <p:cNvSpPr>
+            <a:spLocks noGrp="1"/>
+          </p:cNvSpPr>
+          <p:nvPr>
+            <p:ph type="sldNum" sz="quarter" idx="10"/>
+          </p:nvPr>
+        </p:nvSpPr>
+        <p:spPr/>
+        <p:txBody>
+          <a:bodyPr/>
+          <a:lstStyle/>
+          <a:p>
+            <a:fld id="{04A4E647-5A0F-41E6-A0EF-B58D8C1C6CD4}" type="slidenum">
+              <a:rPr lang="ko-KR" altLang="en-US" smtClean="0"/>
+              <a:pPr/>
+              <a:t>30</a:t>
+            </a:fld>
+            <a:endParaRPr lang="ko-KR" altLang="en-US"/>
+          </a:p>
+        </p:txBody>
+      </p:sp>
+    </p:spTree>
+    <p:extLst>
+      <p:ext uri="{BB962C8B-B14F-4D97-AF65-F5344CB8AC3E}">
+        <p14:creationId xmlns:p14="http://schemas.microsoft.com/office/powerpoint/2010/main" val="4159689376"/>
       </p:ext>
     </p:extLst>
   </p:cSld>
@@ -2495,6 +3058,339 @@
     <p:extLst>
       <p:ext uri="{BB962C8B-B14F-4D97-AF65-F5344CB8AC3E}">
         <p14:creationId xmlns:p14="http://schemas.microsoft.com/office/powerpoint/2010/main" val="2535811166"/>
+      </p:ext>
+    </p:extLst>
+  </p:cSld>
+  <p:clrMapOvr>
+    <a:masterClrMapping/>
+  </p:clrMapOvr>
+</p:notes>
+</file>
+
+<file path=ppt/notesSlides/notesSlide30.xml><?xml version="1.0" encoding="utf-8"?>
+<p:notes xmlns:a="http://schemas.openxmlformats.org/drawingml/2006/main" xmlns:r="http://schemas.openxmlformats.org/officeDocument/2006/relationships" xmlns:p="http://schemas.openxmlformats.org/presentationml/2006/main">
+  <p:cSld>
+    <p:spTree>
+      <p:nvGrpSpPr>
+        <p:cNvPr id="1" name=""/>
+        <p:cNvGrpSpPr/>
+        <p:nvPr/>
+      </p:nvGrpSpPr>
+      <p:grpSpPr>
+        <a:xfrm>
+          <a:off x="0" y="0"/>
+          <a:ext cx="0" cy="0"/>
+          <a:chOff x="0" y="0"/>
+          <a:chExt cx="0" cy="0"/>
+        </a:xfrm>
+      </p:grpSpPr>
+      <p:sp>
+        <p:nvSpPr>
+          <p:cNvPr id="2" name="슬라이드 이미지 개체 틀 1"/>
+          <p:cNvSpPr>
+            <a:spLocks noGrp="1" noRot="1" noChangeAspect="1"/>
+          </p:cNvSpPr>
+          <p:nvPr>
+            <p:ph type="sldImg"/>
+          </p:nvPr>
+        </p:nvSpPr>
+        <p:spPr/>
+      </p:sp>
+      <p:sp>
+        <p:nvSpPr>
+          <p:cNvPr id="3" name="슬라이드 노트 개체 틀 2"/>
+          <p:cNvSpPr>
+            <a:spLocks noGrp="1"/>
+          </p:cNvSpPr>
+          <p:nvPr>
+            <p:ph type="body" idx="1"/>
+          </p:nvPr>
+        </p:nvSpPr>
+        <p:spPr/>
+        <p:txBody>
+          <a:bodyPr>
+            <a:normAutofit/>
+          </a:bodyPr>
+          <a:lstStyle/>
+          <a:p>
+            <a:pPr marL="0" marR="0" indent="0" algn="l" defTabSz="914400" rtl="0" eaLnBrk="1" fontAlgn="auto" latinLnBrk="1" hangingPunct="1">
+              <a:lnSpc>
+                <a:spcPct val="100000"/>
+              </a:lnSpc>
+              <a:spcBef>
+                <a:spcPts val="0"/>
+              </a:spcBef>
+              <a:spcAft>
+                <a:spcPts val="0"/>
+              </a:spcAft>
+              <a:buClrTx/>
+              <a:buSzTx/>
+              <a:buFontTx/>
+              <a:buNone/>
+              <a:tabLst/>
+              <a:defRPr/>
+            </a:pPr>
+            <a:r>
+              <a:rPr lang="en-US" altLang="ko-KR" sz="1200" dirty="0"/>
+              <a:t>http://minheeblog.tistory.com/category/PPT</a:t>
+            </a:r>
+            <a:endParaRPr lang="ko-KR" altLang="en-US" sz="1200" dirty="0"/>
+          </a:p>
+          <a:p>
+            <a:endParaRPr lang="ko-KR" altLang="en-US" dirty="0"/>
+          </a:p>
+        </p:txBody>
+      </p:sp>
+      <p:sp>
+        <p:nvSpPr>
+          <p:cNvPr id="4" name="슬라이드 번호 개체 틀 3"/>
+          <p:cNvSpPr>
+            <a:spLocks noGrp="1"/>
+          </p:cNvSpPr>
+          <p:nvPr>
+            <p:ph type="sldNum" sz="quarter" idx="10"/>
+          </p:nvPr>
+        </p:nvSpPr>
+        <p:spPr/>
+        <p:txBody>
+          <a:bodyPr/>
+          <a:lstStyle/>
+          <a:p>
+            <a:fld id="{04A4E647-5A0F-41E6-A0EF-B58D8C1C6CD4}" type="slidenum">
+              <a:rPr lang="ko-KR" altLang="en-US" smtClean="0"/>
+              <a:pPr/>
+              <a:t>31</a:t>
+            </a:fld>
+            <a:endParaRPr lang="ko-KR" altLang="en-US"/>
+          </a:p>
+        </p:txBody>
+      </p:sp>
+    </p:spTree>
+    <p:extLst>
+      <p:ext uri="{BB962C8B-B14F-4D97-AF65-F5344CB8AC3E}">
+        <p14:creationId xmlns:p14="http://schemas.microsoft.com/office/powerpoint/2010/main" val="1644867603"/>
+      </p:ext>
+    </p:extLst>
+  </p:cSld>
+  <p:clrMapOvr>
+    <a:masterClrMapping/>
+  </p:clrMapOvr>
+</p:notes>
+</file>
+
+<file path=ppt/notesSlides/notesSlide31.xml><?xml version="1.0" encoding="utf-8"?>
+<p:notes xmlns:a="http://schemas.openxmlformats.org/drawingml/2006/main" xmlns:r="http://schemas.openxmlformats.org/officeDocument/2006/relationships" xmlns:p="http://schemas.openxmlformats.org/presentationml/2006/main">
+  <p:cSld>
+    <p:spTree>
+      <p:nvGrpSpPr>
+        <p:cNvPr id="1" name=""/>
+        <p:cNvGrpSpPr/>
+        <p:nvPr/>
+      </p:nvGrpSpPr>
+      <p:grpSpPr>
+        <a:xfrm>
+          <a:off x="0" y="0"/>
+          <a:ext cx="0" cy="0"/>
+          <a:chOff x="0" y="0"/>
+          <a:chExt cx="0" cy="0"/>
+        </a:xfrm>
+      </p:grpSpPr>
+      <p:sp>
+        <p:nvSpPr>
+          <p:cNvPr id="2" name="슬라이드 이미지 개체 틀 1"/>
+          <p:cNvSpPr>
+            <a:spLocks noGrp="1" noRot="1" noChangeAspect="1"/>
+          </p:cNvSpPr>
+          <p:nvPr>
+            <p:ph type="sldImg"/>
+          </p:nvPr>
+        </p:nvSpPr>
+        <p:spPr/>
+      </p:sp>
+      <p:sp>
+        <p:nvSpPr>
+          <p:cNvPr id="3" name="슬라이드 노트 개체 틀 2"/>
+          <p:cNvSpPr>
+            <a:spLocks noGrp="1"/>
+          </p:cNvSpPr>
+          <p:nvPr>
+            <p:ph type="body" idx="1"/>
+          </p:nvPr>
+        </p:nvSpPr>
+        <p:spPr/>
+        <p:txBody>
+          <a:bodyPr>
+            <a:normAutofit/>
+          </a:bodyPr>
+          <a:lstStyle/>
+          <a:p>
+            <a:pPr marL="0" marR="0" indent="0" algn="l" defTabSz="914400" rtl="0" eaLnBrk="1" fontAlgn="auto" latinLnBrk="1" hangingPunct="1">
+              <a:lnSpc>
+                <a:spcPct val="100000"/>
+              </a:lnSpc>
+              <a:spcBef>
+                <a:spcPts val="0"/>
+              </a:spcBef>
+              <a:spcAft>
+                <a:spcPts val="0"/>
+              </a:spcAft>
+              <a:buClrTx/>
+              <a:buSzTx/>
+              <a:buFontTx/>
+              <a:buNone/>
+              <a:tabLst/>
+              <a:defRPr/>
+            </a:pPr>
+            <a:r>
+              <a:rPr lang="en-US" altLang="ko-KR" sz="1200" dirty="0"/>
+              <a:t>http://minheeblog.tistory.com/category/PPT</a:t>
+            </a:r>
+            <a:endParaRPr lang="ko-KR" altLang="en-US" sz="1200" dirty="0"/>
+          </a:p>
+          <a:p>
+            <a:endParaRPr lang="ko-KR" altLang="en-US" dirty="0"/>
+          </a:p>
+        </p:txBody>
+      </p:sp>
+      <p:sp>
+        <p:nvSpPr>
+          <p:cNvPr id="4" name="슬라이드 번호 개체 틀 3"/>
+          <p:cNvSpPr>
+            <a:spLocks noGrp="1"/>
+          </p:cNvSpPr>
+          <p:nvPr>
+            <p:ph type="sldNum" sz="quarter" idx="10"/>
+          </p:nvPr>
+        </p:nvSpPr>
+        <p:spPr/>
+        <p:txBody>
+          <a:bodyPr/>
+          <a:lstStyle/>
+          <a:p>
+            <a:fld id="{04A4E647-5A0F-41E6-A0EF-B58D8C1C6CD4}" type="slidenum">
+              <a:rPr lang="ko-KR" altLang="en-US" smtClean="0"/>
+              <a:pPr/>
+              <a:t>32</a:t>
+            </a:fld>
+            <a:endParaRPr lang="ko-KR" altLang="en-US"/>
+          </a:p>
+        </p:txBody>
+      </p:sp>
+    </p:spTree>
+    <p:extLst>
+      <p:ext uri="{BB962C8B-B14F-4D97-AF65-F5344CB8AC3E}">
+        <p14:creationId xmlns:p14="http://schemas.microsoft.com/office/powerpoint/2010/main" val="1976855241"/>
+      </p:ext>
+    </p:extLst>
+  </p:cSld>
+  <p:clrMapOvr>
+    <a:masterClrMapping/>
+  </p:clrMapOvr>
+</p:notes>
+</file>
+
+<file path=ppt/notesSlides/notesSlide32.xml><?xml version="1.0" encoding="utf-8"?>
+<p:notes xmlns:a="http://schemas.openxmlformats.org/drawingml/2006/main" xmlns:r="http://schemas.openxmlformats.org/officeDocument/2006/relationships" xmlns:p="http://schemas.openxmlformats.org/presentationml/2006/main">
+  <p:cSld>
+    <p:spTree>
+      <p:nvGrpSpPr>
+        <p:cNvPr id="1" name=""/>
+        <p:cNvGrpSpPr/>
+        <p:nvPr/>
+      </p:nvGrpSpPr>
+      <p:grpSpPr>
+        <a:xfrm>
+          <a:off x="0" y="0"/>
+          <a:ext cx="0" cy="0"/>
+          <a:chOff x="0" y="0"/>
+          <a:chExt cx="0" cy="0"/>
+        </a:xfrm>
+      </p:grpSpPr>
+      <p:sp>
+        <p:nvSpPr>
+          <p:cNvPr id="2" name="슬라이드 이미지 개체 틀 1"/>
+          <p:cNvSpPr>
+            <a:spLocks noGrp="1" noRot="1" noChangeAspect="1"/>
+          </p:cNvSpPr>
+          <p:nvPr>
+            <p:ph type="sldImg"/>
+          </p:nvPr>
+        </p:nvSpPr>
+        <p:spPr/>
+      </p:sp>
+      <p:sp>
+        <p:nvSpPr>
+          <p:cNvPr id="3" name="슬라이드 노트 개체 틀 2"/>
+          <p:cNvSpPr>
+            <a:spLocks noGrp="1"/>
+          </p:cNvSpPr>
+          <p:nvPr>
+            <p:ph type="body" idx="1"/>
+          </p:nvPr>
+        </p:nvSpPr>
+        <p:spPr/>
+        <p:txBody>
+          <a:bodyPr>
+            <a:normAutofit/>
+          </a:bodyPr>
+          <a:lstStyle/>
+          <a:p>
+            <a:pPr marL="0" marR="0" indent="0" algn="l" defTabSz="914400" rtl="0" eaLnBrk="1" fontAlgn="auto" latinLnBrk="1" hangingPunct="1">
+              <a:lnSpc>
+                <a:spcPct val="100000"/>
+              </a:lnSpc>
+              <a:spcBef>
+                <a:spcPts val="0"/>
+              </a:spcBef>
+              <a:spcAft>
+                <a:spcPts val="0"/>
+              </a:spcAft>
+              <a:buClrTx/>
+              <a:buSzTx/>
+              <a:buFontTx/>
+              <a:buNone/>
+              <a:tabLst/>
+              <a:defRPr/>
+            </a:pPr>
+            <a:r>
+              <a:rPr lang="en-US" altLang="ko-KR" sz="1200" dirty="0"/>
+              <a:t>http://minheeblog.tistory.com/category/PPT</a:t>
+            </a:r>
+            <a:endParaRPr lang="ko-KR" altLang="en-US" sz="1200" dirty="0"/>
+          </a:p>
+          <a:p>
+            <a:endParaRPr lang="ko-KR" altLang="en-US" dirty="0"/>
+          </a:p>
+        </p:txBody>
+      </p:sp>
+      <p:sp>
+        <p:nvSpPr>
+          <p:cNvPr id="4" name="슬라이드 번호 개체 틀 3"/>
+          <p:cNvSpPr>
+            <a:spLocks noGrp="1"/>
+          </p:cNvSpPr>
+          <p:nvPr>
+            <p:ph type="sldNum" sz="quarter" idx="10"/>
+          </p:nvPr>
+        </p:nvSpPr>
+        <p:spPr/>
+        <p:txBody>
+          <a:bodyPr/>
+          <a:lstStyle/>
+          <a:p>
+            <a:fld id="{04A4E647-5A0F-41E6-A0EF-B58D8C1C6CD4}" type="slidenum">
+              <a:rPr lang="ko-KR" altLang="en-US" smtClean="0"/>
+              <a:pPr/>
+              <a:t>33</a:t>
+            </a:fld>
+            <a:endParaRPr lang="ko-KR" altLang="en-US"/>
+          </a:p>
+        </p:txBody>
+      </p:sp>
+    </p:spTree>
+    <p:extLst>
+      <p:ext uri="{BB962C8B-B14F-4D97-AF65-F5344CB8AC3E}">
+        <p14:creationId xmlns:p14="http://schemas.microsoft.com/office/powerpoint/2010/main" val="3557393855"/>
       </p:ext>
     </p:extLst>
   </p:cSld>
@@ -3350,7 +4246,7 @@
             <a:fld id="{A22FE722-38C7-4231-8BB5-7A27D4E5977D}" type="datetimeFigureOut">
               <a:rPr lang="ko-KR" altLang="en-US" smtClean="0"/>
               <a:pPr/>
-              <a:t>2026-05-22</a:t>
+              <a:t>2026-05-25</a:t>
             </a:fld>
             <a:endParaRPr lang="ko-KR" altLang="en-US"/>
           </a:p>
@@ -3515,7 +4411,7 @@
             <a:fld id="{A22FE722-38C7-4231-8BB5-7A27D4E5977D}" type="datetimeFigureOut">
               <a:rPr lang="ko-KR" altLang="en-US" smtClean="0"/>
               <a:pPr/>
-              <a:t>2026-05-22</a:t>
+              <a:t>2026-05-25</a:t>
             </a:fld>
             <a:endParaRPr lang="ko-KR" altLang="en-US"/>
           </a:p>
@@ -3690,7 +4586,7 @@
             <a:fld id="{A22FE722-38C7-4231-8BB5-7A27D4E5977D}" type="datetimeFigureOut">
               <a:rPr lang="ko-KR" altLang="en-US" smtClean="0"/>
               <a:pPr/>
-              <a:t>2026-05-22</a:t>
+              <a:t>2026-05-25</a:t>
             </a:fld>
             <a:endParaRPr lang="ko-KR" altLang="en-US"/>
           </a:p>
@@ -3855,7 +4751,7 @@
             <a:fld id="{A22FE722-38C7-4231-8BB5-7A27D4E5977D}" type="datetimeFigureOut">
               <a:rPr lang="ko-KR" altLang="en-US" smtClean="0"/>
               <a:pPr/>
-              <a:t>2026-05-22</a:t>
+              <a:t>2026-05-25</a:t>
             </a:fld>
             <a:endParaRPr lang="ko-KR" altLang="en-US"/>
           </a:p>
@@ -4097,7 +4993,7 @@
             <a:fld id="{A22FE722-38C7-4231-8BB5-7A27D4E5977D}" type="datetimeFigureOut">
               <a:rPr lang="ko-KR" altLang="en-US" smtClean="0"/>
               <a:pPr/>
-              <a:t>2026-05-22</a:t>
+              <a:t>2026-05-25</a:t>
             </a:fld>
             <a:endParaRPr lang="ko-KR" altLang="en-US"/>
           </a:p>
@@ -4379,7 +5275,7 @@
             <a:fld id="{A22FE722-38C7-4231-8BB5-7A27D4E5977D}" type="datetimeFigureOut">
               <a:rPr lang="ko-KR" altLang="en-US" smtClean="0"/>
               <a:pPr/>
-              <a:t>2026-05-22</a:t>
+              <a:t>2026-05-25</a:t>
             </a:fld>
             <a:endParaRPr lang="ko-KR" altLang="en-US"/>
           </a:p>
@@ -4795,7 +5691,7 @@
             <a:fld id="{A22FE722-38C7-4231-8BB5-7A27D4E5977D}" type="datetimeFigureOut">
               <a:rPr lang="ko-KR" altLang="en-US" smtClean="0"/>
               <a:pPr/>
-              <a:t>2026-05-22</a:t>
+              <a:t>2026-05-25</a:t>
             </a:fld>
             <a:endParaRPr lang="ko-KR" altLang="en-US"/>
           </a:p>
@@ -4909,7 +5805,7 @@
             <a:fld id="{A22FE722-38C7-4231-8BB5-7A27D4E5977D}" type="datetimeFigureOut">
               <a:rPr lang="ko-KR" altLang="en-US" smtClean="0"/>
               <a:pPr/>
-              <a:t>2026-05-22</a:t>
+              <a:t>2026-05-25</a:t>
             </a:fld>
             <a:endParaRPr lang="ko-KR" altLang="en-US"/>
           </a:p>
@@ -5300,7 +6196,7 @@
             <a:fld id="{A22FE722-38C7-4231-8BB5-7A27D4E5977D}" type="datetimeFigureOut">
               <a:rPr lang="ko-KR" altLang="en-US" smtClean="0"/>
               <a:pPr/>
-              <a:t>2026-05-22</a:t>
+              <a:t>2026-05-25</a:t>
             </a:fld>
             <a:endParaRPr lang="ko-KR" altLang="en-US"/>
           </a:p>
@@ -5549,7 +6445,7 @@
             <a:fld id="{A22FE722-38C7-4231-8BB5-7A27D4E5977D}" type="datetimeFigureOut">
               <a:rPr lang="ko-KR" altLang="en-US" smtClean="0"/>
               <a:pPr/>
-              <a:t>2026-05-22</a:t>
+              <a:t>2026-05-25</a:t>
             </a:fld>
             <a:endParaRPr lang="ko-KR" altLang="en-US"/>
           </a:p>
@@ -5762,7 +6658,7 @@
             <a:fld id="{A22FE722-38C7-4231-8BB5-7A27D4E5977D}" type="datetimeFigureOut">
               <a:rPr lang="ko-KR" altLang="en-US" smtClean="0"/>
               <a:pPr/>
-              <a:t>2026-05-22</a:t>
+              <a:t>2026-05-25</a:t>
             </a:fld>
             <a:endParaRPr lang="ko-KR" altLang="en-US"/>
           </a:p>
@@ -16092,6 +16988,4020 @@
       </p:grpSpPr>
       <p:sp>
         <p:nvSpPr>
+          <p:cNvPr id="3" name="타원 2"/>
+          <p:cNvSpPr/>
+          <p:nvPr/>
+        </p:nvSpPr>
+        <p:spPr>
+          <a:xfrm>
+            <a:off x="2627784" y="1298236"/>
+            <a:ext cx="3858956" cy="3858956"/>
+          </a:xfrm>
+          <a:prstGeom prst="ellipse">
+            <a:avLst/>
+          </a:prstGeom>
+          <a:solidFill>
+            <a:schemeClr val="tx2">
+              <a:lumMod val="75000"/>
+            </a:schemeClr>
+          </a:solidFill>
+          <a:ln>
+            <a:noFill/>
+          </a:ln>
+        </p:spPr>
+        <p:style>
+          <a:lnRef idx="2">
+            <a:schemeClr val="accent1">
+              <a:shade val="50000"/>
+            </a:schemeClr>
+          </a:lnRef>
+          <a:fillRef idx="1">
+            <a:schemeClr val="accent1"/>
+          </a:fillRef>
+          <a:effectRef idx="0">
+            <a:schemeClr val="accent1"/>
+          </a:effectRef>
+          <a:fontRef idx="minor">
+            <a:schemeClr val="lt1"/>
+          </a:fontRef>
+        </p:style>
+        <p:txBody>
+          <a:bodyPr rtlCol="0" anchor="ctr"/>
+          <a:lstStyle/>
+          <a:p>
+            <a:pPr algn="ctr"/>
+            <a:endParaRPr lang="ko-KR" altLang="en-US"/>
+          </a:p>
+        </p:txBody>
+      </p:sp>
+      <p:sp>
+        <p:nvSpPr>
+          <p:cNvPr id="7" name="TextBox 6"/>
+          <p:cNvSpPr txBox="1"/>
+          <p:nvPr/>
+        </p:nvSpPr>
+        <p:spPr>
+          <a:xfrm>
+            <a:off x="2627784" y="2971550"/>
+            <a:ext cx="3858956" cy="630942"/>
+          </a:xfrm>
+          <a:prstGeom prst="rect">
+            <a:avLst/>
+          </a:prstGeom>
+          <a:noFill/>
+        </p:spPr>
+        <p:txBody>
+          <a:bodyPr wrap="square" rtlCol="0">
+            <a:spAutoFit/>
+          </a:bodyPr>
+          <a:lstStyle/>
+          <a:p>
+            <a:pPr algn="ctr"/>
+            <a:r>
+              <a:rPr lang="en-US" altLang="ko-KR" sz="3500" b="1" dirty="0">
+                <a:solidFill>
+                  <a:schemeClr val="bg1"/>
+                </a:solidFill>
+              </a:rPr>
+              <a:t>LSTM</a:t>
+            </a:r>
+          </a:p>
+        </p:txBody>
+      </p:sp>
+    </p:spTree>
+    <p:extLst>
+      <p:ext uri="{BB962C8B-B14F-4D97-AF65-F5344CB8AC3E}">
+        <p14:creationId xmlns:p14="http://schemas.microsoft.com/office/powerpoint/2010/main" val="2452217359"/>
+      </p:ext>
+    </p:extLst>
+  </p:cSld>
+  <p:clrMapOvr>
+    <a:masterClrMapping/>
+  </p:clrMapOvr>
+</p:sld>
+</file>
+
+<file path=ppt/slides/slide26.xml><?xml version="1.0" encoding="utf-8"?>
+<p:sld xmlns:a="http://schemas.openxmlformats.org/drawingml/2006/main" xmlns:r="http://schemas.openxmlformats.org/officeDocument/2006/relationships" xmlns:p="http://schemas.openxmlformats.org/presentationml/2006/main">
+  <p:cSld>
+    <p:spTree>
+      <p:nvGrpSpPr>
+        <p:cNvPr id="1" name=""/>
+        <p:cNvGrpSpPr/>
+        <p:nvPr/>
+      </p:nvGrpSpPr>
+      <p:grpSpPr>
+        <a:xfrm>
+          <a:off x="0" y="0"/>
+          <a:ext cx="0" cy="0"/>
+          <a:chOff x="0" y="0"/>
+          <a:chExt cx="0" cy="0"/>
+        </a:xfrm>
+      </p:grpSpPr>
+      <p:sp>
+        <p:nvSpPr>
+          <p:cNvPr id="3" name="타원 2"/>
+          <p:cNvSpPr/>
+          <p:nvPr/>
+        </p:nvSpPr>
+        <p:spPr>
+          <a:xfrm>
+            <a:off x="4067944" y="74100"/>
+            <a:ext cx="936104" cy="936104"/>
+          </a:xfrm>
+          <a:prstGeom prst="ellipse">
+            <a:avLst/>
+          </a:prstGeom>
+          <a:solidFill>
+            <a:schemeClr val="tx2">
+              <a:lumMod val="75000"/>
+            </a:schemeClr>
+          </a:solidFill>
+          <a:ln>
+            <a:noFill/>
+          </a:ln>
+        </p:spPr>
+        <p:style>
+          <a:lnRef idx="2">
+            <a:schemeClr val="accent1">
+              <a:shade val="50000"/>
+            </a:schemeClr>
+          </a:lnRef>
+          <a:fillRef idx="1">
+            <a:schemeClr val="accent1"/>
+          </a:fillRef>
+          <a:effectRef idx="0">
+            <a:schemeClr val="accent1"/>
+          </a:effectRef>
+          <a:fontRef idx="minor">
+            <a:schemeClr val="lt1"/>
+          </a:fontRef>
+        </p:style>
+        <p:txBody>
+          <a:bodyPr rtlCol="0" anchor="ctr"/>
+          <a:lstStyle/>
+          <a:p>
+            <a:pPr algn="ctr"/>
+            <a:endParaRPr lang="ko-KR" altLang="en-US"/>
+          </a:p>
+        </p:txBody>
+      </p:sp>
+      <p:sp>
+        <p:nvSpPr>
+          <p:cNvPr id="9" name="TextBox 8"/>
+          <p:cNvSpPr txBox="1"/>
+          <p:nvPr/>
+        </p:nvSpPr>
+        <p:spPr>
+          <a:xfrm>
+            <a:off x="3995936" y="479095"/>
+            <a:ext cx="1080120" cy="461665"/>
+          </a:xfrm>
+          <a:prstGeom prst="rect">
+            <a:avLst/>
+          </a:prstGeom>
+          <a:noFill/>
+        </p:spPr>
+        <p:txBody>
+          <a:bodyPr wrap="square" rtlCol="0">
+            <a:spAutoFit/>
+          </a:bodyPr>
+          <a:lstStyle/>
+          <a:p>
+            <a:pPr algn="ctr"/>
+            <a:r>
+              <a:rPr lang="en-US" altLang="ko-KR" sz="2400" dirty="0">
+                <a:solidFill>
+                  <a:schemeClr val="bg1"/>
+                </a:solidFill>
+                <a:latin typeface="HY헤드라인M" pitchFamily="18" charset="-127"/>
+                <a:ea typeface="HY헤드라인M" pitchFamily="18" charset="-127"/>
+              </a:rPr>
+              <a:t>01</a:t>
+            </a:r>
+            <a:endParaRPr lang="ko-KR" altLang="en-US" sz="2400" dirty="0">
+              <a:solidFill>
+                <a:schemeClr val="bg1"/>
+              </a:solidFill>
+              <a:latin typeface="HY헤드라인M" pitchFamily="18" charset="-127"/>
+              <a:ea typeface="HY헤드라인M" pitchFamily="18" charset="-127"/>
+            </a:endParaRPr>
+          </a:p>
+        </p:txBody>
+      </p:sp>
+      <p:sp>
+        <p:nvSpPr>
+          <p:cNvPr id="4" name="TextBox 3"/>
+          <p:cNvSpPr txBox="1"/>
+          <p:nvPr/>
+        </p:nvSpPr>
+        <p:spPr>
+          <a:xfrm>
+            <a:off x="971600" y="1700808"/>
+            <a:ext cx="7200800" cy="3778278"/>
+          </a:xfrm>
+          <a:prstGeom prst="rect">
+            <a:avLst/>
+          </a:prstGeom>
+          <a:noFill/>
+        </p:spPr>
+        <p:txBody>
+          <a:bodyPr wrap="square" rtlCol="0">
+            <a:spAutoFit/>
+          </a:bodyPr>
+          <a:lstStyle/>
+          <a:p>
+            <a:pPr marL="285750" indent="-285750">
+              <a:lnSpc>
+                <a:spcPct val="150000"/>
+              </a:lnSpc>
+              <a:buFont typeface="Arial" panose="020B0604020202020204" pitchFamily="34" charset="0"/>
+              <a:buChar char="•"/>
+            </a:pPr>
+            <a:r>
+              <a:rPr lang="ko-KR" altLang="en-US" dirty="0"/>
+              <a:t>단기 기억 </a:t>
+            </a:r>
+            <a:r>
+              <a:rPr lang="ko-KR" altLang="en-US" dirty="0" err="1"/>
+              <a:t>상실증</a:t>
+            </a:r>
+            <a:r>
+              <a:rPr lang="ko-KR" altLang="en-US" dirty="0"/>
+              <a:t> </a:t>
+            </a:r>
+            <a:r>
+              <a:rPr lang="en-US" altLang="ko-KR" dirty="0"/>
+              <a:t>(</a:t>
+            </a:r>
+            <a:r>
+              <a:rPr lang="ko-KR" altLang="en-US" dirty="0"/>
+              <a:t>기울기 소실</a:t>
+            </a:r>
+            <a:r>
+              <a:rPr lang="en-US" altLang="ko-KR" dirty="0"/>
+              <a:t>)</a:t>
+            </a:r>
+          </a:p>
+          <a:p>
+            <a:pPr marL="742950" lvl="1" indent="-285750">
+              <a:lnSpc>
+                <a:spcPct val="150000"/>
+              </a:lnSpc>
+              <a:buFont typeface="Arial" panose="020B0604020202020204" pitchFamily="34" charset="0"/>
+              <a:buChar char="•"/>
+            </a:pPr>
+            <a:r>
+              <a:rPr lang="ko-KR" altLang="en-US" dirty="0"/>
+              <a:t>기존 </a:t>
+            </a:r>
+            <a:r>
+              <a:rPr lang="en-US" altLang="ko-KR" dirty="0"/>
+              <a:t>RNN</a:t>
+            </a:r>
+            <a:r>
+              <a:rPr lang="ko-KR" altLang="en-US" dirty="0"/>
+              <a:t>은 들어오는 모든 새로운 정보를 무작정 덮어쓰기 방식으로 기억에 저장</a:t>
+            </a:r>
+            <a:endParaRPr lang="en-US" altLang="ko-KR" dirty="0"/>
+          </a:p>
+          <a:p>
+            <a:pPr marL="742950" lvl="1" indent="-285750">
+              <a:lnSpc>
+                <a:spcPct val="150000"/>
+              </a:lnSpc>
+              <a:buFont typeface="Arial" panose="020B0604020202020204" pitchFamily="34" charset="0"/>
+              <a:buChar char="•"/>
+            </a:pPr>
+            <a:r>
+              <a:rPr lang="ko-KR" altLang="en-US" dirty="0"/>
+              <a:t>시계열 데이터나 문장이 조금만 길어져도</a:t>
+            </a:r>
+            <a:r>
+              <a:rPr lang="en-US" altLang="ko-KR" dirty="0"/>
+              <a:t>, </a:t>
+            </a:r>
+            <a:r>
+              <a:rPr lang="ko-KR" altLang="en-US" dirty="0"/>
+              <a:t>앞서 들어온 중요한 정보가 뒤로 갈수록 희미해짐</a:t>
+            </a:r>
+            <a:endParaRPr lang="en-US" altLang="ko-KR" dirty="0"/>
+          </a:p>
+          <a:p>
+            <a:pPr marL="742950" lvl="1" indent="-285750">
+              <a:lnSpc>
+                <a:spcPct val="150000"/>
+              </a:lnSpc>
+              <a:buFont typeface="Arial" panose="020B0604020202020204" pitchFamily="34" charset="0"/>
+              <a:buChar char="•"/>
+            </a:pPr>
+            <a:r>
+              <a:rPr lang="ko-KR" altLang="en-US" dirty="0"/>
+              <a:t>매 단계마다 동일한 가중치</a:t>
+            </a:r>
+            <a:r>
+              <a:rPr lang="en-US" altLang="ko-KR" dirty="0"/>
+              <a:t>(</a:t>
+            </a:r>
+            <a:r>
+              <a:rPr lang="ko-KR" altLang="en-US" dirty="0"/>
+              <a:t>행렬</a:t>
+            </a:r>
+            <a:r>
+              <a:rPr lang="en-US" altLang="ko-KR" dirty="0"/>
+              <a:t>)</a:t>
+            </a:r>
+            <a:r>
+              <a:rPr lang="ko-KR" altLang="en-US" dirty="0"/>
+              <a:t>를 반복해서 곱하기 때문에</a:t>
+            </a:r>
+            <a:r>
+              <a:rPr lang="en-US" altLang="ko-KR" dirty="0"/>
+              <a:t>, 0.5</a:t>
+            </a:r>
+            <a:r>
+              <a:rPr lang="ko-KR" altLang="en-US" dirty="0"/>
+              <a:t>를 계속 곱하면 </a:t>
+            </a:r>
+            <a:r>
+              <a:rPr lang="en-US" altLang="ko-KR" dirty="0"/>
+              <a:t>0</a:t>
+            </a:r>
+            <a:r>
+              <a:rPr lang="ko-KR" altLang="en-US" dirty="0"/>
+              <a:t>에 수렴하듯 정보 소실</a:t>
+            </a:r>
+            <a:endParaRPr lang="en-US" altLang="ko-KR" dirty="0"/>
+          </a:p>
+          <a:p>
+            <a:pPr marL="742950" lvl="1" indent="-285750">
+              <a:lnSpc>
+                <a:spcPct val="150000"/>
+              </a:lnSpc>
+              <a:buFont typeface="Arial" panose="020B0604020202020204" pitchFamily="34" charset="0"/>
+              <a:buChar char="•"/>
+            </a:pPr>
+            <a:r>
+              <a:rPr lang="ko-KR" altLang="en-US" dirty="0"/>
+              <a:t>기울기 소실</a:t>
+            </a:r>
+            <a:r>
+              <a:rPr lang="en-US" altLang="ko-KR" dirty="0"/>
+              <a:t>(Vanishing Gradient) </a:t>
+            </a:r>
+            <a:r>
+              <a:rPr lang="ko-KR" altLang="en-US" dirty="0"/>
+              <a:t>문제라고 부르며</a:t>
+            </a:r>
+            <a:r>
+              <a:rPr lang="en-US" altLang="ko-KR" dirty="0"/>
+              <a:t>, </a:t>
+            </a:r>
+            <a:r>
+              <a:rPr lang="ko-KR" altLang="en-US" dirty="0"/>
+              <a:t>이를 해결하기 위해 </a:t>
+            </a:r>
+            <a:r>
+              <a:rPr lang="en-US" altLang="ko-KR" dirty="0"/>
+              <a:t>LSTM</a:t>
+            </a:r>
+            <a:r>
+              <a:rPr lang="ko-KR" altLang="en-US" dirty="0"/>
+              <a:t>이 탄생</a:t>
+            </a:r>
+            <a:endParaRPr lang="en-US" altLang="ko-KR" dirty="0"/>
+          </a:p>
+        </p:txBody>
+      </p:sp>
+      <p:sp>
+        <p:nvSpPr>
+          <p:cNvPr id="6" name="TextBox 5"/>
+          <p:cNvSpPr txBox="1"/>
+          <p:nvPr/>
+        </p:nvSpPr>
+        <p:spPr>
+          <a:xfrm>
+            <a:off x="539552" y="1065096"/>
+            <a:ext cx="7992888" cy="446276"/>
+          </a:xfrm>
+          <a:prstGeom prst="rect">
+            <a:avLst/>
+          </a:prstGeom>
+          <a:noFill/>
+        </p:spPr>
+        <p:txBody>
+          <a:bodyPr wrap="square" rtlCol="0">
+            <a:spAutoFit/>
+          </a:bodyPr>
+          <a:lstStyle/>
+          <a:p>
+            <a:r>
+              <a:rPr lang="ko-KR" altLang="en-US" sz="2300" dirty="0"/>
+              <a:t>기존 </a:t>
+            </a:r>
+            <a:r>
+              <a:rPr lang="en-US" altLang="ko-KR" sz="2300" dirty="0"/>
+              <a:t>RNN</a:t>
+            </a:r>
+            <a:r>
+              <a:rPr lang="ko-KR" altLang="en-US" sz="2300" dirty="0"/>
+              <a:t>의 한계</a:t>
+            </a:r>
+          </a:p>
+        </p:txBody>
+      </p:sp>
+    </p:spTree>
+    <p:extLst>
+      <p:ext uri="{BB962C8B-B14F-4D97-AF65-F5344CB8AC3E}">
+        <p14:creationId xmlns:p14="http://schemas.microsoft.com/office/powerpoint/2010/main" val="2030830066"/>
+      </p:ext>
+    </p:extLst>
+  </p:cSld>
+  <p:clrMapOvr>
+    <a:masterClrMapping/>
+  </p:clrMapOvr>
+</p:sld>
+</file>
+
+<file path=ppt/slides/slide27.xml><?xml version="1.0" encoding="utf-8"?>
+<p:sld xmlns:a="http://schemas.openxmlformats.org/drawingml/2006/main" xmlns:r="http://schemas.openxmlformats.org/officeDocument/2006/relationships" xmlns:p="http://schemas.openxmlformats.org/presentationml/2006/main">
+  <p:cSld>
+    <p:spTree>
+      <p:nvGrpSpPr>
+        <p:cNvPr id="1" name=""/>
+        <p:cNvGrpSpPr/>
+        <p:nvPr/>
+      </p:nvGrpSpPr>
+      <p:grpSpPr>
+        <a:xfrm>
+          <a:off x="0" y="0"/>
+          <a:ext cx="0" cy="0"/>
+          <a:chOff x="0" y="0"/>
+          <a:chExt cx="0" cy="0"/>
+        </a:xfrm>
+      </p:grpSpPr>
+      <p:sp>
+        <p:nvSpPr>
+          <p:cNvPr id="3" name="타원 2"/>
+          <p:cNvSpPr/>
+          <p:nvPr/>
+        </p:nvSpPr>
+        <p:spPr>
+          <a:xfrm>
+            <a:off x="4067944" y="74100"/>
+            <a:ext cx="936104" cy="936104"/>
+          </a:xfrm>
+          <a:prstGeom prst="ellipse">
+            <a:avLst/>
+          </a:prstGeom>
+          <a:solidFill>
+            <a:schemeClr val="tx2">
+              <a:lumMod val="75000"/>
+            </a:schemeClr>
+          </a:solidFill>
+          <a:ln>
+            <a:noFill/>
+          </a:ln>
+        </p:spPr>
+        <p:style>
+          <a:lnRef idx="2">
+            <a:schemeClr val="accent1">
+              <a:shade val="50000"/>
+            </a:schemeClr>
+          </a:lnRef>
+          <a:fillRef idx="1">
+            <a:schemeClr val="accent1"/>
+          </a:fillRef>
+          <a:effectRef idx="0">
+            <a:schemeClr val="accent1"/>
+          </a:effectRef>
+          <a:fontRef idx="minor">
+            <a:schemeClr val="lt1"/>
+          </a:fontRef>
+        </p:style>
+        <p:txBody>
+          <a:bodyPr rtlCol="0" anchor="ctr"/>
+          <a:lstStyle/>
+          <a:p>
+            <a:pPr algn="ctr"/>
+            <a:endParaRPr lang="ko-KR" altLang="en-US"/>
+          </a:p>
+        </p:txBody>
+      </p:sp>
+      <p:sp>
+        <p:nvSpPr>
+          <p:cNvPr id="9" name="TextBox 8"/>
+          <p:cNvSpPr txBox="1"/>
+          <p:nvPr/>
+        </p:nvSpPr>
+        <p:spPr>
+          <a:xfrm>
+            <a:off x="3995936" y="479095"/>
+            <a:ext cx="1080120" cy="461665"/>
+          </a:xfrm>
+          <a:prstGeom prst="rect">
+            <a:avLst/>
+          </a:prstGeom>
+          <a:noFill/>
+        </p:spPr>
+        <p:txBody>
+          <a:bodyPr wrap="square" rtlCol="0">
+            <a:spAutoFit/>
+          </a:bodyPr>
+          <a:lstStyle/>
+          <a:p>
+            <a:pPr algn="ctr"/>
+            <a:r>
+              <a:rPr lang="en-US" altLang="ko-KR" sz="2400" dirty="0">
+                <a:solidFill>
+                  <a:schemeClr val="bg1"/>
+                </a:solidFill>
+                <a:latin typeface="HY헤드라인M" pitchFamily="18" charset="-127"/>
+                <a:ea typeface="HY헤드라인M" pitchFamily="18" charset="-127"/>
+              </a:rPr>
+              <a:t>01</a:t>
+            </a:r>
+            <a:endParaRPr lang="ko-KR" altLang="en-US" sz="2400" dirty="0">
+              <a:solidFill>
+                <a:schemeClr val="bg1"/>
+              </a:solidFill>
+              <a:latin typeface="HY헤드라인M" pitchFamily="18" charset="-127"/>
+              <a:ea typeface="HY헤드라인M" pitchFamily="18" charset="-127"/>
+            </a:endParaRPr>
+          </a:p>
+        </p:txBody>
+      </p:sp>
+      <p:sp>
+        <p:nvSpPr>
+          <p:cNvPr id="6" name="TextBox 5"/>
+          <p:cNvSpPr txBox="1"/>
+          <p:nvPr/>
+        </p:nvSpPr>
+        <p:spPr>
+          <a:xfrm>
+            <a:off x="539552" y="1065096"/>
+            <a:ext cx="7992888" cy="446276"/>
+          </a:xfrm>
+          <a:prstGeom prst="rect">
+            <a:avLst/>
+          </a:prstGeom>
+          <a:noFill/>
+        </p:spPr>
+        <p:txBody>
+          <a:bodyPr wrap="square" rtlCol="0">
+            <a:spAutoFit/>
+          </a:bodyPr>
+          <a:lstStyle/>
+          <a:p>
+            <a:r>
+              <a:rPr lang="en-US" altLang="ko-KR" sz="2300" dirty="0"/>
+              <a:t>LSTM</a:t>
+            </a:r>
+            <a:r>
+              <a:rPr lang="ko-KR" altLang="en-US" sz="2300" dirty="0"/>
+              <a:t>의 특징</a:t>
+            </a:r>
+          </a:p>
+        </p:txBody>
+      </p:sp>
+      <p:grpSp>
+        <p:nvGrpSpPr>
+          <p:cNvPr id="7" name="그룹 6">
+            <a:extLst>
+              <a:ext uri="{FF2B5EF4-FFF2-40B4-BE49-F238E27FC236}">
+                <a16:creationId xmlns:a16="http://schemas.microsoft.com/office/drawing/2014/main" id="{6307B259-7902-4570-8EAD-CA297854F441}"/>
+              </a:ext>
+            </a:extLst>
+          </p:cNvPr>
+          <p:cNvGrpSpPr/>
+          <p:nvPr/>
+        </p:nvGrpSpPr>
+        <p:grpSpPr>
+          <a:xfrm>
+            <a:off x="571500" y="1866900"/>
+            <a:ext cx="8136966" cy="3002260"/>
+            <a:chOff x="571500" y="1866900"/>
+            <a:chExt cx="11049000" cy="4076700"/>
+          </a:xfrm>
+        </p:grpSpPr>
+        <p:pic>
+          <p:nvPicPr>
+            <p:cNvPr id="8" name="Google Shape;116;p16" descr="image.png">
+              <a:extLst>
+                <a:ext uri="{FF2B5EF4-FFF2-40B4-BE49-F238E27FC236}">
+                  <a16:creationId xmlns:a16="http://schemas.microsoft.com/office/drawing/2014/main" id="{62DB39FD-B977-4BEC-B7A5-0CD05D09AD0E}"/>
+                </a:ext>
+              </a:extLst>
+            </p:cNvPr>
+            <p:cNvPicPr preferRelativeResize="0"/>
+            <p:nvPr/>
+          </p:nvPicPr>
+          <p:blipFill rotWithShape="1">
+            <a:blip r:embed="rId3">
+              <a:alphaModFix/>
+            </a:blip>
+            <a:srcRect/>
+            <a:stretch/>
+          </p:blipFill>
+          <p:spPr>
+            <a:xfrm>
+              <a:off x="571500" y="1866900"/>
+              <a:ext cx="3429000" cy="4076700"/>
+            </a:xfrm>
+            <a:prstGeom prst="rect">
+              <a:avLst/>
+            </a:prstGeom>
+            <a:noFill/>
+            <a:ln>
+              <a:noFill/>
+            </a:ln>
+          </p:spPr>
+        </p:pic>
+        <p:pic>
+          <p:nvPicPr>
+            <p:cNvPr id="10" name="Google Shape;117;p16" descr="image.png">
+              <a:extLst>
+                <a:ext uri="{FF2B5EF4-FFF2-40B4-BE49-F238E27FC236}">
+                  <a16:creationId xmlns:a16="http://schemas.microsoft.com/office/drawing/2014/main" id="{350D15D9-591F-4756-AB78-99FD3AF05764}"/>
+                </a:ext>
+              </a:extLst>
+            </p:cNvPr>
+            <p:cNvPicPr preferRelativeResize="0"/>
+            <p:nvPr/>
+          </p:nvPicPr>
+          <p:blipFill rotWithShape="1">
+            <a:blip r:embed="rId4">
+              <a:alphaModFix/>
+            </a:blip>
+            <a:srcRect/>
+            <a:stretch/>
+          </p:blipFill>
+          <p:spPr>
+            <a:xfrm>
+              <a:off x="4381500" y="1866900"/>
+              <a:ext cx="3429000" cy="4076700"/>
+            </a:xfrm>
+            <a:prstGeom prst="rect">
+              <a:avLst/>
+            </a:prstGeom>
+            <a:noFill/>
+            <a:ln>
+              <a:noFill/>
+            </a:ln>
+          </p:spPr>
+        </p:pic>
+        <p:pic>
+          <p:nvPicPr>
+            <p:cNvPr id="11" name="Google Shape;118;p16" descr="image.png">
+              <a:extLst>
+                <a:ext uri="{FF2B5EF4-FFF2-40B4-BE49-F238E27FC236}">
+                  <a16:creationId xmlns:a16="http://schemas.microsoft.com/office/drawing/2014/main" id="{543D742B-CDCA-446C-A7FE-77C20F003E06}"/>
+                </a:ext>
+              </a:extLst>
+            </p:cNvPr>
+            <p:cNvPicPr preferRelativeResize="0"/>
+            <p:nvPr/>
+          </p:nvPicPr>
+          <p:blipFill rotWithShape="1">
+            <a:blip r:embed="rId5">
+              <a:alphaModFix/>
+            </a:blip>
+            <a:srcRect/>
+            <a:stretch/>
+          </p:blipFill>
+          <p:spPr>
+            <a:xfrm>
+              <a:off x="8191500" y="1866900"/>
+              <a:ext cx="3429000" cy="4076700"/>
+            </a:xfrm>
+            <a:prstGeom prst="rect">
+              <a:avLst/>
+            </a:prstGeom>
+            <a:noFill/>
+            <a:ln>
+              <a:noFill/>
+            </a:ln>
+          </p:spPr>
+        </p:pic>
+        <p:sp>
+          <p:nvSpPr>
+            <p:cNvPr id="12" name="Google Shape;119;p16">
+              <a:extLst>
+                <a:ext uri="{FF2B5EF4-FFF2-40B4-BE49-F238E27FC236}">
+                  <a16:creationId xmlns:a16="http://schemas.microsoft.com/office/drawing/2014/main" id="{54C3823D-FB7E-4B6C-A016-D6E280DED718}"/>
+                </a:ext>
+              </a:extLst>
+            </p:cNvPr>
+            <p:cNvSpPr txBox="1"/>
+            <p:nvPr/>
+          </p:nvSpPr>
+          <p:spPr>
+            <a:xfrm>
+              <a:off x="895826" y="3133725"/>
+              <a:ext cx="2780347" cy="313441"/>
+            </a:xfrm>
+            <a:prstGeom prst="rect">
+              <a:avLst/>
+            </a:prstGeom>
+            <a:noFill/>
+            <a:ln>
+              <a:noFill/>
+            </a:ln>
+          </p:spPr>
+          <p:txBody>
+            <a:bodyPr spcFirstLastPara="1" wrap="square" lIns="0" tIns="0" rIns="0" bIns="0" anchor="t" anchorCtr="0">
+              <a:spAutoFit/>
+            </a:bodyPr>
+            <a:lstStyle/>
+            <a:p>
+              <a:pPr marL="0" marR="0" lvl="0" indent="0" algn="ctr" rtl="0">
+                <a:spcBef>
+                  <a:spcPts val="0"/>
+                </a:spcBef>
+                <a:spcAft>
+                  <a:spcPts val="0"/>
+                </a:spcAft>
+                <a:buNone/>
+              </a:pPr>
+              <a:r>
+                <a:rPr lang="en-US" sz="1500" b="0" i="0" u="none" strike="noStrike" cap="none" dirty="0">
+                  <a:solidFill>
+                    <a:srgbClr val="F8FAFC"/>
+                  </a:solidFill>
+                  <a:latin typeface="+mj-ea"/>
+                  <a:ea typeface="+mj-ea"/>
+                  <a:cs typeface="Poppins"/>
+                  <a:sym typeface="Poppins"/>
+                </a:rPr>
+                <a:t>셀 </a:t>
+              </a:r>
+              <a:r>
+                <a:rPr lang="en-US" sz="1500" b="0" i="0" u="none" strike="noStrike" cap="none" dirty="0" err="1">
+                  <a:solidFill>
+                    <a:srgbClr val="F8FAFC"/>
+                  </a:solidFill>
+                  <a:latin typeface="+mj-ea"/>
+                  <a:ea typeface="+mj-ea"/>
+                  <a:cs typeface="Poppins"/>
+                  <a:sym typeface="Poppins"/>
+                </a:rPr>
+                <a:t>상태</a:t>
+              </a:r>
+              <a:r>
+                <a:rPr lang="en-US" sz="1500" b="0" i="0" u="none" strike="noStrike" cap="none" dirty="0">
+                  <a:solidFill>
+                    <a:srgbClr val="F8FAFC"/>
+                  </a:solidFill>
+                  <a:latin typeface="+mj-ea"/>
+                  <a:ea typeface="+mj-ea"/>
+                  <a:cs typeface="Poppins"/>
+                  <a:sym typeface="Poppins"/>
+                </a:rPr>
+                <a:t> (Cell State)</a:t>
+              </a:r>
+              <a:endParaRPr sz="1500" dirty="0">
+                <a:latin typeface="+mj-ea"/>
+                <a:ea typeface="+mj-ea"/>
+              </a:endParaRPr>
+            </a:p>
+          </p:txBody>
+        </p:sp>
+        <p:sp>
+          <p:nvSpPr>
+            <p:cNvPr id="13" name="Google Shape;120;p16">
+              <a:extLst>
+                <a:ext uri="{FF2B5EF4-FFF2-40B4-BE49-F238E27FC236}">
+                  <a16:creationId xmlns:a16="http://schemas.microsoft.com/office/drawing/2014/main" id="{DEED61DF-E37F-48EC-9B42-DB9AD73F113F}"/>
+                </a:ext>
+              </a:extLst>
+            </p:cNvPr>
+            <p:cNvSpPr txBox="1"/>
+            <p:nvPr/>
+          </p:nvSpPr>
+          <p:spPr>
+            <a:xfrm>
+              <a:off x="962025" y="3694706"/>
+              <a:ext cx="2647950" cy="2173198"/>
+            </a:xfrm>
+            <a:prstGeom prst="rect">
+              <a:avLst/>
+            </a:prstGeom>
+            <a:noFill/>
+            <a:ln>
+              <a:noFill/>
+            </a:ln>
+          </p:spPr>
+          <p:txBody>
+            <a:bodyPr spcFirstLastPara="1" wrap="square" lIns="0" tIns="0" rIns="0" bIns="0" anchor="t" anchorCtr="0">
+              <a:spAutoFit/>
+            </a:bodyPr>
+            <a:lstStyle/>
+            <a:p>
+              <a:pPr marL="0" marR="0" lvl="0" indent="0" algn="ctr" rtl="0">
+                <a:lnSpc>
+                  <a:spcPct val="160000"/>
+                </a:lnSpc>
+                <a:spcBef>
+                  <a:spcPts val="0"/>
+                </a:spcBef>
+                <a:spcAft>
+                  <a:spcPts val="0"/>
+                </a:spcAft>
+                <a:buNone/>
+              </a:pPr>
+              <a:r>
+                <a:rPr lang="en-US" sz="1300" b="0" i="0" u="none" strike="noStrike" cap="none" dirty="0" err="1">
+                  <a:solidFill>
+                    <a:srgbClr val="CBD5E1"/>
+                  </a:solidFill>
+                  <a:latin typeface="+mj-ea"/>
+                  <a:ea typeface="+mj-ea"/>
+                  <a:cs typeface="Lato"/>
+                  <a:sym typeface="Lato"/>
+                </a:rPr>
+                <a:t>가중치</a:t>
+              </a:r>
+              <a:r>
+                <a:rPr lang="en-US" sz="1300" b="0" i="0" u="none" strike="noStrike" cap="none" dirty="0">
+                  <a:solidFill>
+                    <a:srgbClr val="CBD5E1"/>
+                  </a:solidFill>
+                  <a:latin typeface="+mj-ea"/>
+                  <a:ea typeface="+mj-ea"/>
+                  <a:cs typeface="Lato"/>
+                  <a:sym typeface="Lato"/>
+                </a:rPr>
+                <a:t> </a:t>
+              </a:r>
+              <a:r>
+                <a:rPr lang="en-US" sz="1300" b="0" i="0" u="none" strike="noStrike" cap="none" dirty="0" err="1">
+                  <a:solidFill>
+                    <a:srgbClr val="CBD5E1"/>
+                  </a:solidFill>
+                  <a:latin typeface="+mj-ea"/>
+                  <a:ea typeface="+mj-ea"/>
+                  <a:cs typeface="Lato"/>
+                  <a:sym typeface="Lato"/>
+                </a:rPr>
+                <a:t>곱셈</a:t>
+              </a:r>
+              <a:r>
+                <a:rPr lang="en-US" sz="1300" b="0" i="0" u="none" strike="noStrike" cap="none" dirty="0">
+                  <a:solidFill>
+                    <a:srgbClr val="CBD5E1"/>
+                  </a:solidFill>
+                  <a:latin typeface="+mj-ea"/>
+                  <a:ea typeface="+mj-ea"/>
+                  <a:cs typeface="Lato"/>
+                  <a:sym typeface="Lato"/>
+                </a:rPr>
+                <a:t> </a:t>
+              </a:r>
+              <a:r>
+                <a:rPr lang="en-US" sz="1300" b="0" i="0" u="none" strike="noStrike" cap="none" dirty="0" err="1">
+                  <a:solidFill>
+                    <a:srgbClr val="CBD5E1"/>
+                  </a:solidFill>
+                  <a:latin typeface="+mj-ea"/>
+                  <a:ea typeface="+mj-ea"/>
+                  <a:cs typeface="Lato"/>
+                  <a:sym typeface="Lato"/>
+                </a:rPr>
+                <a:t>없이</a:t>
+              </a:r>
+              <a:r>
+                <a:rPr lang="en-US" sz="1300" b="0" i="0" u="none" strike="noStrike" cap="none" dirty="0">
+                  <a:solidFill>
+                    <a:srgbClr val="CBD5E1"/>
+                  </a:solidFill>
+                  <a:latin typeface="+mj-ea"/>
+                  <a:ea typeface="+mj-ea"/>
+                  <a:cs typeface="Lato"/>
+                  <a:sym typeface="Lato"/>
+                </a:rPr>
+                <a:t> </a:t>
+              </a:r>
+              <a:r>
+                <a:rPr lang="en-US" sz="1300" b="0" i="0" u="none" strike="noStrike" cap="none" dirty="0" err="1">
+                  <a:solidFill>
+                    <a:srgbClr val="CBD5E1"/>
+                  </a:solidFill>
+                  <a:latin typeface="+mj-ea"/>
+                  <a:ea typeface="+mj-ea"/>
+                  <a:cs typeface="Lato"/>
+                  <a:sym typeface="Lato"/>
+                </a:rPr>
+                <a:t>직통으로</a:t>
+              </a:r>
+              <a:r>
+                <a:rPr lang="en-US" sz="1300" b="0" i="0" u="none" strike="noStrike" cap="none" dirty="0">
+                  <a:solidFill>
+                    <a:srgbClr val="CBD5E1"/>
+                  </a:solidFill>
+                  <a:latin typeface="+mj-ea"/>
+                  <a:ea typeface="+mj-ea"/>
+                  <a:cs typeface="Lato"/>
+                  <a:sym typeface="Lato"/>
+                </a:rPr>
+                <a:t> </a:t>
+              </a:r>
+              <a:r>
+                <a:rPr lang="en-US" sz="1300" b="0" i="0" u="none" strike="noStrike" cap="none" dirty="0" err="1">
+                  <a:solidFill>
+                    <a:srgbClr val="CBD5E1"/>
+                  </a:solidFill>
+                  <a:latin typeface="+mj-ea"/>
+                  <a:ea typeface="+mj-ea"/>
+                  <a:cs typeface="Lato"/>
+                  <a:sym typeface="Lato"/>
+                </a:rPr>
+                <a:t>흐르는</a:t>
+              </a:r>
+              <a:r>
+                <a:rPr lang="en-US" sz="1300" b="0" i="0" u="none" strike="noStrike" cap="none" dirty="0">
+                  <a:solidFill>
+                    <a:srgbClr val="CBD5E1"/>
+                  </a:solidFill>
+                  <a:latin typeface="+mj-ea"/>
+                  <a:ea typeface="+mj-ea"/>
+                  <a:cs typeface="Lato"/>
+                  <a:sym typeface="Lato"/>
+                </a:rPr>
+                <a:t> </a:t>
+              </a:r>
+              <a:r>
+                <a:rPr lang="en-US" sz="1300" b="0" i="0" u="none" strike="noStrike" cap="none" dirty="0" err="1">
+                  <a:solidFill>
+                    <a:srgbClr val="CBD5E1"/>
+                  </a:solidFill>
+                  <a:latin typeface="+mj-ea"/>
+                  <a:ea typeface="+mj-ea"/>
+                  <a:cs typeface="Lato"/>
+                  <a:sym typeface="Lato"/>
+                </a:rPr>
+                <a:t>고속도로를</a:t>
+              </a:r>
+              <a:r>
+                <a:rPr lang="en-US" sz="1300" b="0" i="0" u="none" strike="noStrike" cap="none" dirty="0">
+                  <a:solidFill>
+                    <a:srgbClr val="CBD5E1"/>
+                  </a:solidFill>
+                  <a:latin typeface="+mj-ea"/>
+                  <a:ea typeface="+mj-ea"/>
+                  <a:cs typeface="Lato"/>
+                  <a:sym typeface="Lato"/>
+                </a:rPr>
+                <a:t> </a:t>
+              </a:r>
+              <a:r>
+                <a:rPr lang="en-US" sz="1300" b="0" i="0" u="none" strike="noStrike" cap="none" dirty="0" err="1">
+                  <a:solidFill>
+                    <a:srgbClr val="CBD5E1"/>
+                  </a:solidFill>
+                  <a:latin typeface="+mj-ea"/>
+                  <a:ea typeface="+mj-ea"/>
+                  <a:cs typeface="Lato"/>
+                  <a:sym typeface="Lato"/>
+                </a:rPr>
+                <a:t>뚫어</a:t>
+              </a:r>
+              <a:r>
+                <a:rPr lang="en-US" sz="1300" b="0" i="0" u="none" strike="noStrike" cap="none" dirty="0">
+                  <a:solidFill>
+                    <a:srgbClr val="CBD5E1"/>
+                  </a:solidFill>
+                  <a:latin typeface="+mj-ea"/>
+                  <a:ea typeface="+mj-ea"/>
+                  <a:cs typeface="Lato"/>
+                  <a:sym typeface="Lato"/>
+                </a:rPr>
+                <a:t>, </a:t>
+              </a:r>
+              <a:r>
+                <a:rPr lang="en-US" sz="1300" b="0" i="0" u="none" strike="noStrike" cap="none" dirty="0" err="1">
+                  <a:solidFill>
+                    <a:srgbClr val="CBD5E1"/>
+                  </a:solidFill>
+                  <a:latin typeface="+mj-ea"/>
+                  <a:ea typeface="+mj-ea"/>
+                  <a:cs typeface="Lato"/>
+                  <a:sym typeface="Lato"/>
+                </a:rPr>
+                <a:t>과거의</a:t>
+              </a:r>
+              <a:r>
+                <a:rPr lang="en-US" sz="1300" b="0" i="0" u="none" strike="noStrike" cap="none" dirty="0">
+                  <a:solidFill>
+                    <a:srgbClr val="CBD5E1"/>
+                  </a:solidFill>
+                  <a:latin typeface="+mj-ea"/>
+                  <a:ea typeface="+mj-ea"/>
+                  <a:cs typeface="Lato"/>
+                  <a:sym typeface="Lato"/>
+                </a:rPr>
+                <a:t> </a:t>
+              </a:r>
+              <a:r>
+                <a:rPr lang="en-US" sz="1300" b="0" i="0" u="none" strike="noStrike" cap="none" dirty="0" err="1">
+                  <a:solidFill>
+                    <a:srgbClr val="CBD5E1"/>
+                  </a:solidFill>
+                  <a:latin typeface="+mj-ea"/>
+                  <a:ea typeface="+mj-ea"/>
+                  <a:cs typeface="Lato"/>
+                  <a:sym typeface="Lato"/>
+                </a:rPr>
+                <a:t>데이터</a:t>
+              </a:r>
+              <a:r>
+                <a:rPr lang="en-US" sz="1300" b="0" i="0" u="none" strike="noStrike" cap="none" dirty="0">
+                  <a:solidFill>
+                    <a:srgbClr val="CBD5E1"/>
+                  </a:solidFill>
+                  <a:latin typeface="+mj-ea"/>
+                  <a:ea typeface="+mj-ea"/>
+                  <a:cs typeface="Lato"/>
+                  <a:sym typeface="Lato"/>
+                </a:rPr>
+                <a:t>(</a:t>
+              </a:r>
+              <a:r>
+                <a:rPr lang="en-US" sz="1300" b="0" i="0" u="none" strike="noStrike" cap="none" dirty="0" err="1">
+                  <a:solidFill>
+                    <a:srgbClr val="CBD5E1"/>
+                  </a:solidFill>
+                  <a:latin typeface="+mj-ea"/>
+                  <a:ea typeface="+mj-ea"/>
+                  <a:cs typeface="Lato"/>
+                  <a:sym typeface="Lato"/>
+                </a:rPr>
+                <a:t>장기</a:t>
+              </a:r>
+              <a:r>
+                <a:rPr lang="en-US" sz="1300" b="0" i="0" u="none" strike="noStrike" cap="none" dirty="0">
+                  <a:solidFill>
+                    <a:srgbClr val="CBD5E1"/>
+                  </a:solidFill>
+                  <a:latin typeface="+mj-ea"/>
+                  <a:ea typeface="+mj-ea"/>
+                  <a:cs typeface="Lato"/>
+                  <a:sym typeface="Lato"/>
+                </a:rPr>
+                <a:t> </a:t>
+              </a:r>
+              <a:r>
+                <a:rPr lang="en-US" sz="1300" b="0" i="0" u="none" strike="noStrike" cap="none" dirty="0" err="1">
+                  <a:solidFill>
+                    <a:srgbClr val="CBD5E1"/>
+                  </a:solidFill>
+                  <a:latin typeface="+mj-ea"/>
+                  <a:ea typeface="+mj-ea"/>
+                  <a:cs typeface="Lato"/>
+                  <a:sym typeface="Lato"/>
+                </a:rPr>
+                <a:t>기억</a:t>
+              </a:r>
+              <a:r>
+                <a:rPr lang="en-US" sz="1300" b="0" i="0" u="none" strike="noStrike" cap="none" dirty="0">
+                  <a:solidFill>
+                    <a:srgbClr val="CBD5E1"/>
+                  </a:solidFill>
+                  <a:latin typeface="+mj-ea"/>
+                  <a:ea typeface="+mj-ea"/>
+                  <a:cs typeface="Lato"/>
+                  <a:sym typeface="Lato"/>
+                </a:rPr>
+                <a:t>)가 </a:t>
+              </a:r>
+              <a:r>
+                <a:rPr lang="en-US" sz="1300" b="0" i="0" u="none" strike="noStrike" cap="none" dirty="0" err="1">
+                  <a:solidFill>
+                    <a:srgbClr val="CBD5E1"/>
+                  </a:solidFill>
+                  <a:latin typeface="+mj-ea"/>
+                  <a:ea typeface="+mj-ea"/>
+                  <a:cs typeface="Lato"/>
+                  <a:sym typeface="Lato"/>
+                </a:rPr>
+                <a:t>훼손되지</a:t>
+              </a:r>
+              <a:r>
+                <a:rPr lang="en-US" sz="1300" b="0" i="0" u="none" strike="noStrike" cap="none" dirty="0">
+                  <a:solidFill>
+                    <a:srgbClr val="CBD5E1"/>
+                  </a:solidFill>
+                  <a:latin typeface="+mj-ea"/>
+                  <a:ea typeface="+mj-ea"/>
+                  <a:cs typeface="Lato"/>
+                  <a:sym typeface="Lato"/>
+                </a:rPr>
+                <a:t> </a:t>
+              </a:r>
+              <a:r>
+                <a:rPr lang="en-US" sz="1300" b="0" i="0" u="none" strike="noStrike" cap="none" dirty="0" err="1">
+                  <a:solidFill>
+                    <a:srgbClr val="CBD5E1"/>
+                  </a:solidFill>
+                  <a:latin typeface="+mj-ea"/>
+                  <a:ea typeface="+mj-ea"/>
+                  <a:cs typeface="Lato"/>
+                  <a:sym typeface="Lato"/>
+                </a:rPr>
+                <a:t>않고</a:t>
+              </a:r>
+              <a:r>
+                <a:rPr lang="en-US" sz="1300" b="0" i="0" u="none" strike="noStrike" cap="none" dirty="0">
+                  <a:solidFill>
+                    <a:srgbClr val="CBD5E1"/>
+                  </a:solidFill>
+                  <a:latin typeface="+mj-ea"/>
+                  <a:ea typeface="+mj-ea"/>
+                  <a:cs typeface="Lato"/>
+                  <a:sym typeface="Lato"/>
+                </a:rPr>
+                <a:t> </a:t>
+              </a:r>
+              <a:r>
+                <a:rPr lang="en-US" sz="1300" b="0" i="0" u="none" strike="noStrike" cap="none" dirty="0" err="1">
+                  <a:solidFill>
+                    <a:srgbClr val="CBD5E1"/>
+                  </a:solidFill>
+                  <a:latin typeface="+mj-ea"/>
+                  <a:ea typeface="+mj-ea"/>
+                  <a:cs typeface="Lato"/>
+                  <a:sym typeface="Lato"/>
+                </a:rPr>
+                <a:t>보존됩니다</a:t>
+              </a:r>
+              <a:r>
+                <a:rPr lang="en-US" sz="1300" b="0" i="0" u="none" strike="noStrike" cap="none" dirty="0">
+                  <a:solidFill>
+                    <a:srgbClr val="CBD5E1"/>
+                  </a:solidFill>
+                  <a:latin typeface="+mj-ea"/>
+                  <a:ea typeface="+mj-ea"/>
+                  <a:cs typeface="Lato"/>
+                  <a:sym typeface="Lato"/>
+                </a:rPr>
+                <a:t>.</a:t>
+              </a:r>
+              <a:endParaRPr sz="1300" dirty="0">
+                <a:latin typeface="+mj-ea"/>
+                <a:ea typeface="+mj-ea"/>
+              </a:endParaRPr>
+            </a:p>
+          </p:txBody>
+        </p:sp>
+        <p:sp>
+          <p:nvSpPr>
+            <p:cNvPr id="14" name="Google Shape;121;p16">
+              <a:extLst>
+                <a:ext uri="{FF2B5EF4-FFF2-40B4-BE49-F238E27FC236}">
+                  <a16:creationId xmlns:a16="http://schemas.microsoft.com/office/drawing/2014/main" id="{2907630F-EE32-400A-810C-BE5BC595F032}"/>
+                </a:ext>
+              </a:extLst>
+            </p:cNvPr>
+            <p:cNvSpPr txBox="1"/>
+            <p:nvPr/>
+          </p:nvSpPr>
+          <p:spPr>
+            <a:xfrm>
+              <a:off x="4965858" y="3133725"/>
+              <a:ext cx="2260282" cy="313441"/>
+            </a:xfrm>
+            <a:prstGeom prst="rect">
+              <a:avLst/>
+            </a:prstGeom>
+            <a:noFill/>
+            <a:ln>
+              <a:noFill/>
+            </a:ln>
+          </p:spPr>
+          <p:txBody>
+            <a:bodyPr spcFirstLastPara="1" wrap="square" lIns="0" tIns="0" rIns="0" bIns="0" anchor="t" anchorCtr="0">
+              <a:spAutoFit/>
+            </a:bodyPr>
+            <a:lstStyle/>
+            <a:p>
+              <a:pPr marL="0" marR="0" lvl="0" indent="0" algn="ctr" rtl="0">
+                <a:spcBef>
+                  <a:spcPts val="0"/>
+                </a:spcBef>
+                <a:spcAft>
+                  <a:spcPts val="0"/>
+                </a:spcAft>
+                <a:buNone/>
+              </a:pPr>
+              <a:r>
+                <a:rPr lang="en-US" sz="1500" b="0" i="0" u="none" strike="noStrike" cap="none" dirty="0" err="1">
+                  <a:solidFill>
+                    <a:srgbClr val="F8FAFC"/>
+                  </a:solidFill>
+                  <a:latin typeface="+mj-ea"/>
+                  <a:ea typeface="+mj-ea"/>
+                  <a:cs typeface="Poppins"/>
+                  <a:sym typeface="Poppins"/>
+                </a:rPr>
+                <a:t>게이트</a:t>
+              </a:r>
+              <a:r>
+                <a:rPr lang="en-US" sz="1500" b="0" i="0" u="none" strike="noStrike" cap="none" dirty="0">
+                  <a:solidFill>
+                    <a:srgbClr val="F8FAFC"/>
+                  </a:solidFill>
+                  <a:latin typeface="+mj-ea"/>
+                  <a:ea typeface="+mj-ea"/>
+                  <a:cs typeface="Poppins"/>
+                  <a:sym typeface="Poppins"/>
+                </a:rPr>
+                <a:t> (Gates)</a:t>
+              </a:r>
+              <a:endParaRPr sz="1500" dirty="0">
+                <a:latin typeface="+mj-ea"/>
+                <a:ea typeface="+mj-ea"/>
+              </a:endParaRPr>
+            </a:p>
+          </p:txBody>
+        </p:sp>
+        <p:sp>
+          <p:nvSpPr>
+            <p:cNvPr id="15" name="Google Shape;122;p16">
+              <a:extLst>
+                <a:ext uri="{FF2B5EF4-FFF2-40B4-BE49-F238E27FC236}">
+                  <a16:creationId xmlns:a16="http://schemas.microsoft.com/office/drawing/2014/main" id="{8F69F666-130F-4664-9BB7-99043C852D17}"/>
+                </a:ext>
+              </a:extLst>
+            </p:cNvPr>
+            <p:cNvSpPr txBox="1"/>
+            <p:nvPr/>
+          </p:nvSpPr>
+          <p:spPr>
+            <a:xfrm>
+              <a:off x="4772025" y="3733800"/>
+              <a:ext cx="2647950" cy="2173198"/>
+            </a:xfrm>
+            <a:prstGeom prst="rect">
+              <a:avLst/>
+            </a:prstGeom>
+            <a:noFill/>
+            <a:ln>
+              <a:noFill/>
+            </a:ln>
+          </p:spPr>
+          <p:txBody>
+            <a:bodyPr spcFirstLastPara="1" wrap="square" lIns="0" tIns="0" rIns="0" bIns="0" anchor="t" anchorCtr="0">
+              <a:spAutoFit/>
+            </a:bodyPr>
+            <a:lstStyle/>
+            <a:p>
+              <a:pPr marL="0" marR="0" lvl="0" indent="0" algn="ctr" rtl="0">
+                <a:lnSpc>
+                  <a:spcPct val="160000"/>
+                </a:lnSpc>
+                <a:spcBef>
+                  <a:spcPts val="0"/>
+                </a:spcBef>
+                <a:spcAft>
+                  <a:spcPts val="0"/>
+                </a:spcAft>
+                <a:buNone/>
+              </a:pPr>
+              <a:r>
+                <a:rPr lang="en-US" sz="1300" b="0" i="0" u="none" strike="noStrike" cap="none">
+                  <a:solidFill>
+                    <a:srgbClr val="CBD5E1"/>
+                  </a:solidFill>
+                  <a:latin typeface="+mj-ea"/>
+                  <a:ea typeface="+mj-ea"/>
+                  <a:cs typeface="Lato"/>
+                  <a:sym typeface="Lato"/>
+                </a:rPr>
+                <a:t>정보를 무조건 받아들이는 대신, 3개의 문(망각, 입력, 출력)이 정보의 흐름을 똑똑하게 통제하고 걸러냅니다.</a:t>
+              </a:r>
+              <a:endParaRPr sz="1300">
+                <a:latin typeface="+mj-ea"/>
+                <a:ea typeface="+mj-ea"/>
+              </a:endParaRPr>
+            </a:p>
+          </p:txBody>
+        </p:sp>
+        <p:sp>
+          <p:nvSpPr>
+            <p:cNvPr id="16" name="Google Shape;123;p16">
+              <a:extLst>
+                <a:ext uri="{FF2B5EF4-FFF2-40B4-BE49-F238E27FC236}">
+                  <a16:creationId xmlns:a16="http://schemas.microsoft.com/office/drawing/2014/main" id="{82833DBA-615B-4BC6-BD98-1A96CF8E4721}"/>
+                </a:ext>
+              </a:extLst>
+            </p:cNvPr>
+            <p:cNvSpPr txBox="1"/>
+            <p:nvPr/>
+          </p:nvSpPr>
+          <p:spPr>
+            <a:xfrm>
+              <a:off x="8695849" y="3133725"/>
+              <a:ext cx="2420302" cy="313441"/>
+            </a:xfrm>
+            <a:prstGeom prst="rect">
+              <a:avLst/>
+            </a:prstGeom>
+            <a:noFill/>
+            <a:ln>
+              <a:noFill/>
+            </a:ln>
+          </p:spPr>
+          <p:txBody>
+            <a:bodyPr spcFirstLastPara="1" wrap="square" lIns="0" tIns="0" rIns="0" bIns="0" anchor="t" anchorCtr="0">
+              <a:spAutoFit/>
+            </a:bodyPr>
+            <a:lstStyle/>
+            <a:p>
+              <a:pPr marL="0" marR="0" lvl="0" indent="0" algn="ctr" rtl="0">
+                <a:spcBef>
+                  <a:spcPts val="0"/>
+                </a:spcBef>
+                <a:spcAft>
+                  <a:spcPts val="0"/>
+                </a:spcAft>
+                <a:buNone/>
+              </a:pPr>
+              <a:r>
+                <a:rPr lang="en-US" sz="1500" b="0" i="0" u="none" strike="noStrike" cap="none" dirty="0" err="1">
+                  <a:solidFill>
+                    <a:srgbClr val="F8FAFC"/>
+                  </a:solidFill>
+                  <a:latin typeface="+mj-ea"/>
+                  <a:ea typeface="+mj-ea"/>
+                  <a:cs typeface="Poppins"/>
+                  <a:sym typeface="Poppins"/>
+                </a:rPr>
+                <a:t>장기</a:t>
+              </a:r>
+              <a:r>
+                <a:rPr lang="en-US" sz="1500" b="0" i="0" u="none" strike="noStrike" cap="none" dirty="0">
+                  <a:solidFill>
+                    <a:srgbClr val="F8FAFC"/>
+                  </a:solidFill>
+                  <a:latin typeface="+mj-ea"/>
+                  <a:ea typeface="+mj-ea"/>
+                  <a:cs typeface="Poppins"/>
+                  <a:sym typeface="Poppins"/>
+                </a:rPr>
+                <a:t> </a:t>
+              </a:r>
+              <a:r>
+                <a:rPr lang="en-US" sz="1500" b="0" i="0" u="none" strike="noStrike" cap="none" dirty="0" err="1">
+                  <a:solidFill>
+                    <a:srgbClr val="F8FAFC"/>
+                  </a:solidFill>
+                  <a:latin typeface="+mj-ea"/>
+                  <a:ea typeface="+mj-ea"/>
+                  <a:cs typeface="Poppins"/>
+                  <a:sym typeface="Poppins"/>
+                </a:rPr>
+                <a:t>의존성</a:t>
+              </a:r>
+              <a:r>
+                <a:rPr lang="en-US" sz="1500" b="0" i="0" u="none" strike="noStrike" cap="none" dirty="0">
+                  <a:solidFill>
+                    <a:srgbClr val="F8FAFC"/>
+                  </a:solidFill>
+                  <a:latin typeface="+mj-ea"/>
+                  <a:ea typeface="+mj-ea"/>
+                  <a:cs typeface="Poppins"/>
+                  <a:sym typeface="Poppins"/>
+                </a:rPr>
+                <a:t> </a:t>
+              </a:r>
+              <a:r>
+                <a:rPr lang="en-US" sz="1500" b="0" i="0" u="none" strike="noStrike" cap="none" dirty="0" err="1">
+                  <a:solidFill>
+                    <a:srgbClr val="F8FAFC"/>
+                  </a:solidFill>
+                  <a:latin typeface="+mj-ea"/>
+                  <a:ea typeface="+mj-ea"/>
+                  <a:cs typeface="Poppins"/>
+                  <a:sym typeface="Poppins"/>
+                </a:rPr>
+                <a:t>해결</a:t>
+              </a:r>
+              <a:endParaRPr sz="1500" dirty="0">
+                <a:latin typeface="+mj-ea"/>
+                <a:ea typeface="+mj-ea"/>
+              </a:endParaRPr>
+            </a:p>
+          </p:txBody>
+        </p:sp>
+        <p:sp>
+          <p:nvSpPr>
+            <p:cNvPr id="17" name="Google Shape;124;p16">
+              <a:extLst>
+                <a:ext uri="{FF2B5EF4-FFF2-40B4-BE49-F238E27FC236}">
+                  <a16:creationId xmlns:a16="http://schemas.microsoft.com/office/drawing/2014/main" id="{C34DB9F4-DE2E-4740-9C06-D92C56704407}"/>
+                </a:ext>
+              </a:extLst>
+            </p:cNvPr>
+            <p:cNvSpPr txBox="1"/>
+            <p:nvPr/>
+          </p:nvSpPr>
+          <p:spPr>
+            <a:xfrm>
+              <a:off x="8582025" y="3733800"/>
+              <a:ext cx="2647950" cy="2173198"/>
+            </a:xfrm>
+            <a:prstGeom prst="rect">
+              <a:avLst/>
+            </a:prstGeom>
+            <a:noFill/>
+            <a:ln>
+              <a:noFill/>
+            </a:ln>
+          </p:spPr>
+          <p:txBody>
+            <a:bodyPr spcFirstLastPara="1" wrap="square" lIns="0" tIns="0" rIns="0" bIns="0" anchor="t" anchorCtr="0">
+              <a:spAutoFit/>
+            </a:bodyPr>
+            <a:lstStyle/>
+            <a:p>
+              <a:pPr marL="0" marR="0" lvl="0" indent="0" algn="ctr" rtl="0">
+                <a:lnSpc>
+                  <a:spcPct val="160000"/>
+                </a:lnSpc>
+                <a:spcBef>
+                  <a:spcPts val="0"/>
+                </a:spcBef>
+                <a:spcAft>
+                  <a:spcPts val="0"/>
+                </a:spcAft>
+                <a:buNone/>
+              </a:pPr>
+              <a:r>
+                <a:rPr lang="en-US" sz="1300" b="0" i="0" u="none" strike="noStrike" cap="none">
+                  <a:solidFill>
+                    <a:srgbClr val="CBD5E1"/>
+                  </a:solidFill>
+                  <a:latin typeface="+mj-ea"/>
+                  <a:ea typeface="+mj-ea"/>
+                  <a:cs typeface="Lato"/>
+                  <a:sym typeface="Lato"/>
+                </a:rPr>
+                <a:t>과거의 패턴이 끊기지 않고 오래 유지되어, 수십 일 전의 시계열 데이터도 오늘을 예측하는 데 활용될 수 있습니다.</a:t>
+              </a:r>
+              <a:endParaRPr sz="1300">
+                <a:latin typeface="+mj-ea"/>
+                <a:ea typeface="+mj-ea"/>
+              </a:endParaRPr>
+            </a:p>
+          </p:txBody>
+        </p:sp>
+        <p:pic>
+          <p:nvPicPr>
+            <p:cNvPr id="18" name="Google Shape;125;p16" descr="image.png">
+              <a:extLst>
+                <a:ext uri="{FF2B5EF4-FFF2-40B4-BE49-F238E27FC236}">
+                  <a16:creationId xmlns:a16="http://schemas.microsoft.com/office/drawing/2014/main" id="{62449BAD-340E-4099-A0FD-87E6D375F4DC}"/>
+                </a:ext>
+              </a:extLst>
+            </p:cNvPr>
+            <p:cNvPicPr preferRelativeResize="0"/>
+            <p:nvPr/>
+          </p:nvPicPr>
+          <p:blipFill rotWithShape="1">
+            <a:blip r:embed="rId6">
+              <a:alphaModFix/>
+            </a:blip>
+            <a:srcRect/>
+            <a:stretch/>
+          </p:blipFill>
+          <p:spPr>
+            <a:xfrm>
+              <a:off x="1985962" y="2314575"/>
+              <a:ext cx="600075" cy="533400"/>
+            </a:xfrm>
+            <a:prstGeom prst="rect">
+              <a:avLst/>
+            </a:prstGeom>
+            <a:noFill/>
+            <a:ln>
+              <a:noFill/>
+            </a:ln>
+          </p:spPr>
+        </p:pic>
+        <p:pic>
+          <p:nvPicPr>
+            <p:cNvPr id="19" name="Google Shape;126;p16" descr="image.png">
+              <a:extLst>
+                <a:ext uri="{FF2B5EF4-FFF2-40B4-BE49-F238E27FC236}">
+                  <a16:creationId xmlns:a16="http://schemas.microsoft.com/office/drawing/2014/main" id="{A4F29711-C397-4CC5-BBCE-0EE381549A9F}"/>
+                </a:ext>
+              </a:extLst>
+            </p:cNvPr>
+            <p:cNvPicPr preferRelativeResize="0"/>
+            <p:nvPr/>
+          </p:nvPicPr>
+          <p:blipFill rotWithShape="1">
+            <a:blip r:embed="rId7">
+              <a:alphaModFix/>
+            </a:blip>
+            <a:srcRect/>
+            <a:stretch/>
+          </p:blipFill>
+          <p:spPr>
+            <a:xfrm>
+              <a:off x="5795962" y="2314575"/>
+              <a:ext cx="600075" cy="533400"/>
+            </a:xfrm>
+            <a:prstGeom prst="rect">
+              <a:avLst/>
+            </a:prstGeom>
+            <a:noFill/>
+            <a:ln>
+              <a:noFill/>
+            </a:ln>
+          </p:spPr>
+        </p:pic>
+        <p:pic>
+          <p:nvPicPr>
+            <p:cNvPr id="20" name="Google Shape;127;p16" descr="image.png">
+              <a:extLst>
+                <a:ext uri="{FF2B5EF4-FFF2-40B4-BE49-F238E27FC236}">
+                  <a16:creationId xmlns:a16="http://schemas.microsoft.com/office/drawing/2014/main" id="{7A2B9191-7159-4869-90EB-CF0A44E0A356}"/>
+                </a:ext>
+              </a:extLst>
+            </p:cNvPr>
+            <p:cNvPicPr preferRelativeResize="0"/>
+            <p:nvPr/>
+          </p:nvPicPr>
+          <p:blipFill rotWithShape="1">
+            <a:blip r:embed="rId8">
+              <a:alphaModFix/>
+            </a:blip>
+            <a:srcRect/>
+            <a:stretch/>
+          </p:blipFill>
+          <p:spPr>
+            <a:xfrm>
+              <a:off x="9639300" y="2314575"/>
+              <a:ext cx="533400" cy="533400"/>
+            </a:xfrm>
+            <a:prstGeom prst="rect">
+              <a:avLst/>
+            </a:prstGeom>
+            <a:noFill/>
+            <a:ln>
+              <a:noFill/>
+            </a:ln>
+          </p:spPr>
+        </p:pic>
+      </p:grpSp>
+    </p:spTree>
+    <p:extLst>
+      <p:ext uri="{BB962C8B-B14F-4D97-AF65-F5344CB8AC3E}">
+        <p14:creationId xmlns:p14="http://schemas.microsoft.com/office/powerpoint/2010/main" val="3118765009"/>
+      </p:ext>
+    </p:extLst>
+  </p:cSld>
+  <p:clrMapOvr>
+    <a:masterClrMapping/>
+  </p:clrMapOvr>
+</p:sld>
+</file>
+
+<file path=ppt/slides/slide28.xml><?xml version="1.0" encoding="utf-8"?>
+<p:sld xmlns:a="http://schemas.openxmlformats.org/drawingml/2006/main" xmlns:r="http://schemas.openxmlformats.org/officeDocument/2006/relationships" xmlns:p="http://schemas.openxmlformats.org/presentationml/2006/main">
+  <p:cSld>
+    <p:spTree>
+      <p:nvGrpSpPr>
+        <p:cNvPr id="1" name=""/>
+        <p:cNvGrpSpPr/>
+        <p:nvPr/>
+      </p:nvGrpSpPr>
+      <p:grpSpPr>
+        <a:xfrm>
+          <a:off x="0" y="0"/>
+          <a:ext cx="0" cy="0"/>
+          <a:chOff x="0" y="0"/>
+          <a:chExt cx="0" cy="0"/>
+        </a:xfrm>
+      </p:grpSpPr>
+      <p:sp>
+        <p:nvSpPr>
+          <p:cNvPr id="3" name="타원 2"/>
+          <p:cNvSpPr/>
+          <p:nvPr/>
+        </p:nvSpPr>
+        <p:spPr>
+          <a:xfrm>
+            <a:off x="4067944" y="74100"/>
+            <a:ext cx="936104" cy="936104"/>
+          </a:xfrm>
+          <a:prstGeom prst="ellipse">
+            <a:avLst/>
+          </a:prstGeom>
+          <a:solidFill>
+            <a:schemeClr val="tx2">
+              <a:lumMod val="75000"/>
+            </a:schemeClr>
+          </a:solidFill>
+          <a:ln>
+            <a:noFill/>
+          </a:ln>
+        </p:spPr>
+        <p:style>
+          <a:lnRef idx="2">
+            <a:schemeClr val="accent1">
+              <a:shade val="50000"/>
+            </a:schemeClr>
+          </a:lnRef>
+          <a:fillRef idx="1">
+            <a:schemeClr val="accent1"/>
+          </a:fillRef>
+          <a:effectRef idx="0">
+            <a:schemeClr val="accent1"/>
+          </a:effectRef>
+          <a:fontRef idx="minor">
+            <a:schemeClr val="lt1"/>
+          </a:fontRef>
+        </p:style>
+        <p:txBody>
+          <a:bodyPr rtlCol="0" anchor="ctr"/>
+          <a:lstStyle/>
+          <a:p>
+            <a:pPr algn="ctr"/>
+            <a:endParaRPr lang="ko-KR" altLang="en-US"/>
+          </a:p>
+        </p:txBody>
+      </p:sp>
+      <p:sp>
+        <p:nvSpPr>
+          <p:cNvPr id="9" name="TextBox 8"/>
+          <p:cNvSpPr txBox="1"/>
+          <p:nvPr/>
+        </p:nvSpPr>
+        <p:spPr>
+          <a:xfrm>
+            <a:off x="3995936" y="479095"/>
+            <a:ext cx="1080120" cy="461665"/>
+          </a:xfrm>
+          <a:prstGeom prst="rect">
+            <a:avLst/>
+          </a:prstGeom>
+          <a:noFill/>
+        </p:spPr>
+        <p:txBody>
+          <a:bodyPr wrap="square" rtlCol="0">
+            <a:spAutoFit/>
+          </a:bodyPr>
+          <a:lstStyle/>
+          <a:p>
+            <a:pPr algn="ctr"/>
+            <a:r>
+              <a:rPr lang="en-US" altLang="ko-KR" sz="2400" dirty="0">
+                <a:solidFill>
+                  <a:schemeClr val="bg1"/>
+                </a:solidFill>
+                <a:latin typeface="HY헤드라인M" pitchFamily="18" charset="-127"/>
+                <a:ea typeface="HY헤드라인M" pitchFamily="18" charset="-127"/>
+              </a:rPr>
+              <a:t>01</a:t>
+            </a:r>
+            <a:endParaRPr lang="ko-KR" altLang="en-US" sz="2400" dirty="0">
+              <a:solidFill>
+                <a:schemeClr val="bg1"/>
+              </a:solidFill>
+              <a:latin typeface="HY헤드라인M" pitchFamily="18" charset="-127"/>
+              <a:ea typeface="HY헤드라인M" pitchFamily="18" charset="-127"/>
+            </a:endParaRPr>
+          </a:p>
+        </p:txBody>
+      </p:sp>
+      <p:sp>
+        <p:nvSpPr>
+          <p:cNvPr id="4" name="TextBox 3"/>
+          <p:cNvSpPr txBox="1"/>
+          <p:nvPr/>
+        </p:nvSpPr>
+        <p:spPr>
+          <a:xfrm>
+            <a:off x="971600" y="1700808"/>
+            <a:ext cx="7200800" cy="1700787"/>
+          </a:xfrm>
+          <a:prstGeom prst="rect">
+            <a:avLst/>
+          </a:prstGeom>
+          <a:noFill/>
+        </p:spPr>
+        <p:txBody>
+          <a:bodyPr wrap="square" rtlCol="0">
+            <a:spAutoFit/>
+          </a:bodyPr>
+          <a:lstStyle/>
+          <a:p>
+            <a:pPr marL="285750" indent="-285750">
+              <a:lnSpc>
+                <a:spcPct val="150000"/>
+              </a:lnSpc>
+              <a:buFont typeface="Arial" panose="020B0604020202020204" pitchFamily="34" charset="0"/>
+              <a:buChar char="•"/>
+            </a:pPr>
+            <a:r>
+              <a:rPr lang="en-US" altLang="ko-KR" dirty="0"/>
+              <a:t>LSTM</a:t>
+            </a:r>
+            <a:r>
+              <a:rPr lang="ko-KR" altLang="en-US" dirty="0"/>
+              <a:t>의 핵심은 상단을 가로지르는 </a:t>
+            </a:r>
+            <a:r>
+              <a:rPr lang="en-US" altLang="ko-KR" dirty="0"/>
+              <a:t>'</a:t>
+            </a:r>
+            <a:r>
+              <a:rPr lang="ko-KR" altLang="en-US" dirty="0"/>
+              <a:t>셀 상태</a:t>
+            </a:r>
+            <a:r>
+              <a:rPr lang="en-US" altLang="ko-KR" dirty="0"/>
+              <a:t>(Cell State)'</a:t>
+            </a:r>
+            <a:r>
+              <a:rPr lang="ko-KR" altLang="en-US" dirty="0"/>
+              <a:t>입니다</a:t>
+            </a:r>
+            <a:r>
+              <a:rPr lang="en-US" altLang="ko-KR" dirty="0"/>
+              <a:t>. </a:t>
+            </a:r>
+            <a:r>
+              <a:rPr lang="ko-KR" altLang="en-US" dirty="0"/>
+              <a:t>기존 </a:t>
+            </a:r>
+            <a:r>
+              <a:rPr lang="en-US" altLang="ko-KR" dirty="0"/>
+              <a:t>RNN</a:t>
+            </a:r>
+            <a:r>
+              <a:rPr lang="ko-KR" altLang="en-US" dirty="0"/>
+              <a:t>이 매번 가중치 행렬을 복잡하게 곱하며 정보가 손실된 것과 다르게</a:t>
+            </a:r>
+            <a:r>
+              <a:rPr lang="en-US" altLang="ko-KR" dirty="0"/>
+              <a:t>, </a:t>
+            </a:r>
+            <a:r>
+              <a:rPr lang="ko-KR" altLang="en-US" dirty="0"/>
+              <a:t>셀 상태는 아주 단순한 선형적인 덧셈과 곱셈 연산만을 수행</a:t>
+            </a:r>
+            <a:endParaRPr lang="en-US" altLang="ko-KR" dirty="0"/>
+          </a:p>
+        </p:txBody>
+      </p:sp>
+      <p:sp>
+        <p:nvSpPr>
+          <p:cNvPr id="6" name="TextBox 5"/>
+          <p:cNvSpPr txBox="1"/>
+          <p:nvPr/>
+        </p:nvSpPr>
+        <p:spPr>
+          <a:xfrm>
+            <a:off x="539552" y="1065096"/>
+            <a:ext cx="7992888" cy="446276"/>
+          </a:xfrm>
+          <a:prstGeom prst="rect">
+            <a:avLst/>
+          </a:prstGeom>
+          <a:noFill/>
+        </p:spPr>
+        <p:txBody>
+          <a:bodyPr wrap="square" rtlCol="0">
+            <a:spAutoFit/>
+          </a:bodyPr>
+          <a:lstStyle/>
+          <a:p>
+            <a:r>
+              <a:rPr lang="ko-KR" altLang="en-US" sz="2300" dirty="0"/>
+              <a:t>컨베이어 벨트</a:t>
+            </a:r>
+            <a:r>
+              <a:rPr lang="en-US" altLang="ko-KR" sz="2300" dirty="0"/>
+              <a:t>: </a:t>
+            </a:r>
+            <a:r>
+              <a:rPr lang="ko-KR" altLang="en-US" sz="2300" dirty="0"/>
+              <a:t>셀 상태</a:t>
+            </a:r>
+          </a:p>
+        </p:txBody>
+      </p:sp>
+      <p:pic>
+        <p:nvPicPr>
+          <p:cNvPr id="7" name="Google Shape;134;p17" descr="image.png">
+            <a:extLst>
+              <a:ext uri="{FF2B5EF4-FFF2-40B4-BE49-F238E27FC236}">
+                <a16:creationId xmlns:a16="http://schemas.microsoft.com/office/drawing/2014/main" id="{B660447A-E483-4BC4-BC66-CF27A1AED97F}"/>
+              </a:ext>
+            </a:extLst>
+          </p:cNvPr>
+          <p:cNvPicPr preferRelativeResize="0"/>
+          <p:nvPr/>
+        </p:nvPicPr>
+        <p:blipFill rotWithShape="1">
+          <a:blip r:embed="rId3">
+            <a:alphaModFix/>
+          </a:blip>
+          <a:srcRect/>
+          <a:stretch/>
+        </p:blipFill>
+        <p:spPr>
+          <a:xfrm>
+            <a:off x="1928812" y="3591031"/>
+            <a:ext cx="5286375" cy="685800"/>
+          </a:xfrm>
+          <a:prstGeom prst="rect">
+            <a:avLst/>
+          </a:prstGeom>
+          <a:noFill/>
+          <a:ln>
+            <a:noFill/>
+          </a:ln>
+        </p:spPr>
+      </p:pic>
+      <p:pic>
+        <p:nvPicPr>
+          <p:cNvPr id="8" name="Google Shape;140;p17" descr="image.png">
+            <a:extLst>
+              <a:ext uri="{FF2B5EF4-FFF2-40B4-BE49-F238E27FC236}">
+                <a16:creationId xmlns:a16="http://schemas.microsoft.com/office/drawing/2014/main" id="{E921D4C2-3EFA-4E47-8AAC-565739D21EC9}"/>
+              </a:ext>
+            </a:extLst>
+          </p:cNvPr>
+          <p:cNvPicPr preferRelativeResize="0"/>
+          <p:nvPr/>
+        </p:nvPicPr>
+        <p:blipFill rotWithShape="1">
+          <a:blip r:embed="rId4">
+            <a:alphaModFix/>
+          </a:blip>
+          <a:srcRect/>
+          <a:stretch/>
+        </p:blipFill>
+        <p:spPr>
+          <a:xfrm>
+            <a:off x="3331963" y="3790460"/>
+            <a:ext cx="2479923" cy="295423"/>
+          </a:xfrm>
+          <a:prstGeom prst="rect">
+            <a:avLst/>
+          </a:prstGeom>
+          <a:noFill/>
+          <a:ln>
+            <a:noFill/>
+          </a:ln>
+        </p:spPr>
+      </p:pic>
+    </p:spTree>
+    <p:extLst>
+      <p:ext uri="{BB962C8B-B14F-4D97-AF65-F5344CB8AC3E}">
+        <p14:creationId xmlns:p14="http://schemas.microsoft.com/office/powerpoint/2010/main" val="1372578548"/>
+      </p:ext>
+    </p:extLst>
+  </p:cSld>
+  <p:clrMapOvr>
+    <a:masterClrMapping/>
+  </p:clrMapOvr>
+</p:sld>
+</file>
+
+<file path=ppt/slides/slide29.xml><?xml version="1.0" encoding="utf-8"?>
+<p:sld xmlns:a="http://schemas.openxmlformats.org/drawingml/2006/main" xmlns:r="http://schemas.openxmlformats.org/officeDocument/2006/relationships" xmlns:p="http://schemas.openxmlformats.org/presentationml/2006/main">
+  <p:cSld>
+    <p:spTree>
+      <p:nvGrpSpPr>
+        <p:cNvPr id="1" name=""/>
+        <p:cNvGrpSpPr/>
+        <p:nvPr/>
+      </p:nvGrpSpPr>
+      <p:grpSpPr>
+        <a:xfrm>
+          <a:off x="0" y="0"/>
+          <a:ext cx="0" cy="0"/>
+          <a:chOff x="0" y="0"/>
+          <a:chExt cx="0" cy="0"/>
+        </a:xfrm>
+      </p:grpSpPr>
+      <p:sp>
+        <p:nvSpPr>
+          <p:cNvPr id="3" name="타원 2"/>
+          <p:cNvSpPr/>
+          <p:nvPr/>
+        </p:nvSpPr>
+        <p:spPr>
+          <a:xfrm>
+            <a:off x="4067944" y="74100"/>
+            <a:ext cx="936104" cy="936104"/>
+          </a:xfrm>
+          <a:prstGeom prst="ellipse">
+            <a:avLst/>
+          </a:prstGeom>
+          <a:solidFill>
+            <a:schemeClr val="tx2">
+              <a:lumMod val="75000"/>
+            </a:schemeClr>
+          </a:solidFill>
+          <a:ln>
+            <a:noFill/>
+          </a:ln>
+        </p:spPr>
+        <p:style>
+          <a:lnRef idx="2">
+            <a:schemeClr val="accent1">
+              <a:shade val="50000"/>
+            </a:schemeClr>
+          </a:lnRef>
+          <a:fillRef idx="1">
+            <a:schemeClr val="accent1"/>
+          </a:fillRef>
+          <a:effectRef idx="0">
+            <a:schemeClr val="accent1"/>
+          </a:effectRef>
+          <a:fontRef idx="minor">
+            <a:schemeClr val="lt1"/>
+          </a:fontRef>
+        </p:style>
+        <p:txBody>
+          <a:bodyPr rtlCol="0" anchor="ctr"/>
+          <a:lstStyle/>
+          <a:p>
+            <a:pPr algn="ctr"/>
+            <a:endParaRPr lang="ko-KR" altLang="en-US"/>
+          </a:p>
+        </p:txBody>
+      </p:sp>
+      <p:sp>
+        <p:nvSpPr>
+          <p:cNvPr id="9" name="TextBox 8"/>
+          <p:cNvSpPr txBox="1"/>
+          <p:nvPr/>
+        </p:nvSpPr>
+        <p:spPr>
+          <a:xfrm>
+            <a:off x="3995936" y="479095"/>
+            <a:ext cx="1080120" cy="461665"/>
+          </a:xfrm>
+          <a:prstGeom prst="rect">
+            <a:avLst/>
+          </a:prstGeom>
+          <a:noFill/>
+        </p:spPr>
+        <p:txBody>
+          <a:bodyPr wrap="square" rtlCol="0">
+            <a:spAutoFit/>
+          </a:bodyPr>
+          <a:lstStyle/>
+          <a:p>
+            <a:pPr algn="ctr"/>
+            <a:r>
+              <a:rPr lang="en-US" altLang="ko-KR" sz="2400" dirty="0">
+                <a:solidFill>
+                  <a:schemeClr val="bg1"/>
+                </a:solidFill>
+                <a:latin typeface="HY헤드라인M" pitchFamily="18" charset="-127"/>
+                <a:ea typeface="HY헤드라인M" pitchFamily="18" charset="-127"/>
+              </a:rPr>
+              <a:t>01</a:t>
+            </a:r>
+            <a:endParaRPr lang="ko-KR" altLang="en-US" sz="2400" dirty="0">
+              <a:solidFill>
+                <a:schemeClr val="bg1"/>
+              </a:solidFill>
+              <a:latin typeface="HY헤드라인M" pitchFamily="18" charset="-127"/>
+              <a:ea typeface="HY헤드라인M" pitchFamily="18" charset="-127"/>
+            </a:endParaRPr>
+          </a:p>
+        </p:txBody>
+      </p:sp>
+      <p:sp>
+        <p:nvSpPr>
+          <p:cNvPr id="6" name="TextBox 5"/>
+          <p:cNvSpPr txBox="1"/>
+          <p:nvPr/>
+        </p:nvSpPr>
+        <p:spPr>
+          <a:xfrm>
+            <a:off x="539552" y="1065096"/>
+            <a:ext cx="7992888" cy="446276"/>
+          </a:xfrm>
+          <a:prstGeom prst="rect">
+            <a:avLst/>
+          </a:prstGeom>
+          <a:noFill/>
+        </p:spPr>
+        <p:txBody>
+          <a:bodyPr wrap="square" rtlCol="0">
+            <a:spAutoFit/>
+          </a:bodyPr>
+          <a:lstStyle/>
+          <a:p>
+            <a:r>
+              <a:rPr lang="ko-KR" altLang="en-US" sz="2300" dirty="0"/>
+              <a:t>게이트의 종류</a:t>
+            </a:r>
+          </a:p>
+        </p:txBody>
+      </p:sp>
+      <p:grpSp>
+        <p:nvGrpSpPr>
+          <p:cNvPr id="7" name="그룹 6">
+            <a:extLst>
+              <a:ext uri="{FF2B5EF4-FFF2-40B4-BE49-F238E27FC236}">
+                <a16:creationId xmlns:a16="http://schemas.microsoft.com/office/drawing/2014/main" id="{8DEC3B4F-642C-426C-92A3-A2A102F51229}"/>
+              </a:ext>
+            </a:extLst>
+          </p:cNvPr>
+          <p:cNvGrpSpPr/>
+          <p:nvPr/>
+        </p:nvGrpSpPr>
+        <p:grpSpPr>
+          <a:xfrm>
+            <a:off x="571500" y="2474118"/>
+            <a:ext cx="8133551" cy="3043114"/>
+            <a:chOff x="571500" y="2474118"/>
+            <a:chExt cx="11049000" cy="4133909"/>
+          </a:xfrm>
+        </p:grpSpPr>
+        <p:pic>
+          <p:nvPicPr>
+            <p:cNvPr id="8" name="Google Shape;146;p18" descr="image.png">
+              <a:extLst>
+                <a:ext uri="{FF2B5EF4-FFF2-40B4-BE49-F238E27FC236}">
+                  <a16:creationId xmlns:a16="http://schemas.microsoft.com/office/drawing/2014/main" id="{9CB3ECFC-370A-4E08-B86C-0C42732E722D}"/>
+                </a:ext>
+              </a:extLst>
+            </p:cNvPr>
+            <p:cNvPicPr preferRelativeResize="0"/>
+            <p:nvPr/>
+          </p:nvPicPr>
+          <p:blipFill rotWithShape="1">
+            <a:blip r:embed="rId3">
+              <a:alphaModFix/>
+            </a:blip>
+            <a:srcRect/>
+            <a:stretch/>
+          </p:blipFill>
+          <p:spPr>
+            <a:xfrm>
+              <a:off x="571500" y="2474118"/>
+              <a:ext cx="5286374" cy="4133909"/>
+            </a:xfrm>
+            <a:prstGeom prst="rect">
+              <a:avLst/>
+            </a:prstGeom>
+            <a:noFill/>
+            <a:ln>
+              <a:noFill/>
+            </a:ln>
+          </p:spPr>
+        </p:pic>
+        <p:pic>
+          <p:nvPicPr>
+            <p:cNvPr id="10" name="Google Shape;147;p18" descr="image.png">
+              <a:extLst>
+                <a:ext uri="{FF2B5EF4-FFF2-40B4-BE49-F238E27FC236}">
+                  <a16:creationId xmlns:a16="http://schemas.microsoft.com/office/drawing/2014/main" id="{3B07F737-28BA-4041-85E6-F618DE8C61DC}"/>
+                </a:ext>
+              </a:extLst>
+            </p:cNvPr>
+            <p:cNvPicPr preferRelativeResize="0"/>
+            <p:nvPr/>
+          </p:nvPicPr>
+          <p:blipFill rotWithShape="1">
+            <a:blip r:embed="rId4">
+              <a:alphaModFix/>
+            </a:blip>
+            <a:srcRect/>
+            <a:stretch/>
+          </p:blipFill>
+          <p:spPr>
+            <a:xfrm>
+              <a:off x="6334126" y="2474118"/>
+              <a:ext cx="5286374" cy="4133909"/>
+            </a:xfrm>
+            <a:prstGeom prst="rect">
+              <a:avLst/>
+            </a:prstGeom>
+            <a:noFill/>
+            <a:ln>
+              <a:noFill/>
+            </a:ln>
+          </p:spPr>
+        </p:pic>
+        <p:sp>
+          <p:nvSpPr>
+            <p:cNvPr id="11" name="Google Shape;148;p18">
+              <a:extLst>
+                <a:ext uri="{FF2B5EF4-FFF2-40B4-BE49-F238E27FC236}">
+                  <a16:creationId xmlns:a16="http://schemas.microsoft.com/office/drawing/2014/main" id="{95B7AA47-8658-4320-8699-022CE17404BE}"/>
+                </a:ext>
+              </a:extLst>
+            </p:cNvPr>
+            <p:cNvSpPr txBox="1"/>
+            <p:nvPr/>
+          </p:nvSpPr>
+          <p:spPr>
+            <a:xfrm>
+              <a:off x="849391" y="2864643"/>
+              <a:ext cx="4730592" cy="418099"/>
+            </a:xfrm>
+            <a:prstGeom prst="rect">
+              <a:avLst/>
+            </a:prstGeom>
+            <a:noFill/>
+            <a:ln>
+              <a:noFill/>
+            </a:ln>
+          </p:spPr>
+          <p:txBody>
+            <a:bodyPr spcFirstLastPara="1" wrap="square" lIns="0" tIns="0" rIns="0" bIns="0" anchor="t" anchorCtr="0">
+              <a:spAutoFit/>
+            </a:bodyPr>
+            <a:lstStyle/>
+            <a:p>
+              <a:pPr marL="0" marR="0" lvl="0" indent="0" algn="ctr" rtl="0">
+                <a:spcBef>
+                  <a:spcPts val="0"/>
+                </a:spcBef>
+                <a:spcAft>
+                  <a:spcPts val="0"/>
+                </a:spcAft>
+                <a:buNone/>
+              </a:pPr>
+              <a:r>
+                <a:rPr lang="en-US" sz="2000" b="0" i="0" u="none" strike="noStrike" cap="none" dirty="0" err="1">
+                  <a:solidFill>
+                    <a:srgbClr val="FB7185"/>
+                  </a:solidFill>
+                  <a:ea typeface="Poppins"/>
+                  <a:cs typeface="Poppins"/>
+                  <a:sym typeface="Poppins"/>
+                </a:rPr>
+                <a:t>망각</a:t>
+              </a:r>
+              <a:r>
+                <a:rPr lang="en-US" sz="2000" b="0" i="0" u="none" strike="noStrike" cap="none" dirty="0">
+                  <a:solidFill>
+                    <a:srgbClr val="FB7185"/>
+                  </a:solidFill>
+                  <a:ea typeface="Poppins"/>
+                  <a:cs typeface="Poppins"/>
+                  <a:sym typeface="Poppins"/>
+                </a:rPr>
+                <a:t> </a:t>
+              </a:r>
+              <a:r>
+                <a:rPr lang="en-US" sz="2000" b="0" i="0" u="none" strike="noStrike" cap="none" dirty="0" err="1">
+                  <a:solidFill>
+                    <a:srgbClr val="FB7185"/>
+                  </a:solidFill>
+                  <a:ea typeface="Poppins"/>
+                  <a:cs typeface="Poppins"/>
+                  <a:sym typeface="Poppins"/>
+                </a:rPr>
+                <a:t>게이트</a:t>
+              </a:r>
+              <a:r>
+                <a:rPr lang="en-US" sz="2000" b="0" i="0" u="none" strike="noStrike" cap="none" dirty="0">
+                  <a:solidFill>
+                    <a:srgbClr val="FB7185"/>
+                  </a:solidFill>
+                  <a:ea typeface="Poppins"/>
+                  <a:cs typeface="Poppins"/>
+                  <a:sym typeface="Poppins"/>
+                </a:rPr>
+                <a:t> (Forget Gate)</a:t>
+              </a:r>
+              <a:endParaRPr sz="2000" dirty="0"/>
+            </a:p>
+          </p:txBody>
+        </p:sp>
+        <p:sp>
+          <p:nvSpPr>
+            <p:cNvPr id="12" name="Google Shape;149;p18">
+              <a:extLst>
+                <a:ext uri="{FF2B5EF4-FFF2-40B4-BE49-F238E27FC236}">
+                  <a16:creationId xmlns:a16="http://schemas.microsoft.com/office/drawing/2014/main" id="{8B314D2E-5CB0-4E8F-A9BF-F819FADF5AB6}"/>
+                </a:ext>
+              </a:extLst>
+            </p:cNvPr>
+            <p:cNvSpPr txBox="1"/>
+            <p:nvPr/>
+          </p:nvSpPr>
+          <p:spPr>
+            <a:xfrm>
+              <a:off x="962025" y="3464718"/>
+              <a:ext cx="4505326" cy="2006872"/>
+            </a:xfrm>
+            <a:prstGeom prst="rect">
+              <a:avLst/>
+            </a:prstGeom>
+            <a:noFill/>
+            <a:ln>
+              <a:noFill/>
+            </a:ln>
+          </p:spPr>
+          <p:txBody>
+            <a:bodyPr spcFirstLastPara="1" wrap="square" lIns="0" tIns="0" rIns="0" bIns="0" anchor="t" anchorCtr="0">
+              <a:spAutoFit/>
+            </a:bodyPr>
+            <a:lstStyle/>
+            <a:p>
+              <a:pPr marL="0" marR="0" lvl="0" indent="0" algn="ctr" rtl="0">
+                <a:lnSpc>
+                  <a:spcPct val="160000"/>
+                </a:lnSpc>
+                <a:spcBef>
+                  <a:spcPts val="0"/>
+                </a:spcBef>
+                <a:spcAft>
+                  <a:spcPts val="0"/>
+                </a:spcAft>
+                <a:buNone/>
+              </a:pPr>
+              <a:r>
+                <a:rPr lang="en-US" sz="1500" b="0" i="0" u="none" strike="noStrike" cap="none" dirty="0" err="1">
+                  <a:solidFill>
+                    <a:srgbClr val="CBD5E1"/>
+                  </a:solidFill>
+                  <a:ea typeface="Lato"/>
+                  <a:cs typeface="Lato"/>
+                  <a:sym typeface="Lato"/>
+                </a:rPr>
+                <a:t>어제까지의</a:t>
+              </a:r>
+              <a:r>
+                <a:rPr lang="en-US" sz="1500" b="0" i="0" u="none" strike="noStrike" cap="none" dirty="0">
+                  <a:solidFill>
+                    <a:srgbClr val="CBD5E1"/>
+                  </a:solidFill>
+                  <a:ea typeface="Lato"/>
+                  <a:cs typeface="Lato"/>
+                  <a:sym typeface="Lato"/>
+                </a:rPr>
+                <a:t> </a:t>
+              </a:r>
+              <a:r>
+                <a:rPr lang="en-US" sz="1500" b="0" i="0" u="none" strike="noStrike" cap="none" dirty="0" err="1">
+                  <a:solidFill>
+                    <a:srgbClr val="CBD5E1"/>
+                  </a:solidFill>
+                  <a:ea typeface="Lato"/>
+                  <a:cs typeface="Lato"/>
+                  <a:sym typeface="Lato"/>
+                </a:rPr>
+                <a:t>장기</a:t>
+              </a:r>
+              <a:r>
+                <a:rPr lang="en-US" sz="1500" b="0" i="0" u="none" strike="noStrike" cap="none" dirty="0">
+                  <a:solidFill>
+                    <a:srgbClr val="CBD5E1"/>
+                  </a:solidFill>
+                  <a:ea typeface="Lato"/>
+                  <a:cs typeface="Lato"/>
+                  <a:sym typeface="Lato"/>
+                </a:rPr>
+                <a:t> </a:t>
+              </a:r>
+              <a:r>
+                <a:rPr lang="en-US" sz="1500" b="0" i="0" u="none" strike="noStrike" cap="none" dirty="0" err="1">
+                  <a:solidFill>
+                    <a:srgbClr val="CBD5E1"/>
+                  </a:solidFill>
+                  <a:ea typeface="Lato"/>
+                  <a:cs typeface="Lato"/>
+                  <a:sym typeface="Lato"/>
+                </a:rPr>
+                <a:t>기억</a:t>
+              </a:r>
+              <a:r>
+                <a:rPr lang="en-US" sz="1500" b="0" i="0" u="none" strike="noStrike" cap="none" dirty="0">
+                  <a:solidFill>
+                    <a:srgbClr val="CBD5E1"/>
+                  </a:solidFill>
+                  <a:ea typeface="Lato"/>
+                  <a:cs typeface="Lato"/>
+                  <a:sym typeface="Lato"/>
+                </a:rPr>
+                <a:t> 중 </a:t>
+              </a:r>
+              <a:r>
+                <a:rPr lang="en-US" sz="1500" b="0" i="0" u="none" strike="noStrike" cap="none" dirty="0" err="1">
+                  <a:solidFill>
+                    <a:srgbClr val="CBD5E1"/>
+                  </a:solidFill>
+                  <a:ea typeface="Lato"/>
+                  <a:cs typeface="Lato"/>
+                  <a:sym typeface="Lato"/>
+                </a:rPr>
+                <a:t>얼마나</a:t>
+              </a:r>
+              <a:r>
+                <a:rPr lang="en-US" sz="1500" b="0" i="0" u="none" strike="noStrike" cap="none" dirty="0">
+                  <a:solidFill>
+                    <a:srgbClr val="CBD5E1"/>
+                  </a:solidFill>
+                  <a:ea typeface="Lato"/>
+                  <a:cs typeface="Lato"/>
+                  <a:sym typeface="Lato"/>
+                </a:rPr>
+                <a:t> </a:t>
+              </a:r>
+              <a:r>
+                <a:rPr lang="en-US" sz="1500" b="0" i="0" u="none" strike="noStrike" cap="none" dirty="0" err="1">
+                  <a:solidFill>
+                    <a:srgbClr val="CBD5E1"/>
+                  </a:solidFill>
+                  <a:ea typeface="Lato"/>
+                  <a:cs typeface="Lato"/>
+                  <a:sym typeface="Lato"/>
+                </a:rPr>
+                <a:t>지워버릴지</a:t>
+              </a:r>
+              <a:r>
+                <a:rPr lang="en-US" sz="1500" b="0" i="0" u="none" strike="noStrike" cap="none" dirty="0">
+                  <a:solidFill>
+                    <a:srgbClr val="CBD5E1"/>
+                  </a:solidFill>
+                  <a:ea typeface="Lato"/>
+                  <a:cs typeface="Lato"/>
+                  <a:sym typeface="Lato"/>
+                </a:rPr>
+                <a:t> </a:t>
+              </a:r>
+              <a:r>
+                <a:rPr lang="en-US" sz="1500" b="0" i="0" u="none" strike="noStrike" cap="none" dirty="0" err="1">
+                  <a:solidFill>
+                    <a:srgbClr val="CBD5E1"/>
+                  </a:solidFill>
+                  <a:ea typeface="Lato"/>
+                  <a:cs typeface="Lato"/>
+                  <a:sym typeface="Lato"/>
+                </a:rPr>
+                <a:t>결정합니다</a:t>
+              </a:r>
+              <a:r>
+                <a:rPr lang="en-US" sz="1500" b="0" i="0" u="none" strike="noStrike" cap="none" dirty="0">
+                  <a:solidFill>
+                    <a:srgbClr val="CBD5E1"/>
+                  </a:solidFill>
+                  <a:ea typeface="Lato"/>
+                  <a:cs typeface="Lato"/>
+                  <a:sym typeface="Lato"/>
+                </a:rPr>
+                <a:t>. </a:t>
+              </a:r>
+              <a:r>
+                <a:rPr lang="en-US" sz="1500" b="0" i="0" u="none" strike="noStrike" cap="none" dirty="0" err="1">
+                  <a:solidFill>
+                    <a:srgbClr val="CBD5E1"/>
+                  </a:solidFill>
+                  <a:ea typeface="Lato"/>
+                  <a:cs typeface="Lato"/>
+                  <a:sym typeface="Lato"/>
+                </a:rPr>
+                <a:t>시그모이드</a:t>
+              </a:r>
+              <a:r>
+                <a:rPr lang="en-US" sz="1500" b="0" i="0" u="none" strike="noStrike" cap="none" dirty="0">
+                  <a:solidFill>
+                    <a:srgbClr val="CBD5E1"/>
+                  </a:solidFill>
+                  <a:ea typeface="Lato"/>
+                  <a:cs typeface="Lato"/>
+                  <a:sym typeface="Lato"/>
+                </a:rPr>
+                <a:t> </a:t>
+              </a:r>
+              <a:r>
+                <a:rPr lang="en-US" sz="1500" b="0" i="0" u="none" strike="noStrike" cap="none" dirty="0" err="1">
+                  <a:solidFill>
+                    <a:srgbClr val="CBD5E1"/>
+                  </a:solidFill>
+                  <a:ea typeface="Lato"/>
+                  <a:cs typeface="Lato"/>
+                  <a:sym typeface="Lato"/>
+                </a:rPr>
+                <a:t>함수를</a:t>
+              </a:r>
+              <a:r>
+                <a:rPr lang="en-US" sz="1500" b="0" i="0" u="none" strike="noStrike" cap="none" dirty="0">
+                  <a:solidFill>
+                    <a:srgbClr val="CBD5E1"/>
+                  </a:solidFill>
+                  <a:ea typeface="Lato"/>
+                  <a:cs typeface="Lato"/>
+                  <a:sym typeface="Lato"/>
+                </a:rPr>
+                <a:t> </a:t>
+              </a:r>
+              <a:r>
+                <a:rPr lang="en-US" sz="1500" b="0" i="0" u="none" strike="noStrike" cap="none" dirty="0" err="1">
+                  <a:solidFill>
+                    <a:srgbClr val="CBD5E1"/>
+                  </a:solidFill>
+                  <a:ea typeface="Lato"/>
+                  <a:cs typeface="Lato"/>
+                  <a:sym typeface="Lato"/>
+                </a:rPr>
+                <a:t>통해</a:t>
+              </a:r>
+              <a:r>
+                <a:rPr lang="en-US" sz="1500" b="0" i="0" u="none" strike="noStrike" cap="none" dirty="0">
+                  <a:solidFill>
+                    <a:srgbClr val="CBD5E1"/>
+                  </a:solidFill>
+                  <a:ea typeface="Lato"/>
+                  <a:cs typeface="Lato"/>
+                  <a:sym typeface="Lato"/>
+                </a:rPr>
+                <a:t> 0(</a:t>
+              </a:r>
+              <a:r>
+                <a:rPr lang="en-US" sz="1500" b="0" i="0" u="none" strike="noStrike" cap="none" dirty="0" err="1">
+                  <a:solidFill>
+                    <a:srgbClr val="CBD5E1"/>
+                  </a:solidFill>
+                  <a:ea typeface="Lato"/>
+                  <a:cs typeface="Lato"/>
+                  <a:sym typeface="Lato"/>
+                </a:rPr>
+                <a:t>모두</a:t>
+              </a:r>
+              <a:r>
+                <a:rPr lang="en-US" sz="1500" b="0" i="0" u="none" strike="noStrike" cap="none" dirty="0">
+                  <a:solidFill>
+                    <a:srgbClr val="CBD5E1"/>
+                  </a:solidFill>
+                  <a:ea typeface="Lato"/>
+                  <a:cs typeface="Lato"/>
+                  <a:sym typeface="Lato"/>
+                </a:rPr>
+                <a:t> </a:t>
+              </a:r>
+              <a:r>
+                <a:rPr lang="en-US" sz="1500" b="0" i="0" u="none" strike="noStrike" cap="none" dirty="0" err="1">
+                  <a:solidFill>
+                    <a:srgbClr val="CBD5E1"/>
+                  </a:solidFill>
+                  <a:ea typeface="Lato"/>
+                  <a:cs typeface="Lato"/>
+                  <a:sym typeface="Lato"/>
+                </a:rPr>
+                <a:t>지움</a:t>
+              </a:r>
+              <a:r>
+                <a:rPr lang="en-US" sz="1500" b="0" i="0" u="none" strike="noStrike" cap="none" dirty="0">
+                  <a:solidFill>
+                    <a:srgbClr val="CBD5E1"/>
+                  </a:solidFill>
+                  <a:ea typeface="Lato"/>
+                  <a:cs typeface="Lato"/>
+                  <a:sym typeface="Lato"/>
+                </a:rPr>
+                <a:t>)</a:t>
+              </a:r>
+              <a:r>
+                <a:rPr lang="en-US" sz="1500" b="0" i="0" u="none" strike="noStrike" cap="none" dirty="0" err="1">
+                  <a:solidFill>
+                    <a:srgbClr val="CBD5E1"/>
+                  </a:solidFill>
+                  <a:ea typeface="Lato"/>
+                  <a:cs typeface="Lato"/>
+                  <a:sym typeface="Lato"/>
+                </a:rPr>
+                <a:t>에서</a:t>
+              </a:r>
+              <a:r>
+                <a:rPr lang="en-US" sz="1500" b="0" i="0" u="none" strike="noStrike" cap="none" dirty="0">
+                  <a:solidFill>
+                    <a:srgbClr val="CBD5E1"/>
+                  </a:solidFill>
+                  <a:ea typeface="Lato"/>
+                  <a:cs typeface="Lato"/>
+                  <a:sym typeface="Lato"/>
+                </a:rPr>
+                <a:t> 1(</a:t>
+              </a:r>
+              <a:r>
+                <a:rPr lang="en-US" sz="1500" b="0" i="0" u="none" strike="noStrike" cap="none" dirty="0" err="1">
+                  <a:solidFill>
+                    <a:srgbClr val="CBD5E1"/>
+                  </a:solidFill>
+                  <a:ea typeface="Lato"/>
+                  <a:cs typeface="Lato"/>
+                  <a:sym typeface="Lato"/>
+                </a:rPr>
+                <a:t>모두</a:t>
+              </a:r>
+              <a:r>
+                <a:rPr lang="en-US" sz="1500" b="0" i="0" u="none" strike="noStrike" cap="none" dirty="0">
+                  <a:solidFill>
+                    <a:srgbClr val="CBD5E1"/>
+                  </a:solidFill>
+                  <a:ea typeface="Lato"/>
+                  <a:cs typeface="Lato"/>
+                  <a:sym typeface="Lato"/>
+                </a:rPr>
+                <a:t> </a:t>
+              </a:r>
+              <a:r>
+                <a:rPr lang="en-US" sz="1500" b="0" i="0" u="none" strike="noStrike" cap="none" dirty="0" err="1">
+                  <a:solidFill>
+                    <a:srgbClr val="CBD5E1"/>
+                  </a:solidFill>
+                  <a:ea typeface="Lato"/>
+                  <a:cs typeface="Lato"/>
+                  <a:sym typeface="Lato"/>
+                </a:rPr>
+                <a:t>기억</a:t>
+              </a:r>
+              <a:r>
+                <a:rPr lang="en-US" sz="1500" b="0" i="0" u="none" strike="noStrike" cap="none" dirty="0">
+                  <a:solidFill>
+                    <a:srgbClr val="CBD5E1"/>
+                  </a:solidFill>
+                  <a:ea typeface="Lato"/>
+                  <a:cs typeface="Lato"/>
+                  <a:sym typeface="Lato"/>
+                </a:rPr>
+                <a:t>) </a:t>
+              </a:r>
+              <a:r>
+                <a:rPr lang="en-US" sz="1500" b="0" i="0" u="none" strike="noStrike" cap="none" dirty="0" err="1">
+                  <a:solidFill>
+                    <a:srgbClr val="CBD5E1"/>
+                  </a:solidFill>
+                  <a:ea typeface="Lato"/>
+                  <a:cs typeface="Lato"/>
+                  <a:sym typeface="Lato"/>
+                </a:rPr>
+                <a:t>사이의</a:t>
+              </a:r>
+              <a:r>
+                <a:rPr lang="en-US" sz="1500" b="0" i="0" u="none" strike="noStrike" cap="none" dirty="0">
+                  <a:solidFill>
+                    <a:srgbClr val="CBD5E1"/>
+                  </a:solidFill>
+                  <a:ea typeface="Lato"/>
+                  <a:cs typeface="Lato"/>
+                  <a:sym typeface="Lato"/>
+                </a:rPr>
+                <a:t> </a:t>
+              </a:r>
+              <a:r>
+                <a:rPr lang="en-US" sz="1500" b="0" i="0" u="none" strike="noStrike" cap="none" dirty="0" err="1">
+                  <a:solidFill>
+                    <a:srgbClr val="CBD5E1"/>
+                  </a:solidFill>
+                  <a:ea typeface="Lato"/>
+                  <a:cs typeface="Lato"/>
+                  <a:sym typeface="Lato"/>
+                </a:rPr>
+                <a:t>비율을</a:t>
+              </a:r>
+              <a:r>
+                <a:rPr lang="en-US" sz="1500" b="0" i="0" u="none" strike="noStrike" cap="none" dirty="0">
+                  <a:solidFill>
+                    <a:srgbClr val="CBD5E1"/>
+                  </a:solidFill>
+                  <a:ea typeface="Lato"/>
+                  <a:cs typeface="Lato"/>
+                  <a:sym typeface="Lato"/>
+                </a:rPr>
+                <a:t> </a:t>
+              </a:r>
+              <a:r>
+                <a:rPr lang="en-US" sz="1500" b="0" i="0" u="none" strike="noStrike" cap="none" dirty="0" err="1">
+                  <a:solidFill>
+                    <a:srgbClr val="CBD5E1"/>
+                  </a:solidFill>
+                  <a:ea typeface="Lato"/>
+                  <a:cs typeface="Lato"/>
+                  <a:sym typeface="Lato"/>
+                </a:rPr>
+                <a:t>산출합니다</a:t>
+              </a:r>
+              <a:r>
+                <a:rPr lang="en-US" sz="1500" b="0" i="0" u="none" strike="noStrike" cap="none" dirty="0">
+                  <a:solidFill>
+                    <a:srgbClr val="CBD5E1"/>
+                  </a:solidFill>
+                  <a:ea typeface="Lato"/>
+                  <a:cs typeface="Lato"/>
+                  <a:sym typeface="Lato"/>
+                </a:rPr>
+                <a:t>.</a:t>
+              </a:r>
+              <a:endParaRPr dirty="0"/>
+            </a:p>
+          </p:txBody>
+        </p:sp>
+        <p:sp>
+          <p:nvSpPr>
+            <p:cNvPr id="13" name="Google Shape;150;p18">
+              <a:extLst>
+                <a:ext uri="{FF2B5EF4-FFF2-40B4-BE49-F238E27FC236}">
+                  <a16:creationId xmlns:a16="http://schemas.microsoft.com/office/drawing/2014/main" id="{362DD4BF-1E03-42B0-AA49-9299DA6F814A}"/>
+                </a:ext>
+              </a:extLst>
+            </p:cNvPr>
+            <p:cNvSpPr txBox="1"/>
+            <p:nvPr/>
+          </p:nvSpPr>
+          <p:spPr>
+            <a:xfrm>
+              <a:off x="6612016" y="2864643"/>
+              <a:ext cx="4730592" cy="418099"/>
+            </a:xfrm>
+            <a:prstGeom prst="rect">
+              <a:avLst/>
+            </a:prstGeom>
+            <a:noFill/>
+            <a:ln>
+              <a:noFill/>
+            </a:ln>
+          </p:spPr>
+          <p:txBody>
+            <a:bodyPr spcFirstLastPara="1" wrap="square" lIns="0" tIns="0" rIns="0" bIns="0" anchor="t" anchorCtr="0">
+              <a:spAutoFit/>
+            </a:bodyPr>
+            <a:lstStyle/>
+            <a:p>
+              <a:pPr marL="0" marR="0" lvl="0" indent="0" algn="ctr" rtl="0">
+                <a:spcBef>
+                  <a:spcPts val="0"/>
+                </a:spcBef>
+                <a:spcAft>
+                  <a:spcPts val="0"/>
+                </a:spcAft>
+                <a:buNone/>
+              </a:pPr>
+              <a:r>
+                <a:rPr lang="en-US" sz="2000" b="0" i="0" u="none" strike="noStrike" cap="none" dirty="0" err="1">
+                  <a:solidFill>
+                    <a:srgbClr val="2DD4BF"/>
+                  </a:solidFill>
+                  <a:ea typeface="Poppins"/>
+                  <a:cs typeface="Poppins"/>
+                  <a:sym typeface="Poppins"/>
+                </a:rPr>
+                <a:t>입력</a:t>
+              </a:r>
+              <a:r>
+                <a:rPr lang="en-US" sz="2000" b="0" i="0" u="none" strike="noStrike" cap="none" dirty="0">
+                  <a:solidFill>
+                    <a:srgbClr val="2DD4BF"/>
+                  </a:solidFill>
+                  <a:ea typeface="Poppins"/>
+                  <a:cs typeface="Poppins"/>
+                  <a:sym typeface="Poppins"/>
+                </a:rPr>
+                <a:t> </a:t>
+              </a:r>
+              <a:r>
+                <a:rPr lang="en-US" sz="2000" b="0" i="0" u="none" strike="noStrike" cap="none" dirty="0" err="1">
+                  <a:solidFill>
+                    <a:srgbClr val="2DD4BF"/>
+                  </a:solidFill>
+                  <a:ea typeface="Poppins"/>
+                  <a:cs typeface="Poppins"/>
+                  <a:sym typeface="Poppins"/>
+                </a:rPr>
+                <a:t>게이트</a:t>
+              </a:r>
+              <a:r>
+                <a:rPr lang="en-US" sz="2000" b="0" i="0" u="none" strike="noStrike" cap="none" dirty="0">
+                  <a:solidFill>
+                    <a:srgbClr val="2DD4BF"/>
+                  </a:solidFill>
+                  <a:ea typeface="Poppins"/>
+                  <a:cs typeface="Poppins"/>
+                  <a:sym typeface="Poppins"/>
+                </a:rPr>
+                <a:t> (Input Gate)</a:t>
+              </a:r>
+              <a:endParaRPr sz="2000" dirty="0"/>
+            </a:p>
+          </p:txBody>
+        </p:sp>
+        <p:sp>
+          <p:nvSpPr>
+            <p:cNvPr id="14" name="Google Shape;151;p18">
+              <a:extLst>
+                <a:ext uri="{FF2B5EF4-FFF2-40B4-BE49-F238E27FC236}">
+                  <a16:creationId xmlns:a16="http://schemas.microsoft.com/office/drawing/2014/main" id="{26515529-B29B-4518-87AB-78F225C40FCC}"/>
+                </a:ext>
+              </a:extLst>
+            </p:cNvPr>
+            <p:cNvSpPr txBox="1"/>
+            <p:nvPr/>
+          </p:nvSpPr>
+          <p:spPr>
+            <a:xfrm>
+              <a:off x="6724651" y="3464718"/>
+              <a:ext cx="4505326" cy="2006872"/>
+            </a:xfrm>
+            <a:prstGeom prst="rect">
+              <a:avLst/>
+            </a:prstGeom>
+            <a:noFill/>
+            <a:ln>
+              <a:noFill/>
+            </a:ln>
+          </p:spPr>
+          <p:txBody>
+            <a:bodyPr spcFirstLastPara="1" wrap="square" lIns="0" tIns="0" rIns="0" bIns="0" anchor="t" anchorCtr="0">
+              <a:spAutoFit/>
+            </a:bodyPr>
+            <a:lstStyle/>
+            <a:p>
+              <a:pPr marL="0" marR="0" lvl="0" indent="0" algn="ctr" rtl="0">
+                <a:lnSpc>
+                  <a:spcPct val="160000"/>
+                </a:lnSpc>
+                <a:spcBef>
+                  <a:spcPts val="0"/>
+                </a:spcBef>
+                <a:spcAft>
+                  <a:spcPts val="0"/>
+                </a:spcAft>
+                <a:buNone/>
+              </a:pPr>
+              <a:r>
+                <a:rPr lang="en-US" sz="1500" b="0" i="0" u="none" strike="noStrike" cap="none">
+                  <a:solidFill>
+                    <a:srgbClr val="CBD5E1"/>
+                  </a:solidFill>
+                  <a:ea typeface="Lato"/>
+                  <a:cs typeface="Lato"/>
+                  <a:sym typeface="Lato"/>
+                </a:rPr>
+                <a:t>오늘 새롭게 들어온 정보 중 어떤 것을 장기 기억에 추가할지 판단합니다. 더하기 연산을 통해 가중치 간섭 없이 컨베이어 벨트에 올라탑니다.</a:t>
+              </a:r>
+              <a:endParaRPr/>
+            </a:p>
+          </p:txBody>
+        </p:sp>
+        <p:pic>
+          <p:nvPicPr>
+            <p:cNvPr id="15" name="Google Shape;152;p18" descr="image.png">
+              <a:extLst>
+                <a:ext uri="{FF2B5EF4-FFF2-40B4-BE49-F238E27FC236}">
+                  <a16:creationId xmlns:a16="http://schemas.microsoft.com/office/drawing/2014/main" id="{D6F0F582-9EA4-445D-A929-083F6A46B063}"/>
+                </a:ext>
+              </a:extLst>
+            </p:cNvPr>
+            <p:cNvPicPr preferRelativeResize="0"/>
+            <p:nvPr/>
+          </p:nvPicPr>
+          <p:blipFill rotWithShape="1">
+            <a:blip r:embed="rId5">
+              <a:alphaModFix/>
+            </a:blip>
+            <a:srcRect/>
+            <a:stretch/>
+          </p:blipFill>
+          <p:spPr>
+            <a:xfrm>
+              <a:off x="1115015" y="5825475"/>
+              <a:ext cx="4282635" cy="293457"/>
+            </a:xfrm>
+            <a:prstGeom prst="rect">
+              <a:avLst/>
+            </a:prstGeom>
+            <a:noFill/>
+            <a:ln>
+              <a:noFill/>
+            </a:ln>
+          </p:spPr>
+        </p:pic>
+        <p:pic>
+          <p:nvPicPr>
+            <p:cNvPr id="16" name="Google Shape;153;p18" descr="image.png">
+              <a:extLst>
+                <a:ext uri="{FF2B5EF4-FFF2-40B4-BE49-F238E27FC236}">
+                  <a16:creationId xmlns:a16="http://schemas.microsoft.com/office/drawing/2014/main" id="{1F26E32E-4F67-4FBB-950E-62AC4E864963}"/>
+                </a:ext>
+              </a:extLst>
+            </p:cNvPr>
+            <p:cNvPicPr preferRelativeResize="0"/>
+            <p:nvPr/>
+          </p:nvPicPr>
+          <p:blipFill rotWithShape="1">
+            <a:blip r:embed="rId6">
+              <a:alphaModFix/>
+            </a:blip>
+            <a:srcRect/>
+            <a:stretch/>
+          </p:blipFill>
+          <p:spPr>
+            <a:xfrm>
+              <a:off x="6892968" y="5825475"/>
+              <a:ext cx="4240859" cy="293457"/>
+            </a:xfrm>
+            <a:prstGeom prst="rect">
+              <a:avLst/>
+            </a:prstGeom>
+            <a:noFill/>
+            <a:ln>
+              <a:noFill/>
+            </a:ln>
+          </p:spPr>
+        </p:pic>
+      </p:grpSp>
+    </p:spTree>
+    <p:extLst>
+      <p:ext uri="{BB962C8B-B14F-4D97-AF65-F5344CB8AC3E}">
+        <p14:creationId xmlns:p14="http://schemas.microsoft.com/office/powerpoint/2010/main" val="2744622765"/>
+      </p:ext>
+    </p:extLst>
+  </p:cSld>
+  <p:clrMapOvr>
+    <a:masterClrMapping/>
+  </p:clrMapOvr>
+</p:sld>
+</file>
+
+<file path=ppt/slides/slide3.xml><?xml version="1.0" encoding="utf-8"?>
+<p:sld xmlns:a="http://schemas.openxmlformats.org/drawingml/2006/main" xmlns:r="http://schemas.openxmlformats.org/officeDocument/2006/relationships" xmlns:p="http://schemas.openxmlformats.org/presentationml/2006/main">
+  <p:cSld>
+    <p:spTree>
+      <p:nvGrpSpPr>
+        <p:cNvPr id="1" name=""/>
+        <p:cNvGrpSpPr/>
+        <p:nvPr/>
+      </p:nvGrpSpPr>
+      <p:grpSpPr>
+        <a:xfrm>
+          <a:off x="0" y="0"/>
+          <a:ext cx="0" cy="0"/>
+          <a:chOff x="0" y="0"/>
+          <a:chExt cx="0" cy="0"/>
+        </a:xfrm>
+      </p:grpSpPr>
+      <p:sp>
+        <p:nvSpPr>
+          <p:cNvPr id="3" name="타원 2"/>
+          <p:cNvSpPr/>
+          <p:nvPr/>
+        </p:nvSpPr>
+        <p:spPr>
+          <a:xfrm>
+            <a:off x="4067944" y="74100"/>
+            <a:ext cx="936104" cy="936104"/>
+          </a:xfrm>
+          <a:prstGeom prst="ellipse">
+            <a:avLst/>
+          </a:prstGeom>
+          <a:solidFill>
+            <a:schemeClr val="tx2">
+              <a:lumMod val="75000"/>
+            </a:schemeClr>
+          </a:solidFill>
+          <a:ln>
+            <a:noFill/>
+          </a:ln>
+        </p:spPr>
+        <p:style>
+          <a:lnRef idx="2">
+            <a:schemeClr val="accent1">
+              <a:shade val="50000"/>
+            </a:schemeClr>
+          </a:lnRef>
+          <a:fillRef idx="1">
+            <a:schemeClr val="accent1"/>
+          </a:fillRef>
+          <a:effectRef idx="0">
+            <a:schemeClr val="accent1"/>
+          </a:effectRef>
+          <a:fontRef idx="minor">
+            <a:schemeClr val="lt1"/>
+          </a:fontRef>
+        </p:style>
+        <p:txBody>
+          <a:bodyPr rtlCol="0" anchor="ctr"/>
+          <a:lstStyle/>
+          <a:p>
+            <a:pPr algn="ctr"/>
+            <a:endParaRPr lang="ko-KR" altLang="en-US"/>
+          </a:p>
+        </p:txBody>
+      </p:sp>
+      <p:sp>
+        <p:nvSpPr>
+          <p:cNvPr id="9" name="TextBox 8"/>
+          <p:cNvSpPr txBox="1"/>
+          <p:nvPr/>
+        </p:nvSpPr>
+        <p:spPr>
+          <a:xfrm>
+            <a:off x="3995936" y="479095"/>
+            <a:ext cx="1080120" cy="461665"/>
+          </a:xfrm>
+          <a:prstGeom prst="rect">
+            <a:avLst/>
+          </a:prstGeom>
+          <a:noFill/>
+        </p:spPr>
+        <p:txBody>
+          <a:bodyPr wrap="square" rtlCol="0">
+            <a:spAutoFit/>
+          </a:bodyPr>
+          <a:lstStyle/>
+          <a:p>
+            <a:pPr algn="ctr"/>
+            <a:r>
+              <a:rPr lang="en-US" altLang="ko-KR" sz="2400" dirty="0">
+                <a:solidFill>
+                  <a:schemeClr val="bg1"/>
+                </a:solidFill>
+                <a:latin typeface="HY헤드라인M" pitchFamily="18" charset="-127"/>
+                <a:ea typeface="HY헤드라인M" pitchFamily="18" charset="-127"/>
+              </a:rPr>
+              <a:t>01</a:t>
+            </a:r>
+            <a:endParaRPr lang="ko-KR" altLang="en-US" sz="2400" dirty="0">
+              <a:solidFill>
+                <a:schemeClr val="bg1"/>
+              </a:solidFill>
+              <a:latin typeface="HY헤드라인M" pitchFamily="18" charset="-127"/>
+              <a:ea typeface="HY헤드라인M" pitchFamily="18" charset="-127"/>
+            </a:endParaRPr>
+          </a:p>
+        </p:txBody>
+      </p:sp>
+      <p:sp>
+        <p:nvSpPr>
+          <p:cNvPr id="4" name="TextBox 3"/>
+          <p:cNvSpPr txBox="1"/>
+          <p:nvPr/>
+        </p:nvSpPr>
+        <p:spPr>
+          <a:xfrm>
+            <a:off x="971600" y="1700955"/>
+            <a:ext cx="7200800" cy="3693319"/>
+          </a:xfrm>
+          <a:prstGeom prst="rect">
+            <a:avLst/>
+          </a:prstGeom>
+          <a:noFill/>
+        </p:spPr>
+        <p:txBody>
+          <a:bodyPr wrap="square" rtlCol="0">
+            <a:spAutoFit/>
+          </a:bodyPr>
+          <a:lstStyle/>
+          <a:p>
+            <a:pPr marL="285750" indent="-285750">
+              <a:buFont typeface="Arial" panose="020B0604020202020204" pitchFamily="34" charset="0"/>
+              <a:buChar char="•"/>
+            </a:pPr>
+            <a:r>
+              <a:rPr lang="ko-KR" altLang="en-US" dirty="0"/>
+              <a:t>인공지능 </a:t>
+            </a:r>
+            <a:r>
+              <a:rPr lang="en-US" altLang="ko-KR" dirty="0"/>
+              <a:t>(AI)</a:t>
+            </a:r>
+          </a:p>
+          <a:p>
+            <a:pPr marL="742950" lvl="1" indent="-285750">
+              <a:buFont typeface="Arial" panose="020B0604020202020204" pitchFamily="34" charset="0"/>
+              <a:buChar char="•"/>
+            </a:pPr>
+            <a:r>
+              <a:rPr lang="ko-KR" altLang="en-US" dirty="0"/>
+              <a:t>사람의 지능을 흉내 내는 기계의 모든 기술 </a:t>
+            </a:r>
+            <a:r>
+              <a:rPr lang="en-US" altLang="ko-KR" dirty="0"/>
+              <a:t>(</a:t>
+            </a:r>
+            <a:r>
+              <a:rPr lang="ko-KR" altLang="en-US" dirty="0"/>
+              <a:t>가장 넓은 의미</a:t>
+            </a:r>
+            <a:r>
+              <a:rPr lang="en-US" altLang="ko-KR" dirty="0"/>
+              <a:t>)</a:t>
+            </a:r>
+            <a:br>
+              <a:rPr lang="en-US" altLang="ko-KR" dirty="0"/>
+            </a:br>
+            <a:endParaRPr lang="en-US" altLang="ko-KR" dirty="0"/>
+          </a:p>
+          <a:p>
+            <a:pPr marL="285750" indent="-285750">
+              <a:buFont typeface="Arial" panose="020B0604020202020204" pitchFamily="34" charset="0"/>
+              <a:buChar char="•"/>
+            </a:pPr>
+            <a:r>
+              <a:rPr lang="ko-KR" altLang="en-US" dirty="0" err="1"/>
+              <a:t>머신러닝</a:t>
+            </a:r>
+            <a:r>
+              <a:rPr lang="ko-KR" altLang="en-US" dirty="0"/>
+              <a:t> </a:t>
+            </a:r>
+            <a:r>
+              <a:rPr lang="en-US" altLang="ko-KR" dirty="0"/>
+              <a:t>(ML)</a:t>
+            </a:r>
+          </a:p>
+          <a:p>
+            <a:pPr marL="742950" lvl="1" indent="-285750">
+              <a:buFont typeface="Arial" panose="020B0604020202020204" pitchFamily="34" charset="0"/>
+              <a:buChar char="•"/>
+            </a:pPr>
+            <a:r>
+              <a:rPr lang="ko-KR" altLang="en-US" dirty="0"/>
+              <a:t>사람이 규칙을 일일이 짜주지 않고</a:t>
+            </a:r>
+            <a:r>
+              <a:rPr lang="en-US" altLang="ko-KR" dirty="0"/>
+              <a:t>, </a:t>
+            </a:r>
+            <a:r>
+              <a:rPr lang="ko-KR" altLang="en-US" dirty="0"/>
+              <a:t>데이터를 주어 기계가 스스로 규칙을 학습하게 만드는 방법론</a:t>
+            </a:r>
+            <a:br>
+              <a:rPr lang="en-US" altLang="ko-KR" dirty="0"/>
+            </a:br>
+            <a:endParaRPr lang="en-US" altLang="ko-KR" dirty="0"/>
+          </a:p>
+          <a:p>
+            <a:pPr marL="285750" indent="-285750">
+              <a:buFont typeface="Arial" panose="020B0604020202020204" pitchFamily="34" charset="0"/>
+              <a:buChar char="•"/>
+            </a:pPr>
+            <a:r>
+              <a:rPr lang="ko-KR" altLang="en-US" dirty="0"/>
+              <a:t>딥러닝 </a:t>
+            </a:r>
+            <a:r>
+              <a:rPr lang="en-US" altLang="ko-KR" dirty="0"/>
+              <a:t>(DL)</a:t>
+            </a:r>
+          </a:p>
+          <a:p>
+            <a:pPr marL="742950" lvl="1" indent="-285750">
+              <a:buFont typeface="Arial" panose="020B0604020202020204" pitchFamily="34" charset="0"/>
+              <a:buChar char="•"/>
+            </a:pPr>
+            <a:r>
+              <a:rPr lang="ko-KR" altLang="en-US" dirty="0" err="1"/>
+              <a:t>머신러닝</a:t>
+            </a:r>
+            <a:r>
+              <a:rPr lang="ko-KR" altLang="en-US" dirty="0"/>
+              <a:t> 중에서도 사람의 뇌</a:t>
+            </a:r>
+            <a:r>
+              <a:rPr lang="en-US" altLang="ko-KR" dirty="0"/>
+              <a:t>(</a:t>
+            </a:r>
+            <a:r>
+              <a:rPr lang="ko-KR" altLang="en-US" dirty="0"/>
+              <a:t>신경망</a:t>
+            </a:r>
+            <a:r>
+              <a:rPr lang="en-US" altLang="ko-KR" dirty="0"/>
+              <a:t>) </a:t>
+            </a:r>
+            <a:r>
+              <a:rPr lang="ko-KR" altLang="en-US" dirty="0"/>
+              <a:t>구조를 모방하여 복잡하고 방대한 데이터를 처리하는 최신 기술</a:t>
+            </a:r>
+            <a:r>
+              <a:rPr lang="en-US" altLang="ko-KR" dirty="0"/>
+              <a:t>.</a:t>
+            </a:r>
+          </a:p>
+          <a:p>
+            <a:br>
+              <a:rPr lang="en-US" altLang="ko-KR" dirty="0"/>
+            </a:br>
+            <a:r>
+              <a:rPr lang="en-US" altLang="ko-KR" dirty="0"/>
+              <a:t>	</a:t>
+            </a:r>
+          </a:p>
+          <a:p>
+            <a:pPr marL="285750" indent="-285750">
+              <a:buFont typeface="Arial" panose="020B0604020202020204" pitchFamily="34" charset="0"/>
+              <a:buChar char="•"/>
+            </a:pPr>
+            <a:endParaRPr lang="en-US" altLang="ko-KR" dirty="0"/>
+          </a:p>
+        </p:txBody>
+      </p:sp>
+      <p:sp>
+        <p:nvSpPr>
+          <p:cNvPr id="6" name="TextBox 5"/>
+          <p:cNvSpPr txBox="1"/>
+          <p:nvPr/>
+        </p:nvSpPr>
+        <p:spPr>
+          <a:xfrm>
+            <a:off x="539552" y="1065096"/>
+            <a:ext cx="7992888" cy="446276"/>
+          </a:xfrm>
+          <a:prstGeom prst="rect">
+            <a:avLst/>
+          </a:prstGeom>
+          <a:noFill/>
+        </p:spPr>
+        <p:txBody>
+          <a:bodyPr wrap="square" rtlCol="0">
+            <a:spAutoFit/>
+          </a:bodyPr>
+          <a:lstStyle/>
+          <a:p>
+            <a:r>
+              <a:rPr lang="en-US" altLang="ko-KR" sz="2300" dirty="0"/>
+              <a:t>AI, </a:t>
+            </a:r>
+            <a:r>
+              <a:rPr lang="ko-KR" altLang="en-US" sz="2300" dirty="0" err="1"/>
+              <a:t>머신러닝</a:t>
+            </a:r>
+            <a:r>
+              <a:rPr lang="en-US" altLang="ko-KR" sz="2300" dirty="0"/>
+              <a:t>, </a:t>
+            </a:r>
+            <a:r>
+              <a:rPr lang="ko-KR" altLang="en-US" sz="2300" dirty="0"/>
+              <a:t>딥러닝</a:t>
+            </a:r>
+          </a:p>
+        </p:txBody>
+      </p:sp>
+    </p:spTree>
+  </p:cSld>
+  <p:clrMapOvr>
+    <a:masterClrMapping/>
+  </p:clrMapOvr>
+</p:sld>
+</file>
+
+<file path=ppt/slides/slide30.xml><?xml version="1.0" encoding="utf-8"?>
+<p:sld xmlns:a="http://schemas.openxmlformats.org/drawingml/2006/main" xmlns:r="http://schemas.openxmlformats.org/officeDocument/2006/relationships" xmlns:p="http://schemas.openxmlformats.org/presentationml/2006/main">
+  <p:cSld>
+    <p:spTree>
+      <p:nvGrpSpPr>
+        <p:cNvPr id="1" name=""/>
+        <p:cNvGrpSpPr/>
+        <p:nvPr/>
+      </p:nvGrpSpPr>
+      <p:grpSpPr>
+        <a:xfrm>
+          <a:off x="0" y="0"/>
+          <a:ext cx="0" cy="0"/>
+          <a:chOff x="0" y="0"/>
+          <a:chExt cx="0" cy="0"/>
+        </a:xfrm>
+      </p:grpSpPr>
+      <p:sp>
+        <p:nvSpPr>
+          <p:cNvPr id="3" name="타원 2"/>
+          <p:cNvSpPr/>
+          <p:nvPr/>
+        </p:nvSpPr>
+        <p:spPr>
+          <a:xfrm>
+            <a:off x="4067944" y="74100"/>
+            <a:ext cx="936104" cy="936104"/>
+          </a:xfrm>
+          <a:prstGeom prst="ellipse">
+            <a:avLst/>
+          </a:prstGeom>
+          <a:solidFill>
+            <a:schemeClr val="tx2">
+              <a:lumMod val="75000"/>
+            </a:schemeClr>
+          </a:solidFill>
+          <a:ln>
+            <a:noFill/>
+          </a:ln>
+        </p:spPr>
+        <p:style>
+          <a:lnRef idx="2">
+            <a:schemeClr val="accent1">
+              <a:shade val="50000"/>
+            </a:schemeClr>
+          </a:lnRef>
+          <a:fillRef idx="1">
+            <a:schemeClr val="accent1"/>
+          </a:fillRef>
+          <a:effectRef idx="0">
+            <a:schemeClr val="accent1"/>
+          </a:effectRef>
+          <a:fontRef idx="minor">
+            <a:schemeClr val="lt1"/>
+          </a:fontRef>
+        </p:style>
+        <p:txBody>
+          <a:bodyPr rtlCol="0" anchor="ctr"/>
+          <a:lstStyle/>
+          <a:p>
+            <a:pPr algn="ctr"/>
+            <a:endParaRPr lang="ko-KR" altLang="en-US"/>
+          </a:p>
+        </p:txBody>
+      </p:sp>
+      <p:sp>
+        <p:nvSpPr>
+          <p:cNvPr id="9" name="TextBox 8"/>
+          <p:cNvSpPr txBox="1"/>
+          <p:nvPr/>
+        </p:nvSpPr>
+        <p:spPr>
+          <a:xfrm>
+            <a:off x="3995936" y="479095"/>
+            <a:ext cx="1080120" cy="461665"/>
+          </a:xfrm>
+          <a:prstGeom prst="rect">
+            <a:avLst/>
+          </a:prstGeom>
+          <a:noFill/>
+        </p:spPr>
+        <p:txBody>
+          <a:bodyPr wrap="square" rtlCol="0">
+            <a:spAutoFit/>
+          </a:bodyPr>
+          <a:lstStyle/>
+          <a:p>
+            <a:pPr algn="ctr"/>
+            <a:r>
+              <a:rPr lang="en-US" altLang="ko-KR" sz="2400" dirty="0">
+                <a:solidFill>
+                  <a:schemeClr val="bg1"/>
+                </a:solidFill>
+                <a:latin typeface="HY헤드라인M" pitchFamily="18" charset="-127"/>
+                <a:ea typeface="HY헤드라인M" pitchFamily="18" charset="-127"/>
+              </a:rPr>
+              <a:t>01</a:t>
+            </a:r>
+            <a:endParaRPr lang="ko-KR" altLang="en-US" sz="2400" dirty="0">
+              <a:solidFill>
+                <a:schemeClr val="bg1"/>
+              </a:solidFill>
+              <a:latin typeface="HY헤드라인M" pitchFamily="18" charset="-127"/>
+              <a:ea typeface="HY헤드라인M" pitchFamily="18" charset="-127"/>
+            </a:endParaRPr>
+          </a:p>
+        </p:txBody>
+      </p:sp>
+      <p:sp>
+        <p:nvSpPr>
+          <p:cNvPr id="4" name="TextBox 3"/>
+          <p:cNvSpPr txBox="1"/>
+          <p:nvPr/>
+        </p:nvSpPr>
+        <p:spPr>
+          <a:xfrm>
+            <a:off x="971600" y="1700808"/>
+            <a:ext cx="7200800" cy="2531783"/>
+          </a:xfrm>
+          <a:prstGeom prst="rect">
+            <a:avLst/>
+          </a:prstGeom>
+          <a:noFill/>
+        </p:spPr>
+        <p:txBody>
+          <a:bodyPr wrap="square" rtlCol="0">
+            <a:spAutoFit/>
+          </a:bodyPr>
+          <a:lstStyle/>
+          <a:p>
+            <a:pPr marL="285750" indent="-285750">
+              <a:lnSpc>
+                <a:spcPct val="150000"/>
+              </a:lnSpc>
+              <a:buFont typeface="Arial" panose="020B0604020202020204" pitchFamily="34" charset="0"/>
+              <a:buChar char="•"/>
+            </a:pPr>
+            <a:r>
+              <a:rPr lang="en-US" altLang="ko-KR" dirty="0"/>
+              <a:t>LSTM</a:t>
+            </a:r>
+            <a:r>
+              <a:rPr lang="ko-KR" altLang="en-US" dirty="0"/>
+              <a:t>은 기본 </a:t>
+            </a:r>
+            <a:r>
+              <a:rPr lang="en-US" altLang="ko-KR" dirty="0"/>
+              <a:t>RNN</a:t>
+            </a:r>
+            <a:r>
+              <a:rPr lang="ko-KR" altLang="en-US" dirty="0"/>
+              <a:t>과 비교했을 때 파라미터</a:t>
+            </a:r>
+            <a:r>
+              <a:rPr lang="en-US" altLang="ko-KR" dirty="0"/>
+              <a:t>(</a:t>
+            </a:r>
+            <a:r>
+              <a:rPr lang="ko-KR" altLang="en-US" dirty="0"/>
+              <a:t>학습해야 할 가중치의 개수</a:t>
+            </a:r>
+            <a:r>
+              <a:rPr lang="en-US" altLang="ko-KR" dirty="0"/>
+              <a:t>)</a:t>
+            </a:r>
+            <a:r>
+              <a:rPr lang="ko-KR" altLang="en-US" dirty="0"/>
+              <a:t>가 정확히 약 </a:t>
+            </a:r>
+            <a:r>
+              <a:rPr lang="en-US" altLang="ko-KR" dirty="0"/>
+              <a:t>4</a:t>
+            </a:r>
+            <a:r>
+              <a:rPr lang="ko-KR" altLang="en-US" dirty="0"/>
+              <a:t>배 더 많다</a:t>
+            </a:r>
+            <a:endParaRPr lang="en-US" altLang="ko-KR" dirty="0"/>
+          </a:p>
+          <a:p>
+            <a:pPr marL="285750" indent="-285750">
+              <a:lnSpc>
+                <a:spcPct val="150000"/>
+              </a:lnSpc>
+              <a:buFont typeface="Arial" panose="020B0604020202020204" pitchFamily="34" charset="0"/>
+              <a:buChar char="•"/>
+            </a:pPr>
+            <a:r>
+              <a:rPr lang="ko-KR" altLang="en-US" dirty="0"/>
+              <a:t>모델 내부에 망각</a:t>
+            </a:r>
+            <a:r>
+              <a:rPr lang="en-US" altLang="ko-KR" dirty="0"/>
+              <a:t>, </a:t>
+            </a:r>
+            <a:r>
+              <a:rPr lang="ko-KR" altLang="en-US" dirty="0"/>
+              <a:t>입력</a:t>
+            </a:r>
+            <a:r>
+              <a:rPr lang="en-US" altLang="ko-KR" dirty="0"/>
+              <a:t>, </a:t>
+            </a:r>
+            <a:r>
+              <a:rPr lang="ko-KR" altLang="en-US" dirty="0"/>
+              <a:t>출력 게이트와 셀 상태를 업데이트하는 총 </a:t>
+            </a:r>
+            <a:r>
+              <a:rPr lang="en-US" altLang="ko-KR" dirty="0"/>
+              <a:t>4</a:t>
+            </a:r>
+            <a:r>
+              <a:rPr lang="ko-KR" altLang="en-US" dirty="0"/>
+              <a:t>개의 독립적인 신경망 계층이 동시에 작동하기 때문입니다</a:t>
+            </a:r>
+            <a:r>
+              <a:rPr lang="en-US" altLang="ko-KR" dirty="0"/>
+              <a:t>.</a:t>
+            </a:r>
+          </a:p>
+          <a:p>
+            <a:pPr marL="285750" indent="-285750">
+              <a:lnSpc>
+                <a:spcPct val="150000"/>
+              </a:lnSpc>
+              <a:buFont typeface="Arial" panose="020B0604020202020204" pitchFamily="34" charset="0"/>
+              <a:buChar char="•"/>
+            </a:pPr>
+            <a:r>
+              <a:rPr lang="ko-KR" altLang="en-US" dirty="0"/>
+              <a:t>성능은 뛰어나지만</a:t>
+            </a:r>
+            <a:r>
+              <a:rPr lang="en-US" altLang="ko-KR" dirty="0"/>
+              <a:t>, </a:t>
+            </a:r>
+            <a:r>
+              <a:rPr lang="ko-KR" altLang="en-US" dirty="0"/>
+              <a:t>연산 비용이 높고 학습 시간이 더 길어진다는 트레이드오프</a:t>
+            </a:r>
+            <a:r>
+              <a:rPr lang="en-US" altLang="ko-KR" dirty="0"/>
+              <a:t>(Trade-off)</a:t>
+            </a:r>
+            <a:r>
+              <a:rPr lang="ko-KR" altLang="en-US" dirty="0"/>
+              <a:t>가 존재</a:t>
+            </a:r>
+            <a:endParaRPr lang="en-US" altLang="ko-KR" dirty="0"/>
+          </a:p>
+        </p:txBody>
+      </p:sp>
+      <p:sp>
+        <p:nvSpPr>
+          <p:cNvPr id="6" name="TextBox 5"/>
+          <p:cNvSpPr txBox="1"/>
+          <p:nvPr/>
+        </p:nvSpPr>
+        <p:spPr>
+          <a:xfrm>
+            <a:off x="539552" y="1065096"/>
+            <a:ext cx="7992888" cy="446276"/>
+          </a:xfrm>
+          <a:prstGeom prst="rect">
+            <a:avLst/>
+          </a:prstGeom>
+          <a:noFill/>
+        </p:spPr>
+        <p:txBody>
+          <a:bodyPr wrap="square" rtlCol="0">
+            <a:spAutoFit/>
+          </a:bodyPr>
+          <a:lstStyle/>
+          <a:p>
+            <a:r>
+              <a:rPr lang="en-US" altLang="ko-KR" sz="2300" dirty="0"/>
+              <a:t>RNN</a:t>
+            </a:r>
+            <a:r>
+              <a:rPr lang="ko-KR" altLang="en-US" sz="2300" dirty="0"/>
+              <a:t>보다 더 무거운 이유</a:t>
+            </a:r>
+          </a:p>
+        </p:txBody>
+      </p:sp>
+    </p:spTree>
+    <p:extLst>
+      <p:ext uri="{BB962C8B-B14F-4D97-AF65-F5344CB8AC3E}">
+        <p14:creationId xmlns:p14="http://schemas.microsoft.com/office/powerpoint/2010/main" val="2217725267"/>
+      </p:ext>
+    </p:extLst>
+  </p:cSld>
+  <p:clrMapOvr>
+    <a:masterClrMapping/>
+  </p:clrMapOvr>
+</p:sld>
+</file>
+
+<file path=ppt/slides/slide31.xml><?xml version="1.0" encoding="utf-8"?>
+<p:sld xmlns:a="http://schemas.openxmlformats.org/drawingml/2006/main" xmlns:r="http://schemas.openxmlformats.org/officeDocument/2006/relationships" xmlns:p="http://schemas.openxmlformats.org/presentationml/2006/main">
+  <p:cSld>
+    <p:spTree>
+      <p:nvGrpSpPr>
+        <p:cNvPr id="1" name=""/>
+        <p:cNvGrpSpPr/>
+        <p:nvPr/>
+      </p:nvGrpSpPr>
+      <p:grpSpPr>
+        <a:xfrm>
+          <a:off x="0" y="0"/>
+          <a:ext cx="0" cy="0"/>
+          <a:chOff x="0" y="0"/>
+          <a:chExt cx="0" cy="0"/>
+        </a:xfrm>
+      </p:grpSpPr>
+      <p:sp>
+        <p:nvSpPr>
+          <p:cNvPr id="3" name="타원 2"/>
+          <p:cNvSpPr/>
+          <p:nvPr/>
+        </p:nvSpPr>
+        <p:spPr>
+          <a:xfrm>
+            <a:off x="4067944" y="74100"/>
+            <a:ext cx="936104" cy="936104"/>
+          </a:xfrm>
+          <a:prstGeom prst="ellipse">
+            <a:avLst/>
+          </a:prstGeom>
+          <a:solidFill>
+            <a:schemeClr val="tx2">
+              <a:lumMod val="75000"/>
+            </a:schemeClr>
+          </a:solidFill>
+          <a:ln>
+            <a:noFill/>
+          </a:ln>
+        </p:spPr>
+        <p:style>
+          <a:lnRef idx="2">
+            <a:schemeClr val="accent1">
+              <a:shade val="50000"/>
+            </a:schemeClr>
+          </a:lnRef>
+          <a:fillRef idx="1">
+            <a:schemeClr val="accent1"/>
+          </a:fillRef>
+          <a:effectRef idx="0">
+            <a:schemeClr val="accent1"/>
+          </a:effectRef>
+          <a:fontRef idx="minor">
+            <a:schemeClr val="lt1"/>
+          </a:fontRef>
+        </p:style>
+        <p:txBody>
+          <a:bodyPr rtlCol="0" anchor="ctr"/>
+          <a:lstStyle/>
+          <a:p>
+            <a:pPr algn="ctr"/>
+            <a:endParaRPr lang="ko-KR" altLang="en-US"/>
+          </a:p>
+        </p:txBody>
+      </p:sp>
+      <p:sp>
+        <p:nvSpPr>
+          <p:cNvPr id="9" name="TextBox 8"/>
+          <p:cNvSpPr txBox="1"/>
+          <p:nvPr/>
+        </p:nvSpPr>
+        <p:spPr>
+          <a:xfrm>
+            <a:off x="3995936" y="479095"/>
+            <a:ext cx="1080120" cy="461665"/>
+          </a:xfrm>
+          <a:prstGeom prst="rect">
+            <a:avLst/>
+          </a:prstGeom>
+          <a:noFill/>
+        </p:spPr>
+        <p:txBody>
+          <a:bodyPr wrap="square" rtlCol="0">
+            <a:spAutoFit/>
+          </a:bodyPr>
+          <a:lstStyle/>
+          <a:p>
+            <a:pPr algn="ctr"/>
+            <a:r>
+              <a:rPr lang="en-US" altLang="ko-KR" sz="2400" dirty="0">
+                <a:solidFill>
+                  <a:schemeClr val="bg1"/>
+                </a:solidFill>
+                <a:latin typeface="HY헤드라인M" pitchFamily="18" charset="-127"/>
+                <a:ea typeface="HY헤드라인M" pitchFamily="18" charset="-127"/>
+              </a:rPr>
+              <a:t>01</a:t>
+            </a:r>
+            <a:endParaRPr lang="ko-KR" altLang="en-US" sz="2400" dirty="0">
+              <a:solidFill>
+                <a:schemeClr val="bg1"/>
+              </a:solidFill>
+              <a:latin typeface="HY헤드라인M" pitchFamily="18" charset="-127"/>
+              <a:ea typeface="HY헤드라인M" pitchFamily="18" charset="-127"/>
+            </a:endParaRPr>
+          </a:p>
+        </p:txBody>
+      </p:sp>
+      <p:sp>
+        <p:nvSpPr>
+          <p:cNvPr id="4" name="TextBox 3"/>
+          <p:cNvSpPr txBox="1"/>
+          <p:nvPr/>
+        </p:nvSpPr>
+        <p:spPr>
+          <a:xfrm>
+            <a:off x="971600" y="1700808"/>
+            <a:ext cx="7200800" cy="3362780"/>
+          </a:xfrm>
+          <a:prstGeom prst="rect">
+            <a:avLst/>
+          </a:prstGeom>
+          <a:noFill/>
+        </p:spPr>
+        <p:txBody>
+          <a:bodyPr wrap="square" rtlCol="0">
+            <a:spAutoFit/>
+          </a:bodyPr>
+          <a:lstStyle/>
+          <a:p>
+            <a:pPr marL="285750" indent="-285750">
+              <a:lnSpc>
+                <a:spcPct val="150000"/>
+              </a:lnSpc>
+              <a:buFont typeface="Arial" panose="020B0604020202020204" pitchFamily="34" charset="0"/>
+              <a:buChar char="•"/>
+            </a:pPr>
+            <a:r>
+              <a:rPr lang="ko-KR" altLang="en-US" dirty="0"/>
+              <a:t>구조적 변화</a:t>
+            </a:r>
+            <a:endParaRPr lang="en-US" altLang="ko-KR" dirty="0"/>
+          </a:p>
+          <a:p>
+            <a:pPr marL="742950" lvl="1" indent="-285750">
+              <a:lnSpc>
+                <a:spcPct val="150000"/>
+              </a:lnSpc>
+              <a:buFont typeface="Arial" panose="020B0604020202020204" pitchFamily="34" charset="0"/>
+              <a:buChar char="•"/>
+            </a:pPr>
+            <a:r>
+              <a:rPr lang="ko-KR" altLang="en-US" dirty="0"/>
+              <a:t>코로나</a:t>
+            </a:r>
+            <a:r>
+              <a:rPr lang="en-US" altLang="ko-KR" dirty="0"/>
+              <a:t>19</a:t>
+            </a:r>
+            <a:r>
+              <a:rPr lang="ko-KR" altLang="en-US" dirty="0"/>
+              <a:t>처럼 세상의 룰이 완전히 바뀌었을 때</a:t>
+            </a:r>
+            <a:r>
+              <a:rPr lang="en-US" altLang="ko-KR" dirty="0"/>
+              <a:t>, </a:t>
+            </a:r>
+            <a:r>
+              <a:rPr lang="ko-KR" altLang="en-US" dirty="0"/>
+              <a:t>과거의 패턴이 미래 예측에 오히려 방해가 되므로 망각 게이트는 과거 기억을 </a:t>
+            </a:r>
+            <a:r>
+              <a:rPr lang="en-US" altLang="ko-KR" dirty="0"/>
+              <a:t>0</a:t>
+            </a:r>
+            <a:r>
+              <a:rPr lang="ko-KR" altLang="en-US" dirty="0"/>
+              <a:t>에 가깝게 비워냅니다</a:t>
+            </a:r>
+            <a:r>
+              <a:rPr lang="en-US" altLang="ko-KR" dirty="0"/>
+              <a:t>.</a:t>
+            </a:r>
+          </a:p>
+          <a:p>
+            <a:pPr marL="285750" indent="-285750">
+              <a:lnSpc>
+                <a:spcPct val="150000"/>
+              </a:lnSpc>
+              <a:buFont typeface="Arial" panose="020B0604020202020204" pitchFamily="34" charset="0"/>
+              <a:buChar char="•"/>
+            </a:pPr>
+            <a:r>
+              <a:rPr lang="ko-KR" altLang="en-US" dirty="0"/>
+              <a:t>이상치</a:t>
+            </a:r>
+            <a:endParaRPr lang="en-US" altLang="ko-KR" dirty="0"/>
+          </a:p>
+          <a:p>
+            <a:pPr marL="742950" lvl="1" indent="-285750">
+              <a:lnSpc>
+                <a:spcPct val="150000"/>
+              </a:lnSpc>
+              <a:buFont typeface="Arial" panose="020B0604020202020204" pitchFamily="34" charset="0"/>
+              <a:buChar char="•"/>
+            </a:pPr>
+            <a:r>
+              <a:rPr lang="ko-KR" altLang="en-US" dirty="0"/>
+              <a:t>순간적인 센서 오류 등으로 비정상적인 데이터가 들어올 때</a:t>
+            </a:r>
+            <a:r>
+              <a:rPr lang="en-US" altLang="ko-KR" dirty="0"/>
+              <a:t>, </a:t>
+            </a:r>
+            <a:r>
+              <a:rPr lang="ko-KR" altLang="en-US" dirty="0"/>
+              <a:t>이 노이즈 값이 장기적인 추세를 오염시키지 않도록 망각 게이트가 개입합니다</a:t>
+            </a:r>
+            <a:endParaRPr lang="en-US" altLang="ko-KR" dirty="0"/>
+          </a:p>
+        </p:txBody>
+      </p:sp>
+      <p:sp>
+        <p:nvSpPr>
+          <p:cNvPr id="6" name="TextBox 5"/>
+          <p:cNvSpPr txBox="1"/>
+          <p:nvPr/>
+        </p:nvSpPr>
+        <p:spPr>
+          <a:xfrm>
+            <a:off x="539552" y="1065096"/>
+            <a:ext cx="7992888" cy="446276"/>
+          </a:xfrm>
+          <a:prstGeom prst="rect">
+            <a:avLst/>
+          </a:prstGeom>
+          <a:noFill/>
+        </p:spPr>
+        <p:txBody>
+          <a:bodyPr wrap="square" rtlCol="0">
+            <a:spAutoFit/>
+          </a:bodyPr>
+          <a:lstStyle/>
+          <a:p>
+            <a:r>
+              <a:rPr lang="ko-KR" altLang="en-US" sz="2300" dirty="0"/>
+              <a:t>망각이 필요한 경우</a:t>
+            </a:r>
+          </a:p>
+        </p:txBody>
+      </p:sp>
+    </p:spTree>
+    <p:extLst>
+      <p:ext uri="{BB962C8B-B14F-4D97-AF65-F5344CB8AC3E}">
+        <p14:creationId xmlns:p14="http://schemas.microsoft.com/office/powerpoint/2010/main" val="4166824148"/>
+      </p:ext>
+    </p:extLst>
+  </p:cSld>
+  <p:clrMapOvr>
+    <a:masterClrMapping/>
+  </p:clrMapOvr>
+</p:sld>
+</file>
+
+<file path=ppt/slides/slide32.xml><?xml version="1.0" encoding="utf-8"?>
+<p:sld xmlns:a="http://schemas.openxmlformats.org/drawingml/2006/main" xmlns:r="http://schemas.openxmlformats.org/officeDocument/2006/relationships" xmlns:p="http://schemas.openxmlformats.org/presentationml/2006/main">
+  <p:cSld>
+    <p:spTree>
+      <p:nvGrpSpPr>
+        <p:cNvPr id="1" name=""/>
+        <p:cNvGrpSpPr/>
+        <p:nvPr/>
+      </p:nvGrpSpPr>
+      <p:grpSpPr>
+        <a:xfrm>
+          <a:off x="0" y="0"/>
+          <a:ext cx="0" cy="0"/>
+          <a:chOff x="0" y="0"/>
+          <a:chExt cx="0" cy="0"/>
+        </a:xfrm>
+      </p:grpSpPr>
+      <p:sp>
+        <p:nvSpPr>
+          <p:cNvPr id="3" name="타원 2"/>
+          <p:cNvSpPr/>
+          <p:nvPr/>
+        </p:nvSpPr>
+        <p:spPr>
+          <a:xfrm>
+            <a:off x="4067944" y="74100"/>
+            <a:ext cx="936104" cy="936104"/>
+          </a:xfrm>
+          <a:prstGeom prst="ellipse">
+            <a:avLst/>
+          </a:prstGeom>
+          <a:solidFill>
+            <a:schemeClr val="tx2">
+              <a:lumMod val="75000"/>
+            </a:schemeClr>
+          </a:solidFill>
+          <a:ln>
+            <a:noFill/>
+          </a:ln>
+        </p:spPr>
+        <p:style>
+          <a:lnRef idx="2">
+            <a:schemeClr val="accent1">
+              <a:shade val="50000"/>
+            </a:schemeClr>
+          </a:lnRef>
+          <a:fillRef idx="1">
+            <a:schemeClr val="accent1"/>
+          </a:fillRef>
+          <a:effectRef idx="0">
+            <a:schemeClr val="accent1"/>
+          </a:effectRef>
+          <a:fontRef idx="minor">
+            <a:schemeClr val="lt1"/>
+          </a:fontRef>
+        </p:style>
+        <p:txBody>
+          <a:bodyPr rtlCol="0" anchor="ctr"/>
+          <a:lstStyle/>
+          <a:p>
+            <a:pPr algn="ctr"/>
+            <a:endParaRPr lang="ko-KR" altLang="en-US"/>
+          </a:p>
+        </p:txBody>
+      </p:sp>
+      <p:sp>
+        <p:nvSpPr>
+          <p:cNvPr id="9" name="TextBox 8"/>
+          <p:cNvSpPr txBox="1"/>
+          <p:nvPr/>
+        </p:nvSpPr>
+        <p:spPr>
+          <a:xfrm>
+            <a:off x="3995936" y="479095"/>
+            <a:ext cx="1080120" cy="461665"/>
+          </a:xfrm>
+          <a:prstGeom prst="rect">
+            <a:avLst/>
+          </a:prstGeom>
+          <a:noFill/>
+        </p:spPr>
+        <p:txBody>
+          <a:bodyPr wrap="square" rtlCol="0">
+            <a:spAutoFit/>
+          </a:bodyPr>
+          <a:lstStyle/>
+          <a:p>
+            <a:pPr algn="ctr"/>
+            <a:r>
+              <a:rPr lang="en-US" altLang="ko-KR" sz="2400" dirty="0">
+                <a:solidFill>
+                  <a:schemeClr val="bg1"/>
+                </a:solidFill>
+                <a:latin typeface="HY헤드라인M" pitchFamily="18" charset="-127"/>
+                <a:ea typeface="HY헤드라인M" pitchFamily="18" charset="-127"/>
+              </a:rPr>
+              <a:t>01</a:t>
+            </a:r>
+            <a:endParaRPr lang="ko-KR" altLang="en-US" sz="2400" dirty="0">
+              <a:solidFill>
+                <a:schemeClr val="bg1"/>
+              </a:solidFill>
+              <a:latin typeface="HY헤드라인M" pitchFamily="18" charset="-127"/>
+              <a:ea typeface="HY헤드라인M" pitchFamily="18" charset="-127"/>
+            </a:endParaRPr>
+          </a:p>
+        </p:txBody>
+      </p:sp>
+      <p:sp>
+        <p:nvSpPr>
+          <p:cNvPr id="4" name="TextBox 3"/>
+          <p:cNvSpPr txBox="1"/>
+          <p:nvPr/>
+        </p:nvSpPr>
+        <p:spPr>
+          <a:xfrm>
+            <a:off x="971600" y="4536525"/>
+            <a:ext cx="7200800" cy="1700787"/>
+          </a:xfrm>
+          <a:prstGeom prst="rect">
+            <a:avLst/>
+          </a:prstGeom>
+          <a:noFill/>
+        </p:spPr>
+        <p:txBody>
+          <a:bodyPr wrap="square" rtlCol="0">
+            <a:spAutoFit/>
+          </a:bodyPr>
+          <a:lstStyle/>
+          <a:p>
+            <a:pPr marL="285750" indent="-285750">
+              <a:lnSpc>
+                <a:spcPct val="150000"/>
+              </a:lnSpc>
+              <a:buFont typeface="Arial" panose="020B0604020202020204" pitchFamily="34" charset="0"/>
+              <a:buChar char="•"/>
+            </a:pPr>
+            <a:r>
+              <a:rPr lang="en-US" altLang="ko-KR" dirty="0"/>
+              <a:t>t=50 </a:t>
+            </a:r>
+            <a:r>
+              <a:rPr lang="ko-KR" altLang="en-US" dirty="0"/>
+              <a:t>시점에 발생한 큰 사건</a:t>
+            </a:r>
+            <a:r>
+              <a:rPr lang="en-US" altLang="ko-KR" dirty="0"/>
+              <a:t>(</a:t>
+            </a:r>
+            <a:r>
+              <a:rPr lang="ko-KR" altLang="en-US" dirty="0"/>
+              <a:t>예</a:t>
+            </a:r>
+            <a:r>
+              <a:rPr lang="en-US" altLang="ko-KR" dirty="0"/>
+              <a:t>: </a:t>
+            </a:r>
+            <a:r>
+              <a:rPr lang="ko-KR" altLang="en-US" dirty="0"/>
+              <a:t>전염병</a:t>
+            </a:r>
+            <a:r>
+              <a:rPr lang="en-US" altLang="ko-KR" dirty="0"/>
+              <a:t>, </a:t>
+            </a:r>
+            <a:r>
+              <a:rPr lang="ko-KR" altLang="en-US" dirty="0"/>
+              <a:t>규제 완화</a:t>
+            </a:r>
+            <a:r>
+              <a:rPr lang="en-US" altLang="ko-KR" dirty="0"/>
+              <a:t>)</a:t>
+            </a:r>
+            <a:r>
+              <a:rPr lang="ko-KR" altLang="en-US" dirty="0"/>
+              <a:t>으로 인해 과거의 상승 추세가 무너졌습니다</a:t>
+            </a:r>
+            <a:r>
+              <a:rPr lang="en-US" altLang="ko-KR" dirty="0"/>
+              <a:t>. </a:t>
+            </a:r>
+            <a:r>
+              <a:rPr lang="ko-KR" altLang="en-US" dirty="0"/>
+              <a:t>이때 망각 게이트가 활성화되어 셀 상태를 비워내고 하락장의 새로운 패턴을 장기 기억에 쓰기 시작합니다</a:t>
+            </a:r>
+            <a:r>
+              <a:rPr lang="en-US" altLang="ko-KR" dirty="0"/>
+              <a:t>.</a:t>
+            </a:r>
+          </a:p>
+        </p:txBody>
+      </p:sp>
+      <p:sp>
+        <p:nvSpPr>
+          <p:cNvPr id="6" name="TextBox 5"/>
+          <p:cNvSpPr txBox="1"/>
+          <p:nvPr/>
+        </p:nvSpPr>
+        <p:spPr>
+          <a:xfrm>
+            <a:off x="539552" y="1065096"/>
+            <a:ext cx="7992888" cy="446276"/>
+          </a:xfrm>
+          <a:prstGeom prst="rect">
+            <a:avLst/>
+          </a:prstGeom>
+          <a:noFill/>
+        </p:spPr>
+        <p:txBody>
+          <a:bodyPr wrap="square" rtlCol="0">
+            <a:spAutoFit/>
+          </a:bodyPr>
+          <a:lstStyle/>
+          <a:p>
+            <a:r>
+              <a:rPr lang="ko-KR" altLang="en-US" sz="2300" dirty="0"/>
+              <a:t>구조적 변화와 모델의 대응 </a:t>
+            </a:r>
+          </a:p>
+        </p:txBody>
+      </p:sp>
+      <p:pic>
+        <p:nvPicPr>
+          <p:cNvPr id="7" name="Google Shape;193;p22" descr="image.png">
+            <a:extLst>
+              <a:ext uri="{FF2B5EF4-FFF2-40B4-BE49-F238E27FC236}">
+                <a16:creationId xmlns:a16="http://schemas.microsoft.com/office/drawing/2014/main" id="{D98F7FDC-4F28-4C87-85E4-CD2EFC2E1913}"/>
+              </a:ext>
+            </a:extLst>
+          </p:cNvPr>
+          <p:cNvPicPr preferRelativeResize="0"/>
+          <p:nvPr/>
+        </p:nvPicPr>
+        <p:blipFill rotWithShape="1">
+          <a:blip r:embed="rId3">
+            <a:alphaModFix/>
+          </a:blip>
+          <a:srcRect/>
+          <a:stretch/>
+        </p:blipFill>
+        <p:spPr>
+          <a:xfrm>
+            <a:off x="395536" y="1411634"/>
+            <a:ext cx="8298127" cy="3745558"/>
+          </a:xfrm>
+          <a:prstGeom prst="rect">
+            <a:avLst/>
+          </a:prstGeom>
+          <a:noFill/>
+          <a:ln>
+            <a:noFill/>
+          </a:ln>
+        </p:spPr>
+      </p:pic>
+    </p:spTree>
+    <p:extLst>
+      <p:ext uri="{BB962C8B-B14F-4D97-AF65-F5344CB8AC3E}">
+        <p14:creationId xmlns:p14="http://schemas.microsoft.com/office/powerpoint/2010/main" val="3712326075"/>
+      </p:ext>
+    </p:extLst>
+  </p:cSld>
+  <p:clrMapOvr>
+    <a:masterClrMapping/>
+  </p:clrMapOvr>
+</p:sld>
+</file>
+
+<file path=ppt/slides/slide33.xml><?xml version="1.0" encoding="utf-8"?>
+<p:sld xmlns:a="http://schemas.openxmlformats.org/drawingml/2006/main" xmlns:r="http://schemas.openxmlformats.org/officeDocument/2006/relationships" xmlns:p="http://schemas.openxmlformats.org/presentationml/2006/main">
+  <p:cSld>
+    <p:spTree>
+      <p:nvGrpSpPr>
+        <p:cNvPr id="1" name=""/>
+        <p:cNvGrpSpPr/>
+        <p:nvPr/>
+      </p:nvGrpSpPr>
+      <p:grpSpPr>
+        <a:xfrm>
+          <a:off x="0" y="0"/>
+          <a:ext cx="0" cy="0"/>
+          <a:chOff x="0" y="0"/>
+          <a:chExt cx="0" cy="0"/>
+        </a:xfrm>
+      </p:grpSpPr>
+      <p:sp>
+        <p:nvSpPr>
           <p:cNvPr id="2" name="직사각형 1"/>
           <p:cNvSpPr/>
           <p:nvPr/>
@@ -16240,330 +21150,6 @@
         <p14:creationId xmlns:p14="http://schemas.microsoft.com/office/powerpoint/2010/main" val="2449786974"/>
       </p:ext>
     </p:extLst>
-  </p:cSld>
-  <p:clrMapOvr>
-    <a:masterClrMapping/>
-  </p:clrMapOvr>
-</p:sld>
-</file>
-
-<file path=ppt/slides/slide3.xml><?xml version="1.0" encoding="utf-8"?>
-<p:sld xmlns:a="http://schemas.openxmlformats.org/drawingml/2006/main" xmlns:r="http://schemas.openxmlformats.org/officeDocument/2006/relationships" xmlns:p="http://schemas.openxmlformats.org/presentationml/2006/main">
-  <p:cSld>
-    <p:spTree>
-      <p:nvGrpSpPr>
-        <p:cNvPr id="1" name=""/>
-        <p:cNvGrpSpPr/>
-        <p:nvPr/>
-      </p:nvGrpSpPr>
-      <p:grpSpPr>
-        <a:xfrm>
-          <a:off x="0" y="0"/>
-          <a:ext cx="0" cy="0"/>
-          <a:chOff x="0" y="0"/>
-          <a:chExt cx="0" cy="0"/>
-        </a:xfrm>
-      </p:grpSpPr>
-      <p:sp>
-        <p:nvSpPr>
-          <p:cNvPr id="3" name="타원 2"/>
-          <p:cNvSpPr/>
-          <p:nvPr/>
-        </p:nvSpPr>
-        <p:spPr>
-          <a:xfrm>
-            <a:off x="4067944" y="74100"/>
-            <a:ext cx="936104" cy="936104"/>
-          </a:xfrm>
-          <a:prstGeom prst="ellipse">
-            <a:avLst/>
-          </a:prstGeom>
-          <a:solidFill>
-            <a:schemeClr val="tx2">
-              <a:lumMod val="75000"/>
-            </a:schemeClr>
-          </a:solidFill>
-          <a:ln>
-            <a:noFill/>
-          </a:ln>
-        </p:spPr>
-        <p:style>
-          <a:lnRef idx="2">
-            <a:schemeClr val="accent1">
-              <a:shade val="50000"/>
-            </a:schemeClr>
-          </a:lnRef>
-          <a:fillRef idx="1">
-            <a:schemeClr val="accent1"/>
-          </a:fillRef>
-          <a:effectRef idx="0">
-            <a:schemeClr val="accent1"/>
-          </a:effectRef>
-          <a:fontRef idx="minor">
-            <a:schemeClr val="lt1"/>
-          </a:fontRef>
-        </p:style>
-        <p:txBody>
-          <a:bodyPr rtlCol="0" anchor="ctr"/>
-          <a:lstStyle/>
-          <a:p>
-            <a:pPr algn="ctr"/>
-            <a:endParaRPr lang="ko-KR" altLang="en-US"/>
-          </a:p>
-        </p:txBody>
-      </p:sp>
-      <p:sp>
-        <p:nvSpPr>
-          <p:cNvPr id="9" name="TextBox 8"/>
-          <p:cNvSpPr txBox="1"/>
-          <p:nvPr/>
-        </p:nvSpPr>
-        <p:spPr>
-          <a:xfrm>
-            <a:off x="3995936" y="479095"/>
-            <a:ext cx="1080120" cy="461665"/>
-          </a:xfrm>
-          <a:prstGeom prst="rect">
-            <a:avLst/>
-          </a:prstGeom>
-          <a:noFill/>
-        </p:spPr>
-        <p:txBody>
-          <a:bodyPr wrap="square" rtlCol="0">
-            <a:spAutoFit/>
-          </a:bodyPr>
-          <a:lstStyle/>
-          <a:p>
-            <a:pPr algn="ctr"/>
-            <a:r>
-              <a:rPr lang="en-US" altLang="ko-KR" sz="2400" dirty="0">
-                <a:solidFill>
-                  <a:schemeClr val="bg1"/>
-                </a:solidFill>
-                <a:latin typeface="HY헤드라인M" pitchFamily="18" charset="-127"/>
-                <a:ea typeface="HY헤드라인M" pitchFamily="18" charset="-127"/>
-              </a:rPr>
-              <a:t>01</a:t>
-            </a:r>
-            <a:endParaRPr lang="ko-KR" altLang="en-US" sz="2400" dirty="0">
-              <a:solidFill>
-                <a:schemeClr val="bg1"/>
-              </a:solidFill>
-              <a:latin typeface="HY헤드라인M" pitchFamily="18" charset="-127"/>
-              <a:ea typeface="HY헤드라인M" pitchFamily="18" charset="-127"/>
-            </a:endParaRPr>
-          </a:p>
-        </p:txBody>
-      </p:sp>
-      <p:sp>
-        <p:nvSpPr>
-          <p:cNvPr id="4" name="TextBox 3"/>
-          <p:cNvSpPr txBox="1"/>
-          <p:nvPr/>
-        </p:nvSpPr>
-        <p:spPr>
-          <a:xfrm>
-            <a:off x="971600" y="1700955"/>
-            <a:ext cx="7200800" cy="3693319"/>
-          </a:xfrm>
-          <a:prstGeom prst="rect">
-            <a:avLst/>
-          </a:prstGeom>
-          <a:noFill/>
-        </p:spPr>
-        <p:txBody>
-          <a:bodyPr wrap="square" rtlCol="0">
-            <a:spAutoFit/>
-          </a:bodyPr>
-          <a:lstStyle/>
-          <a:p>
-            <a:pPr marL="285750" indent="-285750">
-              <a:buFont typeface="Arial" panose="020B0604020202020204" pitchFamily="34" charset="0"/>
-              <a:buChar char="•"/>
-            </a:pPr>
-            <a:r>
-              <a:rPr lang="ko-KR" altLang="en-US" dirty="0"/>
-              <a:t>인공지능 </a:t>
-            </a:r>
-            <a:r>
-              <a:rPr lang="en-US" altLang="ko-KR" dirty="0"/>
-              <a:t>(AI)</a:t>
-            </a:r>
-          </a:p>
-          <a:p>
-            <a:pPr marL="742950" lvl="1" indent="-285750">
-              <a:buFont typeface="Arial" panose="020B0604020202020204" pitchFamily="34" charset="0"/>
-              <a:buChar char="•"/>
-            </a:pPr>
-            <a:r>
-              <a:rPr lang="ko-KR" altLang="en-US" dirty="0"/>
-              <a:t>사람의 지능을 흉내 내는 기계의 모든 기술 </a:t>
-            </a:r>
-            <a:r>
-              <a:rPr lang="en-US" altLang="ko-KR" dirty="0"/>
-              <a:t>(</a:t>
-            </a:r>
-            <a:r>
-              <a:rPr lang="ko-KR" altLang="en-US" dirty="0"/>
-              <a:t>가장 넓은 의미</a:t>
-            </a:r>
-            <a:r>
-              <a:rPr lang="en-US" altLang="ko-KR" dirty="0"/>
-              <a:t>)</a:t>
-            </a:r>
-            <a:br>
-              <a:rPr lang="en-US" altLang="ko-KR" dirty="0"/>
-            </a:br>
-            <a:endParaRPr lang="en-US" altLang="ko-KR" dirty="0"/>
-          </a:p>
-          <a:p>
-            <a:pPr marL="285750" indent="-285750">
-              <a:buFont typeface="Arial" panose="020B0604020202020204" pitchFamily="34" charset="0"/>
-              <a:buChar char="•"/>
-            </a:pPr>
-            <a:r>
-              <a:rPr lang="ko-KR" altLang="en-US" dirty="0" err="1"/>
-              <a:t>머신러닝</a:t>
-            </a:r>
-            <a:r>
-              <a:rPr lang="ko-KR" altLang="en-US" dirty="0"/>
-              <a:t> </a:t>
-            </a:r>
-            <a:r>
-              <a:rPr lang="en-US" altLang="ko-KR" dirty="0"/>
-              <a:t>(ML)</a:t>
-            </a:r>
-          </a:p>
-          <a:p>
-            <a:pPr marL="742950" lvl="1" indent="-285750">
-              <a:buFont typeface="Arial" panose="020B0604020202020204" pitchFamily="34" charset="0"/>
-              <a:buChar char="•"/>
-            </a:pPr>
-            <a:r>
-              <a:rPr lang="ko-KR" altLang="en-US" dirty="0"/>
-              <a:t>사람이 규칙을 일일이 짜주지 않고</a:t>
-            </a:r>
-            <a:r>
-              <a:rPr lang="en-US" altLang="ko-KR" dirty="0"/>
-              <a:t>, </a:t>
-            </a:r>
-            <a:r>
-              <a:rPr lang="ko-KR" altLang="en-US" dirty="0"/>
-              <a:t>데이터를 주어 기계가 스스로 규칙을 학습하게 만드는 방법론</a:t>
-            </a:r>
-            <a:br>
-              <a:rPr lang="en-US" altLang="ko-KR" dirty="0"/>
-            </a:br>
-            <a:endParaRPr lang="en-US" altLang="ko-KR" dirty="0"/>
-          </a:p>
-          <a:p>
-            <a:pPr marL="285750" indent="-285750">
-              <a:buFont typeface="Arial" panose="020B0604020202020204" pitchFamily="34" charset="0"/>
-              <a:buChar char="•"/>
-            </a:pPr>
-            <a:r>
-              <a:rPr lang="ko-KR" altLang="en-US" dirty="0"/>
-              <a:t>딥러닝 </a:t>
-            </a:r>
-            <a:r>
-              <a:rPr lang="en-US" altLang="ko-KR" dirty="0"/>
-              <a:t>(DL)</a:t>
-            </a:r>
-          </a:p>
-          <a:p>
-            <a:pPr marL="742950" lvl="1" indent="-285750">
-              <a:buFont typeface="Arial" panose="020B0604020202020204" pitchFamily="34" charset="0"/>
-              <a:buChar char="•"/>
-            </a:pPr>
-            <a:r>
-              <a:rPr lang="ko-KR" altLang="en-US" dirty="0" err="1"/>
-              <a:t>머신러닝</a:t>
-            </a:r>
-            <a:r>
-              <a:rPr lang="ko-KR" altLang="en-US" dirty="0"/>
-              <a:t> 중에서도 사람의 뇌</a:t>
-            </a:r>
-            <a:r>
-              <a:rPr lang="en-US" altLang="ko-KR" dirty="0"/>
-              <a:t>(</a:t>
-            </a:r>
-            <a:r>
-              <a:rPr lang="ko-KR" altLang="en-US" dirty="0"/>
-              <a:t>신경망</a:t>
-            </a:r>
-            <a:r>
-              <a:rPr lang="en-US" altLang="ko-KR" dirty="0"/>
-              <a:t>) </a:t>
-            </a:r>
-            <a:r>
-              <a:rPr lang="ko-KR" altLang="en-US" dirty="0"/>
-              <a:t>구조를 모방하여 복잡하고 방대한 데이터를 처리하는 최신 기술</a:t>
-            </a:r>
-            <a:r>
-              <a:rPr lang="en-US" altLang="ko-KR" dirty="0"/>
-              <a:t>.</a:t>
-            </a:r>
-          </a:p>
-          <a:p>
-            <a:br>
-              <a:rPr lang="en-US" altLang="ko-KR" dirty="0"/>
-            </a:br>
-            <a:r>
-              <a:rPr lang="en-US" altLang="ko-KR" dirty="0"/>
-              <a:t>	</a:t>
-            </a:r>
-          </a:p>
-          <a:p>
-            <a:pPr marL="285750" indent="-285750">
-              <a:buFont typeface="Arial" panose="020B0604020202020204" pitchFamily="34" charset="0"/>
-              <a:buChar char="•"/>
-            </a:pPr>
-            <a:endParaRPr lang="en-US" altLang="ko-KR" dirty="0"/>
-          </a:p>
-        </p:txBody>
-      </p:sp>
-      <p:sp>
-        <p:nvSpPr>
-          <p:cNvPr id="6" name="TextBox 5"/>
-          <p:cNvSpPr txBox="1"/>
-          <p:nvPr/>
-        </p:nvSpPr>
-        <p:spPr>
-          <a:xfrm>
-            <a:off x="539552" y="1065096"/>
-            <a:ext cx="7992888" cy="446276"/>
-          </a:xfrm>
-          <a:prstGeom prst="rect">
-            <a:avLst/>
-          </a:prstGeom>
-          <a:noFill/>
-        </p:spPr>
-        <p:txBody>
-          <a:bodyPr wrap="square" rtlCol="0">
-            <a:spAutoFit/>
-          </a:bodyPr>
-          <a:lstStyle/>
-          <a:p>
-            <a:r>
-              <a:rPr lang="en-US" altLang="ko-KR" sz="2300" dirty="0"/>
-              <a:t>AI, </a:t>
-            </a:r>
-            <a:r>
-              <a:rPr lang="ko-KR" altLang="en-US" sz="2300" dirty="0" err="1"/>
-              <a:t>머신러닝</a:t>
-            </a:r>
-            <a:r>
-              <a:rPr lang="en-US" altLang="ko-KR" sz="2300" dirty="0"/>
-              <a:t>, </a:t>
-            </a:r>
-            <a:r>
-              <a:rPr lang="ko-KR" altLang="en-US" sz="2300" dirty="0"/>
-              <a:t>딥러닝</a:t>
-            </a:r>
-          </a:p>
-        </p:txBody>
-      </p:sp>
-    </p:spTree>
   </p:cSld>
   <p:clrMapOvr>
     <a:masterClrMapping/>
